--- a/files/inst414_spring2026/lectures/lecture_9a_RF.pptx
+++ b/files/inst414_spring2026/lectures/lecture_9a_RF.pptx
@@ -10,45 +10,36 @@
     <p:sldId id="647" r:id="rId4"/>
     <p:sldId id="741" r:id="rId5"/>
     <p:sldId id="711" r:id="rId6"/>
-    <p:sldId id="774" r:id="rId7"/>
-    <p:sldId id="775" r:id="rId8"/>
-    <p:sldId id="776" r:id="rId9"/>
-    <p:sldId id="777" r:id="rId10"/>
-    <p:sldId id="778" r:id="rId11"/>
-    <p:sldId id="779" r:id="rId12"/>
-    <p:sldId id="780" r:id="rId13"/>
-    <p:sldId id="720" r:id="rId14"/>
-    <p:sldId id="742" r:id="rId15"/>
-    <p:sldId id="743" r:id="rId16"/>
-    <p:sldId id="721" r:id="rId17"/>
-    <p:sldId id="722" r:id="rId18"/>
-    <p:sldId id="696" r:id="rId19"/>
-    <p:sldId id="672" r:id="rId20"/>
-    <p:sldId id="772" r:id="rId21"/>
-    <p:sldId id="673" r:id="rId22"/>
-    <p:sldId id="733" r:id="rId23"/>
-    <p:sldId id="697" r:id="rId24"/>
-    <p:sldId id="698" r:id="rId25"/>
-    <p:sldId id="649" r:id="rId26"/>
-    <p:sldId id="699" r:id="rId27"/>
-    <p:sldId id="700" r:id="rId28"/>
-    <p:sldId id="701" r:id="rId29"/>
-    <p:sldId id="679" r:id="rId30"/>
-    <p:sldId id="702" r:id="rId31"/>
-    <p:sldId id="724" r:id="rId32"/>
-    <p:sldId id="767" r:id="rId33"/>
-    <p:sldId id="656" r:id="rId34"/>
-    <p:sldId id="704" r:id="rId35"/>
-    <p:sldId id="659" r:id="rId36"/>
-    <p:sldId id="658" r:id="rId37"/>
-    <p:sldId id="657" r:id="rId38"/>
-    <p:sldId id="738" r:id="rId39"/>
-    <p:sldId id="705" r:id="rId40"/>
-    <p:sldId id="768" r:id="rId41"/>
-    <p:sldId id="769" r:id="rId42"/>
-    <p:sldId id="771" r:id="rId43"/>
-    <p:sldId id="707" r:id="rId44"/>
-    <p:sldId id="703" r:id="rId45"/>
+    <p:sldId id="720" r:id="rId7"/>
+    <p:sldId id="742" r:id="rId8"/>
+    <p:sldId id="743" r:id="rId9"/>
+    <p:sldId id="721" r:id="rId10"/>
+    <p:sldId id="722" r:id="rId11"/>
+    <p:sldId id="696" r:id="rId12"/>
+    <p:sldId id="672" r:id="rId13"/>
+    <p:sldId id="673" r:id="rId14"/>
+    <p:sldId id="697" r:id="rId15"/>
+    <p:sldId id="698" r:id="rId16"/>
+    <p:sldId id="649" r:id="rId17"/>
+    <p:sldId id="699" r:id="rId18"/>
+    <p:sldId id="700" r:id="rId19"/>
+    <p:sldId id="701" r:id="rId20"/>
+    <p:sldId id="679" r:id="rId21"/>
+    <p:sldId id="702" r:id="rId22"/>
+    <p:sldId id="724" r:id="rId23"/>
+    <p:sldId id="767" r:id="rId24"/>
+    <p:sldId id="656" r:id="rId25"/>
+    <p:sldId id="704" r:id="rId26"/>
+    <p:sldId id="659" r:id="rId27"/>
+    <p:sldId id="658" r:id="rId28"/>
+    <p:sldId id="657" r:id="rId29"/>
+    <p:sldId id="738" r:id="rId30"/>
+    <p:sldId id="705" r:id="rId31"/>
+    <p:sldId id="768" r:id="rId32"/>
+    <p:sldId id="769" r:id="rId33"/>
+    <p:sldId id="771" r:id="rId34"/>
+    <p:sldId id="707" r:id="rId35"/>
+    <p:sldId id="703" r:id="rId36"/>
   </p:sldIdLst>
   <p:sldSz cx="12192000" cy="6858000"/>
   <p:notesSz cx="6858000" cy="9144000"/>
@@ -147,6 +138,11 @@
       </a:defRPr>
     </a:lvl9pPr>
   </p:defaultTextStyle>
+  <p:extLst>
+    <p:ext uri="{EFAFB233-063F-42B5-8137-9DF3F51BA10A}">
+      <p15:sldGuideLst xmlns:p15="http://schemas.microsoft.com/office/powerpoint/2012/main"/>
+    </p:ext>
+  </p:extLst>
 </p:presentation>
 </file>
 
@@ -297,7 +293,7 @@
           <a:p>
             <a:fld id="{D7BAAD77-0952-4A0F-B406-0526A080BBE6}" type="datetimeFigureOut">
               <a:rPr lang="en-US" smtClean="0"/>
-              <a:t>3/30/2026</a:t>
+              <a:t>3/31/2026</a:t>
             </a:fld>
             <a:endParaRPr lang="en-US"/>
           </a:p>
@@ -495,7 +491,7 @@
           <a:p>
             <a:fld id="{D7BAAD77-0952-4A0F-B406-0526A080BBE6}" type="datetimeFigureOut">
               <a:rPr lang="en-US" smtClean="0"/>
-              <a:t>3/30/2026</a:t>
+              <a:t>3/31/2026</a:t>
             </a:fld>
             <a:endParaRPr lang="en-US"/>
           </a:p>
@@ -703,7 +699,7 @@
           <a:p>
             <a:fld id="{D7BAAD77-0952-4A0F-B406-0526A080BBE6}" type="datetimeFigureOut">
               <a:rPr lang="en-US" smtClean="0"/>
-              <a:t>3/30/2026</a:t>
+              <a:t>3/31/2026</a:t>
             </a:fld>
             <a:endParaRPr lang="en-US"/>
           </a:p>
@@ -937,7 +933,7 @@
             <a:fld id="{49B836C9-039A-46E3-8B8C-694019AC96F9}" type="datetimeFigureOut">
               <a:rPr lang="en-US" smtClean="0"/>
               <a:pPr/>
-              <a:t>3/30/2026</a:t>
+              <a:t>3/31/2026</a:t>
             </a:fld>
             <a:endParaRPr lang="en-US"/>
           </a:p>
@@ -1196,7 +1192,7 @@
             <a:fld id="{49B836C9-039A-46E3-8B8C-694019AC96F9}" type="datetimeFigureOut">
               <a:rPr lang="en-US" smtClean="0"/>
               <a:pPr/>
-              <a:t>3/30/2026</a:t>
+              <a:t>3/31/2026</a:t>
             </a:fld>
             <a:endParaRPr lang="en-US"/>
           </a:p>
@@ -1486,7 +1482,7 @@
           <a:p>
             <a:fld id="{49B836C9-039A-46E3-8B8C-694019AC96F9}" type="datetimeFigureOut">
               <a:rPr lang="en-US" smtClean="0"/>
-              <a:t>3/30/2026</a:t>
+              <a:t>3/31/2026</a:t>
             </a:fld>
             <a:endParaRPr lang="en-US"/>
           </a:p>
@@ -1751,7 +1747,7 @@
           <a:p>
             <a:fld id="{49B836C9-039A-46E3-8B8C-694019AC96F9}" type="datetimeFigureOut">
               <a:rPr lang="en-US" smtClean="0"/>
-              <a:t>3/30/2026</a:t>
+              <a:t>3/31/2026</a:t>
             </a:fld>
             <a:endParaRPr lang="en-US"/>
           </a:p>
@@ -2163,7 +2159,7 @@
           <a:p>
             <a:fld id="{49B836C9-039A-46E3-8B8C-694019AC96F9}" type="datetimeFigureOut">
               <a:rPr lang="en-US" smtClean="0"/>
-              <a:t>3/30/2026</a:t>
+              <a:t>3/31/2026</a:t>
             </a:fld>
             <a:endParaRPr lang="en-US"/>
           </a:p>
@@ -2304,7 +2300,7 @@
           <a:p>
             <a:fld id="{49B836C9-039A-46E3-8B8C-694019AC96F9}" type="datetimeFigureOut">
               <a:rPr lang="en-US" smtClean="0"/>
-              <a:t>3/30/2026</a:t>
+              <a:t>3/31/2026</a:t>
             </a:fld>
             <a:endParaRPr lang="en-US"/>
           </a:p>
@@ -2417,7 +2413,7 @@
           <a:p>
             <a:fld id="{49B836C9-039A-46E3-8B8C-694019AC96F9}" type="datetimeFigureOut">
               <a:rPr lang="en-US" smtClean="0"/>
-              <a:t>3/30/2026</a:t>
+              <a:t>3/31/2026</a:t>
             </a:fld>
             <a:endParaRPr lang="en-US"/>
           </a:p>
@@ -2728,7 +2724,7 @@
           <a:p>
             <a:fld id="{49B836C9-039A-46E3-8B8C-694019AC96F9}" type="datetimeFigureOut">
               <a:rPr lang="en-US" smtClean="0"/>
-              <a:t>3/30/2026</a:t>
+              <a:t>3/31/2026</a:t>
             </a:fld>
             <a:endParaRPr lang="en-US"/>
           </a:p>
@@ -2926,7 +2922,7 @@
           <a:p>
             <a:fld id="{D7BAAD77-0952-4A0F-B406-0526A080BBE6}" type="datetimeFigureOut">
               <a:rPr lang="en-US" smtClean="0"/>
-              <a:t>3/30/2026</a:t>
+              <a:t>3/31/2026</a:t>
             </a:fld>
             <a:endParaRPr lang="en-US"/>
           </a:p>
@@ -3214,7 +3210,7 @@
           <a:p>
             <a:fld id="{49B836C9-039A-46E3-8B8C-694019AC96F9}" type="datetimeFigureOut">
               <a:rPr lang="en-US" smtClean="0"/>
-              <a:t>3/30/2026</a:t>
+              <a:t>3/31/2026</a:t>
             </a:fld>
             <a:endParaRPr lang="en-US"/>
           </a:p>
@@ -3412,7 +3408,7 @@
           <a:p>
             <a:fld id="{49B836C9-039A-46E3-8B8C-694019AC96F9}" type="datetimeFigureOut">
               <a:rPr lang="en-US" smtClean="0"/>
-              <a:t>3/30/2026</a:t>
+              <a:t>3/31/2026</a:t>
             </a:fld>
             <a:endParaRPr lang="en-US"/>
           </a:p>
@@ -3620,7 +3616,7 @@
           <a:p>
             <a:fld id="{49B836C9-039A-46E3-8B8C-694019AC96F9}" type="datetimeFigureOut">
               <a:rPr lang="en-US" smtClean="0"/>
-              <a:t>3/30/2026</a:t>
+              <a:t>3/31/2026</a:t>
             </a:fld>
             <a:endParaRPr lang="en-US"/>
           </a:p>
@@ -3895,7 +3891,7 @@
           <a:p>
             <a:fld id="{D7BAAD77-0952-4A0F-B406-0526A080BBE6}" type="datetimeFigureOut">
               <a:rPr lang="en-US" smtClean="0"/>
-              <a:t>3/30/2026</a:t>
+              <a:t>3/31/2026</a:t>
             </a:fld>
             <a:endParaRPr lang="en-US"/>
           </a:p>
@@ -4160,7 +4156,7 @@
           <a:p>
             <a:fld id="{D7BAAD77-0952-4A0F-B406-0526A080BBE6}" type="datetimeFigureOut">
               <a:rPr lang="en-US" smtClean="0"/>
-              <a:t>3/30/2026</a:t>
+              <a:t>3/31/2026</a:t>
             </a:fld>
             <a:endParaRPr lang="en-US"/>
           </a:p>
@@ -4572,7 +4568,7 @@
           <a:p>
             <a:fld id="{D7BAAD77-0952-4A0F-B406-0526A080BBE6}" type="datetimeFigureOut">
               <a:rPr lang="en-US" smtClean="0"/>
-              <a:t>3/30/2026</a:t>
+              <a:t>3/31/2026</a:t>
             </a:fld>
             <a:endParaRPr lang="en-US"/>
           </a:p>
@@ -4713,7 +4709,7 @@
           <a:p>
             <a:fld id="{D7BAAD77-0952-4A0F-B406-0526A080BBE6}" type="datetimeFigureOut">
               <a:rPr lang="en-US" smtClean="0"/>
-              <a:t>3/30/2026</a:t>
+              <a:t>3/31/2026</a:t>
             </a:fld>
             <a:endParaRPr lang="en-US"/>
           </a:p>
@@ -4826,7 +4822,7 @@
           <a:p>
             <a:fld id="{D7BAAD77-0952-4A0F-B406-0526A080BBE6}" type="datetimeFigureOut">
               <a:rPr lang="en-US" smtClean="0"/>
-              <a:t>3/30/2026</a:t>
+              <a:t>3/31/2026</a:t>
             </a:fld>
             <a:endParaRPr lang="en-US"/>
           </a:p>
@@ -5137,7 +5133,7 @@
           <a:p>
             <a:fld id="{D7BAAD77-0952-4A0F-B406-0526A080BBE6}" type="datetimeFigureOut">
               <a:rPr lang="en-US" smtClean="0"/>
-              <a:t>3/30/2026</a:t>
+              <a:t>3/31/2026</a:t>
             </a:fld>
             <a:endParaRPr lang="en-US"/>
           </a:p>
@@ -5425,7 +5421,7 @@
           <a:p>
             <a:fld id="{D7BAAD77-0952-4A0F-B406-0526A080BBE6}" type="datetimeFigureOut">
               <a:rPr lang="en-US" smtClean="0"/>
-              <a:t>3/30/2026</a:t>
+              <a:t>3/31/2026</a:t>
             </a:fld>
             <a:endParaRPr lang="en-US"/>
           </a:p>
@@ -5669,7 +5665,7 @@
             <a:fld id="{D7BAAD77-0952-4A0F-B406-0526A080BBE6}" type="datetimeFigureOut">
               <a:rPr lang="en-US" smtClean="0"/>
               <a:pPr/>
-              <a:t>3/30/2026</a:t>
+              <a:t>3/31/2026</a:t>
             </a:fld>
             <a:endParaRPr lang="en-US"/>
           </a:p>
@@ -6242,7 +6238,7 @@
           <a:p>
             <a:fld id="{49B836C9-039A-46E3-8B8C-694019AC96F9}" type="datetimeFigureOut">
               <a:rPr lang="en-US" smtClean="0"/>
-              <a:t>3/30/2026</a:t>
+              <a:t>3/31/2026</a:t>
             </a:fld>
             <a:endParaRPr lang="en-US"/>
           </a:p>
@@ -6737,3139 +6733,6 @@
 <file path=ppt/slides/slide10.xml><?xml version="1.0" encoding="utf-8"?>
 <p:sld xmlns:a="http://schemas.openxmlformats.org/drawingml/2006/main" xmlns:r="http://schemas.openxmlformats.org/officeDocument/2006/relationships" xmlns:p="http://schemas.openxmlformats.org/presentationml/2006/main">
   <p:cSld>
-    <p:spTree>
-      <p:nvGrpSpPr>
-        <p:cNvPr id="1" name=""/>
-        <p:cNvGrpSpPr/>
-        <p:nvPr/>
-      </p:nvGrpSpPr>
-      <p:grpSpPr>
-        <a:xfrm>
-          <a:off x="0" y="0"/>
-          <a:ext cx="0" cy="0"/>
-          <a:chOff x="0" y="0"/>
-          <a:chExt cx="0" cy="0"/>
-        </a:xfrm>
-      </p:grpSpPr>
-      <p:sp>
-        <p:nvSpPr>
-          <p:cNvPr id="2" name="Title 1">
-            <a:extLst>
-              <a:ext uri="{FF2B5EF4-FFF2-40B4-BE49-F238E27FC236}">
-                <a16:creationId xmlns:a16="http://schemas.microsoft.com/office/drawing/2014/main" id="{022A1C08-F088-44F3-A554-2C9BCDFFFF90}"/>
-              </a:ext>
-            </a:extLst>
-          </p:cNvPr>
-          <p:cNvSpPr>
-            <a:spLocks noGrp="1"/>
-          </p:cNvSpPr>
-          <p:nvPr>
-            <p:ph type="title"/>
-          </p:nvPr>
-        </p:nvSpPr>
-        <p:spPr/>
-        <p:txBody>
-          <a:bodyPr/>
-          <a:lstStyle/>
-          <a:p>
-            <a:r>
-              <a:rPr lang="en-US" dirty="0"/>
-              <a:t>Let’s Predict</a:t>
-            </a:r>
-          </a:p>
-        </p:txBody>
-      </p:sp>
-      <p:sp>
-        <p:nvSpPr>
-          <p:cNvPr id="3" name="Content Placeholder 2">
-            <a:extLst>
-              <a:ext uri="{FF2B5EF4-FFF2-40B4-BE49-F238E27FC236}">
-                <a16:creationId xmlns:a16="http://schemas.microsoft.com/office/drawing/2014/main" id="{A79DB37C-7C75-41C8-821A-F09082E29E87}"/>
-              </a:ext>
-            </a:extLst>
-          </p:cNvPr>
-          <p:cNvSpPr>
-            <a:spLocks noGrp="1"/>
-          </p:cNvSpPr>
-          <p:nvPr>
-            <p:ph idx="1"/>
-          </p:nvPr>
-        </p:nvSpPr>
-        <p:spPr>
-          <a:xfrm>
-            <a:off x="5988737" y="1947683"/>
-            <a:ext cx="2691581" cy="455459"/>
-          </a:xfrm>
-        </p:spPr>
-        <p:txBody>
-          <a:bodyPr>
-            <a:normAutofit lnSpcReduction="10000"/>
-          </a:bodyPr>
-          <a:lstStyle/>
-          <a:p>
-            <a:pPr marL="0" indent="0">
-              <a:buNone/>
-            </a:pPr>
-            <a:r>
-              <a:rPr lang="en-US" dirty="0"/>
-              <a:t>Training Data</a:t>
-            </a:r>
-          </a:p>
-        </p:txBody>
-      </p:sp>
-      <p:pic>
-        <p:nvPicPr>
-          <p:cNvPr id="2050" name="Picture 2" descr="By6Y9ht39imXAAAAAElFTkSuQmCC (482×357)">
-            <a:extLst>
-              <a:ext uri="{FF2B5EF4-FFF2-40B4-BE49-F238E27FC236}">
-                <a16:creationId xmlns:a16="http://schemas.microsoft.com/office/drawing/2014/main" id="{DD123E85-49DA-44AE-B8DC-522426C0FCC9}"/>
-              </a:ext>
-            </a:extLst>
-          </p:cNvPr>
-          <p:cNvPicPr>
-            <a:picLocks noChangeAspect="1" noChangeArrowheads="1"/>
-          </p:cNvPicPr>
-          <p:nvPr/>
-        </p:nvPicPr>
-        <p:blipFill>
-          <a:blip r:embed="rId2">
-            <a:extLst>
-              <a:ext uri="{28A0092B-C50C-407E-A947-70E740481C1C}">
-                <a14:useLocalDpi xmlns:a14="http://schemas.microsoft.com/office/drawing/2010/main" val="0"/>
-              </a:ext>
-            </a:extLst>
-          </a:blip>
-          <a:srcRect/>
-          <a:stretch>
-            <a:fillRect/>
-          </a:stretch>
-        </p:blipFill>
-        <p:spPr bwMode="auto">
-          <a:xfrm>
-            <a:off x="5837718" y="2446542"/>
-            <a:ext cx="4591050" cy="3400425"/>
-          </a:xfrm>
-          <a:prstGeom prst="rect">
-            <a:avLst/>
-          </a:prstGeom>
-          <a:noFill/>
-          <a:extLst>
-            <a:ext uri="{909E8E84-426E-40DD-AFC4-6F175D3DCCD1}">
-              <a14:hiddenFill xmlns:a14="http://schemas.microsoft.com/office/drawing/2010/main">
-                <a:solidFill>
-                  <a:srgbClr val="FFFFFF"/>
-                </a:solidFill>
-              </a14:hiddenFill>
-            </a:ext>
-          </a:extLst>
-        </p:spPr>
-      </p:pic>
-      <p:sp>
-        <p:nvSpPr>
-          <p:cNvPr id="4" name="Rectangle 3">
-            <a:extLst>
-              <a:ext uri="{FF2B5EF4-FFF2-40B4-BE49-F238E27FC236}">
-                <a16:creationId xmlns:a16="http://schemas.microsoft.com/office/drawing/2014/main" id="{E08CF654-B655-4278-BCA2-A0592C74BE10}"/>
-              </a:ext>
-            </a:extLst>
-          </p:cNvPr>
-          <p:cNvSpPr/>
-          <p:nvPr/>
-        </p:nvSpPr>
-        <p:spPr>
-          <a:xfrm>
-            <a:off x="8280061" y="2348132"/>
-            <a:ext cx="2521668" cy="3559277"/>
-          </a:xfrm>
-          <a:prstGeom prst="rect">
-            <a:avLst/>
-          </a:prstGeom>
-          <a:solidFill>
-            <a:srgbClr val="FADECB">
-              <a:alpha val="49000"/>
-            </a:srgbClr>
-          </a:solidFill>
-          <a:ln>
-            <a:noFill/>
-          </a:ln>
-        </p:spPr>
-        <p:style>
-          <a:lnRef idx="2">
-            <a:schemeClr val="accent1">
-              <a:shade val="50000"/>
-            </a:schemeClr>
-          </a:lnRef>
-          <a:fillRef idx="1">
-            <a:schemeClr val="accent1"/>
-          </a:fillRef>
-          <a:effectRef idx="0">
-            <a:schemeClr val="accent1"/>
-          </a:effectRef>
-          <a:fontRef idx="minor">
-            <a:schemeClr val="lt1"/>
-          </a:fontRef>
-        </p:style>
-        <p:txBody>
-          <a:bodyPr rtlCol="0" anchor="ctr"/>
-          <a:lstStyle/>
-          <a:p>
-            <a:pPr marL="0" marR="0" lvl="0" indent="0" algn="ctr" defTabSz="914400" rtl="0" eaLnBrk="1" fontAlgn="auto" latinLnBrk="0" hangingPunct="1">
-              <a:lnSpc>
-                <a:spcPct val="100000"/>
-              </a:lnSpc>
-              <a:spcBef>
-                <a:spcPts val="0"/>
-              </a:spcBef>
-              <a:spcAft>
-                <a:spcPts val="0"/>
-              </a:spcAft>
-              <a:buClrTx/>
-              <a:buSzTx/>
-              <a:buFontTx/>
-              <a:buNone/>
-              <a:tabLst/>
-              <a:defRPr/>
-            </a:pPr>
-            <a:endParaRPr kumimoji="0" lang="en-US" sz="1800" b="0" i="0" u="none" strike="noStrike" kern="1200" cap="none" spc="0" normalizeH="0" baseline="0" noProof="0">
-              <a:ln>
-                <a:noFill/>
-              </a:ln>
-              <a:solidFill>
-                <a:prstClr val="white"/>
-              </a:solidFill>
-              <a:effectLst/>
-              <a:uLnTx/>
-              <a:uFillTx/>
-              <a:latin typeface="Calibri" panose="020F0502020204030204"/>
-              <a:ea typeface="+mn-ea"/>
-              <a:cs typeface="+mn-cs"/>
-            </a:endParaRPr>
-          </a:p>
-        </p:txBody>
-      </p:sp>
-      <p:cxnSp>
-        <p:nvCxnSpPr>
-          <p:cNvPr id="10" name="Straight Connector 9">
-            <a:extLst>
-              <a:ext uri="{FF2B5EF4-FFF2-40B4-BE49-F238E27FC236}">
-                <a16:creationId xmlns:a16="http://schemas.microsoft.com/office/drawing/2014/main" id="{C1C41949-E3D7-956A-6608-150D83B8DE82}"/>
-              </a:ext>
-            </a:extLst>
-          </p:cNvPr>
-          <p:cNvCxnSpPr>
-            <a:cxnSpLocks/>
-          </p:cNvCxnSpPr>
-          <p:nvPr/>
-        </p:nvCxnSpPr>
-        <p:spPr>
-          <a:xfrm flipV="1">
-            <a:off x="6658493" y="2446542"/>
-            <a:ext cx="0" cy="3139611"/>
-          </a:xfrm>
-          <a:prstGeom prst="line">
-            <a:avLst/>
-          </a:prstGeom>
-          <a:ln w="25400"/>
-        </p:spPr>
-        <p:style>
-          <a:lnRef idx="1">
-            <a:schemeClr val="accent1"/>
-          </a:lnRef>
-          <a:fillRef idx="0">
-            <a:schemeClr val="accent1"/>
-          </a:fillRef>
-          <a:effectRef idx="0">
-            <a:schemeClr val="accent1"/>
-          </a:effectRef>
-          <a:fontRef idx="minor">
-            <a:schemeClr val="tx1"/>
-          </a:fontRef>
-        </p:style>
-      </p:cxnSp>
-      <p:cxnSp>
-        <p:nvCxnSpPr>
-          <p:cNvPr id="5" name="Straight Connector 4">
-            <a:extLst>
-              <a:ext uri="{FF2B5EF4-FFF2-40B4-BE49-F238E27FC236}">
-                <a16:creationId xmlns:a16="http://schemas.microsoft.com/office/drawing/2014/main" id="{3230D586-FE3F-DB99-D55C-F85424372C67}"/>
-              </a:ext>
-            </a:extLst>
-          </p:cNvPr>
-          <p:cNvCxnSpPr>
-            <a:cxnSpLocks/>
-          </p:cNvCxnSpPr>
-          <p:nvPr/>
-        </p:nvCxnSpPr>
-        <p:spPr>
-          <a:xfrm flipV="1">
-            <a:off x="7459285" y="2446542"/>
-            <a:ext cx="0" cy="3156237"/>
-          </a:xfrm>
-          <a:prstGeom prst="line">
-            <a:avLst/>
-          </a:prstGeom>
-          <a:ln w="25400">
-            <a:solidFill>
-              <a:schemeClr val="accent2"/>
-            </a:solidFill>
-          </a:ln>
-        </p:spPr>
-        <p:style>
-          <a:lnRef idx="1">
-            <a:schemeClr val="accent1"/>
-          </a:lnRef>
-          <a:fillRef idx="0">
-            <a:schemeClr val="accent1"/>
-          </a:fillRef>
-          <a:effectRef idx="0">
-            <a:schemeClr val="accent1"/>
-          </a:effectRef>
-          <a:fontRef idx="minor">
-            <a:schemeClr val="tx1"/>
-          </a:fontRef>
-        </p:style>
-      </p:cxnSp>
-      <p:sp>
-        <p:nvSpPr>
-          <p:cNvPr id="6" name="TextBox 5">
-            <a:extLst>
-              <a:ext uri="{FF2B5EF4-FFF2-40B4-BE49-F238E27FC236}">
-                <a16:creationId xmlns:a16="http://schemas.microsoft.com/office/drawing/2014/main" id="{78C82ABE-E9D5-1BCC-6C1D-44E2EE74A229}"/>
-              </a:ext>
-            </a:extLst>
-          </p:cNvPr>
-          <p:cNvSpPr txBox="1"/>
-          <p:nvPr/>
-        </p:nvSpPr>
-        <p:spPr>
-          <a:xfrm>
-            <a:off x="838200" y="2204720"/>
-            <a:ext cx="4099418" cy="3170099"/>
-          </a:xfrm>
-          <a:prstGeom prst="rect">
-            <a:avLst/>
-          </a:prstGeom>
-          <a:noFill/>
-        </p:spPr>
-        <p:txBody>
-          <a:bodyPr wrap="square" rtlCol="0">
-            <a:spAutoFit/>
-          </a:bodyPr>
-          <a:lstStyle/>
-          <a:p>
-            <a:pPr marL="0" marR="0" lvl="0" indent="0" algn="l" defTabSz="914400" rtl="0" eaLnBrk="1" fontAlgn="auto" latinLnBrk="0" hangingPunct="1">
-              <a:lnSpc>
-                <a:spcPct val="100000"/>
-              </a:lnSpc>
-              <a:spcBef>
-                <a:spcPts val="0"/>
-              </a:spcBef>
-              <a:spcAft>
-                <a:spcPts val="0"/>
-              </a:spcAft>
-              <a:buClrTx/>
-              <a:buSzTx/>
-              <a:buFontTx/>
-              <a:buNone/>
-              <a:tabLst/>
-              <a:defRPr/>
-            </a:pPr>
-            <a:r>
-              <a:rPr kumimoji="0" lang="en-US" sz="2000" b="0" i="0" u="none" strike="noStrike" kern="1200" cap="none" spc="0" normalizeH="0" baseline="0" noProof="0" dirty="0">
-                <a:ln>
-                  <a:noFill/>
-                </a:ln>
-                <a:solidFill>
-                  <a:prstClr val="black"/>
-                </a:solidFill>
-                <a:effectLst/>
-                <a:uLnTx/>
-                <a:uFillTx/>
-                <a:latin typeface="Calibri" panose="020F0502020204030204"/>
-                <a:ea typeface="+mn-ea"/>
-                <a:cs typeface="+mn-cs"/>
-              </a:rPr>
-              <a:t>If X &lt; -1.6, then predicted Y is around 8</a:t>
-            </a:r>
-          </a:p>
-          <a:p>
-            <a:pPr marL="0" marR="0" lvl="0" indent="0" algn="l" defTabSz="914400" rtl="0" eaLnBrk="1" fontAlgn="auto" latinLnBrk="0" hangingPunct="1">
-              <a:lnSpc>
-                <a:spcPct val="100000"/>
-              </a:lnSpc>
-              <a:spcBef>
-                <a:spcPts val="0"/>
-              </a:spcBef>
-              <a:spcAft>
-                <a:spcPts val="0"/>
-              </a:spcAft>
-              <a:buClrTx/>
-              <a:buSzTx/>
-              <a:buFontTx/>
-              <a:buNone/>
-              <a:tabLst/>
-              <a:defRPr/>
-            </a:pPr>
-            <a:endParaRPr kumimoji="0" lang="en-US" sz="2000" b="0" i="0" u="none" strike="noStrike" kern="1200" cap="none" spc="0" normalizeH="0" baseline="0" noProof="0" dirty="0">
-              <a:ln>
-                <a:noFill/>
-              </a:ln>
-              <a:solidFill>
-                <a:prstClr val="black"/>
-              </a:solidFill>
-              <a:effectLst/>
-              <a:uLnTx/>
-              <a:uFillTx/>
-              <a:latin typeface="Calibri" panose="020F0502020204030204"/>
-              <a:ea typeface="+mn-ea"/>
-              <a:cs typeface="+mn-cs"/>
-            </a:endParaRPr>
-          </a:p>
-          <a:p>
-            <a:pPr marL="0" marR="0" lvl="0" indent="0" algn="l" defTabSz="914400" rtl="0" eaLnBrk="1" fontAlgn="auto" latinLnBrk="0" hangingPunct="1">
-              <a:lnSpc>
-                <a:spcPct val="100000"/>
-              </a:lnSpc>
-              <a:spcBef>
-                <a:spcPts val="0"/>
-              </a:spcBef>
-              <a:spcAft>
-                <a:spcPts val="0"/>
-              </a:spcAft>
-              <a:buClrTx/>
-              <a:buSzTx/>
-              <a:buFontTx/>
-              <a:buNone/>
-              <a:tabLst/>
-              <a:defRPr/>
-            </a:pPr>
-            <a:r>
-              <a:rPr kumimoji="0" lang="en-US" sz="2000" b="0" i="0" u="none" strike="noStrike" kern="1200" cap="none" spc="0" normalizeH="0" baseline="0" noProof="0" dirty="0">
-                <a:ln>
-                  <a:noFill/>
-                </a:ln>
-                <a:solidFill>
-                  <a:prstClr val="black"/>
-                </a:solidFill>
-                <a:effectLst/>
-                <a:uLnTx/>
-                <a:uFillTx/>
-                <a:latin typeface="Calibri" panose="020F0502020204030204"/>
-                <a:ea typeface="+mn-ea"/>
-                <a:cs typeface="+mn-cs"/>
-              </a:rPr>
-              <a:t>If X is between -1.6 and -0.7, then predicted Y is around 4</a:t>
-            </a:r>
-          </a:p>
-          <a:p>
-            <a:pPr marL="0" marR="0" lvl="0" indent="0" algn="l" defTabSz="914400" rtl="0" eaLnBrk="1" fontAlgn="auto" latinLnBrk="0" hangingPunct="1">
-              <a:lnSpc>
-                <a:spcPct val="100000"/>
-              </a:lnSpc>
-              <a:spcBef>
-                <a:spcPts val="0"/>
-              </a:spcBef>
-              <a:spcAft>
-                <a:spcPts val="0"/>
-              </a:spcAft>
-              <a:buClrTx/>
-              <a:buSzTx/>
-              <a:buFontTx/>
-              <a:buNone/>
-              <a:tabLst/>
-              <a:defRPr/>
-            </a:pPr>
-            <a:endParaRPr kumimoji="0" lang="en-US" sz="2000" b="0" i="0" u="none" strike="noStrike" kern="1200" cap="none" spc="0" normalizeH="0" baseline="0" noProof="0" dirty="0">
-              <a:ln>
-                <a:noFill/>
-              </a:ln>
-              <a:solidFill>
-                <a:prstClr val="black"/>
-              </a:solidFill>
-              <a:effectLst/>
-              <a:uLnTx/>
-              <a:uFillTx/>
-              <a:latin typeface="Calibri" panose="020F0502020204030204"/>
-              <a:ea typeface="+mn-ea"/>
-              <a:cs typeface="+mn-cs"/>
-            </a:endParaRPr>
-          </a:p>
-          <a:p>
-            <a:pPr marL="0" marR="0" lvl="0" indent="0" algn="l" defTabSz="914400" rtl="0" eaLnBrk="1" fontAlgn="auto" latinLnBrk="0" hangingPunct="1">
-              <a:lnSpc>
-                <a:spcPct val="100000"/>
-              </a:lnSpc>
-              <a:spcBef>
-                <a:spcPts val="0"/>
-              </a:spcBef>
-              <a:spcAft>
-                <a:spcPts val="0"/>
-              </a:spcAft>
-              <a:buClrTx/>
-              <a:buSzTx/>
-              <a:buFontTx/>
-              <a:buNone/>
-              <a:tabLst/>
-              <a:defRPr/>
-            </a:pPr>
-            <a:r>
-              <a:rPr kumimoji="0" lang="en-US" sz="2000" b="0" i="0" u="none" strike="noStrike" kern="1200" cap="none" spc="0" normalizeH="0" baseline="0" noProof="0" dirty="0">
-                <a:ln>
-                  <a:noFill/>
-                </a:ln>
-                <a:solidFill>
-                  <a:prstClr val="black"/>
-                </a:solidFill>
-                <a:effectLst/>
-                <a:uLnTx/>
-                <a:uFillTx/>
-                <a:latin typeface="Calibri" panose="020F0502020204030204"/>
-                <a:ea typeface="+mn-ea"/>
-                <a:cs typeface="+mn-cs"/>
-              </a:rPr>
-              <a:t>If X is greater than -0.7, then predicted Y is around 0</a:t>
-            </a:r>
-          </a:p>
-          <a:p>
-            <a:pPr marL="0" marR="0" lvl="0" indent="0" algn="l" defTabSz="914400" rtl="0" eaLnBrk="1" fontAlgn="auto" latinLnBrk="0" hangingPunct="1">
-              <a:lnSpc>
-                <a:spcPct val="100000"/>
-              </a:lnSpc>
-              <a:spcBef>
-                <a:spcPts val="0"/>
-              </a:spcBef>
-              <a:spcAft>
-                <a:spcPts val="0"/>
-              </a:spcAft>
-              <a:buClrTx/>
-              <a:buSzTx/>
-              <a:buFontTx/>
-              <a:buNone/>
-              <a:tabLst/>
-              <a:defRPr/>
-            </a:pPr>
-            <a:endParaRPr kumimoji="0" lang="en-US" sz="2000" b="0" i="0" u="none" strike="noStrike" kern="1200" cap="none" spc="0" normalizeH="0" baseline="0" noProof="0" dirty="0">
-              <a:ln>
-                <a:noFill/>
-              </a:ln>
-              <a:solidFill>
-                <a:prstClr val="black"/>
-              </a:solidFill>
-              <a:effectLst/>
-              <a:uLnTx/>
-              <a:uFillTx/>
-              <a:latin typeface="Calibri" panose="020F0502020204030204"/>
-              <a:ea typeface="+mn-ea"/>
-              <a:cs typeface="+mn-cs"/>
-            </a:endParaRPr>
-          </a:p>
-          <a:p>
-            <a:pPr marL="0" marR="0" lvl="0" indent="0" algn="l" defTabSz="914400" rtl="0" eaLnBrk="1" fontAlgn="auto" latinLnBrk="0" hangingPunct="1">
-              <a:lnSpc>
-                <a:spcPct val="100000"/>
-              </a:lnSpc>
-              <a:spcBef>
-                <a:spcPts val="0"/>
-              </a:spcBef>
-              <a:spcAft>
-                <a:spcPts val="0"/>
-              </a:spcAft>
-              <a:buClrTx/>
-              <a:buSzTx/>
-              <a:buFontTx/>
-              <a:buNone/>
-              <a:tabLst/>
-              <a:defRPr/>
-            </a:pPr>
-            <a:r>
-              <a:rPr kumimoji="0" lang="en-US" sz="2000" b="0" i="0" u="none" strike="noStrike" kern="1200" cap="none" spc="0" normalizeH="0" baseline="0" noProof="0" dirty="0">
-                <a:ln>
-                  <a:noFill/>
-                </a:ln>
-                <a:solidFill>
-                  <a:prstClr val="black"/>
-                </a:solidFill>
-                <a:effectLst/>
-                <a:uLnTx/>
-                <a:uFillTx/>
-                <a:latin typeface="Calibri" panose="020F0502020204030204"/>
-                <a:ea typeface="+mn-ea"/>
-                <a:cs typeface="+mn-cs"/>
-              </a:rPr>
-              <a:t> </a:t>
-            </a:r>
-          </a:p>
-        </p:txBody>
-      </p:sp>
-      <p:sp>
-        <p:nvSpPr>
-          <p:cNvPr id="7" name="Freeform: Shape 6">
-            <a:extLst>
-              <a:ext uri="{FF2B5EF4-FFF2-40B4-BE49-F238E27FC236}">
-                <a16:creationId xmlns:a16="http://schemas.microsoft.com/office/drawing/2014/main" id="{7D22E9D0-7F53-2819-29DC-43B16DDB89B5}"/>
-              </a:ext>
-            </a:extLst>
-          </p:cNvPr>
-          <p:cNvSpPr/>
-          <p:nvPr/>
-        </p:nvSpPr>
-        <p:spPr>
-          <a:xfrm>
-            <a:off x="7345680" y="4307840"/>
-            <a:ext cx="965200" cy="975360"/>
-          </a:xfrm>
-          <a:custGeom>
-            <a:avLst/>
-            <a:gdLst>
-              <a:gd name="connsiteX0" fmla="*/ 223520 w 965200"/>
-              <a:gd name="connsiteY0" fmla="*/ 101600 h 975360"/>
-              <a:gd name="connsiteX1" fmla="*/ 162560 w 965200"/>
-              <a:gd name="connsiteY1" fmla="*/ 203200 h 975360"/>
-              <a:gd name="connsiteX2" fmla="*/ 101600 w 965200"/>
-              <a:gd name="connsiteY2" fmla="*/ 314960 h 975360"/>
-              <a:gd name="connsiteX3" fmla="*/ 91440 w 965200"/>
-              <a:gd name="connsiteY3" fmla="*/ 375920 h 975360"/>
-              <a:gd name="connsiteX4" fmla="*/ 60960 w 965200"/>
-              <a:gd name="connsiteY4" fmla="*/ 426720 h 975360"/>
-              <a:gd name="connsiteX5" fmla="*/ 20320 w 965200"/>
-              <a:gd name="connsiteY5" fmla="*/ 497840 h 975360"/>
-              <a:gd name="connsiteX6" fmla="*/ 0 w 965200"/>
-              <a:gd name="connsiteY6" fmla="*/ 568960 h 975360"/>
-              <a:gd name="connsiteX7" fmla="*/ 50800 w 965200"/>
-              <a:gd name="connsiteY7" fmla="*/ 721360 h 975360"/>
-              <a:gd name="connsiteX8" fmla="*/ 142240 w 965200"/>
-              <a:gd name="connsiteY8" fmla="*/ 853440 h 975360"/>
-              <a:gd name="connsiteX9" fmla="*/ 233680 w 965200"/>
-              <a:gd name="connsiteY9" fmla="*/ 894080 h 975360"/>
-              <a:gd name="connsiteX10" fmla="*/ 284480 w 965200"/>
-              <a:gd name="connsiteY10" fmla="*/ 914400 h 975360"/>
-              <a:gd name="connsiteX11" fmla="*/ 355600 w 965200"/>
-              <a:gd name="connsiteY11" fmla="*/ 924560 h 975360"/>
-              <a:gd name="connsiteX12" fmla="*/ 538480 w 965200"/>
-              <a:gd name="connsiteY12" fmla="*/ 944880 h 975360"/>
-              <a:gd name="connsiteX13" fmla="*/ 579120 w 965200"/>
-              <a:gd name="connsiteY13" fmla="*/ 955040 h 975360"/>
-              <a:gd name="connsiteX14" fmla="*/ 640080 w 965200"/>
-              <a:gd name="connsiteY14" fmla="*/ 965200 h 975360"/>
-              <a:gd name="connsiteX15" fmla="*/ 670560 w 965200"/>
-              <a:gd name="connsiteY15" fmla="*/ 975360 h 975360"/>
-              <a:gd name="connsiteX16" fmla="*/ 853440 w 965200"/>
-              <a:gd name="connsiteY16" fmla="*/ 965200 h 975360"/>
-              <a:gd name="connsiteX17" fmla="*/ 873760 w 965200"/>
-              <a:gd name="connsiteY17" fmla="*/ 914400 h 975360"/>
-              <a:gd name="connsiteX18" fmla="*/ 894080 w 965200"/>
-              <a:gd name="connsiteY18" fmla="*/ 883920 h 975360"/>
-              <a:gd name="connsiteX19" fmla="*/ 914400 w 965200"/>
-              <a:gd name="connsiteY19" fmla="*/ 843280 h 975360"/>
-              <a:gd name="connsiteX20" fmla="*/ 924560 w 965200"/>
-              <a:gd name="connsiteY20" fmla="*/ 599440 h 975360"/>
-              <a:gd name="connsiteX21" fmla="*/ 955040 w 965200"/>
-              <a:gd name="connsiteY21" fmla="*/ 508000 h 975360"/>
-              <a:gd name="connsiteX22" fmla="*/ 965200 w 965200"/>
-              <a:gd name="connsiteY22" fmla="*/ 396240 h 975360"/>
-              <a:gd name="connsiteX23" fmla="*/ 955040 w 965200"/>
-              <a:gd name="connsiteY23" fmla="*/ 284480 h 975360"/>
-              <a:gd name="connsiteX24" fmla="*/ 873760 w 965200"/>
-              <a:gd name="connsiteY24" fmla="*/ 142240 h 975360"/>
-              <a:gd name="connsiteX25" fmla="*/ 802640 w 965200"/>
-              <a:gd name="connsiteY25" fmla="*/ 40640 h 975360"/>
-              <a:gd name="connsiteX26" fmla="*/ 772160 w 965200"/>
-              <a:gd name="connsiteY26" fmla="*/ 10160 h 975360"/>
-              <a:gd name="connsiteX27" fmla="*/ 487680 w 965200"/>
-              <a:gd name="connsiteY27" fmla="*/ 0 h 975360"/>
-              <a:gd name="connsiteX28" fmla="*/ 284480 w 965200"/>
-              <a:gd name="connsiteY28" fmla="*/ 20320 h 975360"/>
-              <a:gd name="connsiteX29" fmla="*/ 254000 w 965200"/>
-              <a:gd name="connsiteY29" fmla="*/ 30480 h 975360"/>
-              <a:gd name="connsiteX30" fmla="*/ 223520 w 965200"/>
-              <a:gd name="connsiteY30" fmla="*/ 101600 h 975360"/>
-            </a:gdLst>
-            <a:ahLst/>
-            <a:cxnLst>
-              <a:cxn ang="0">
-                <a:pos x="connsiteX0" y="connsiteY0"/>
-              </a:cxn>
-              <a:cxn ang="0">
-                <a:pos x="connsiteX1" y="connsiteY1"/>
-              </a:cxn>
-              <a:cxn ang="0">
-                <a:pos x="connsiteX2" y="connsiteY2"/>
-              </a:cxn>
-              <a:cxn ang="0">
-                <a:pos x="connsiteX3" y="connsiteY3"/>
-              </a:cxn>
-              <a:cxn ang="0">
-                <a:pos x="connsiteX4" y="connsiteY4"/>
-              </a:cxn>
-              <a:cxn ang="0">
-                <a:pos x="connsiteX5" y="connsiteY5"/>
-              </a:cxn>
-              <a:cxn ang="0">
-                <a:pos x="connsiteX6" y="connsiteY6"/>
-              </a:cxn>
-              <a:cxn ang="0">
-                <a:pos x="connsiteX7" y="connsiteY7"/>
-              </a:cxn>
-              <a:cxn ang="0">
-                <a:pos x="connsiteX8" y="connsiteY8"/>
-              </a:cxn>
-              <a:cxn ang="0">
-                <a:pos x="connsiteX9" y="connsiteY9"/>
-              </a:cxn>
-              <a:cxn ang="0">
-                <a:pos x="connsiteX10" y="connsiteY10"/>
-              </a:cxn>
-              <a:cxn ang="0">
-                <a:pos x="connsiteX11" y="connsiteY11"/>
-              </a:cxn>
-              <a:cxn ang="0">
-                <a:pos x="connsiteX12" y="connsiteY12"/>
-              </a:cxn>
-              <a:cxn ang="0">
-                <a:pos x="connsiteX13" y="connsiteY13"/>
-              </a:cxn>
-              <a:cxn ang="0">
-                <a:pos x="connsiteX14" y="connsiteY14"/>
-              </a:cxn>
-              <a:cxn ang="0">
-                <a:pos x="connsiteX15" y="connsiteY15"/>
-              </a:cxn>
-              <a:cxn ang="0">
-                <a:pos x="connsiteX16" y="connsiteY16"/>
-              </a:cxn>
-              <a:cxn ang="0">
-                <a:pos x="connsiteX17" y="connsiteY17"/>
-              </a:cxn>
-              <a:cxn ang="0">
-                <a:pos x="connsiteX18" y="connsiteY18"/>
-              </a:cxn>
-              <a:cxn ang="0">
-                <a:pos x="connsiteX19" y="connsiteY19"/>
-              </a:cxn>
-              <a:cxn ang="0">
-                <a:pos x="connsiteX20" y="connsiteY20"/>
-              </a:cxn>
-              <a:cxn ang="0">
-                <a:pos x="connsiteX21" y="connsiteY21"/>
-              </a:cxn>
-              <a:cxn ang="0">
-                <a:pos x="connsiteX22" y="connsiteY22"/>
-              </a:cxn>
-              <a:cxn ang="0">
-                <a:pos x="connsiteX23" y="connsiteY23"/>
-              </a:cxn>
-              <a:cxn ang="0">
-                <a:pos x="connsiteX24" y="connsiteY24"/>
-              </a:cxn>
-              <a:cxn ang="0">
-                <a:pos x="connsiteX25" y="connsiteY25"/>
-              </a:cxn>
-              <a:cxn ang="0">
-                <a:pos x="connsiteX26" y="connsiteY26"/>
-              </a:cxn>
-              <a:cxn ang="0">
-                <a:pos x="connsiteX27" y="connsiteY27"/>
-              </a:cxn>
-              <a:cxn ang="0">
-                <a:pos x="connsiteX28" y="connsiteY28"/>
-              </a:cxn>
-              <a:cxn ang="0">
-                <a:pos x="connsiteX29" y="connsiteY29"/>
-              </a:cxn>
-              <a:cxn ang="0">
-                <a:pos x="connsiteX30" y="connsiteY30"/>
-              </a:cxn>
-            </a:cxnLst>
-            <a:rect l="l" t="t" r="r" b="b"/>
-            <a:pathLst>
-              <a:path w="965200" h="975360">
-                <a:moveTo>
-                  <a:pt x="223520" y="101600"/>
-                </a:moveTo>
-                <a:cubicBezTo>
-                  <a:pt x="208280" y="130387"/>
-                  <a:pt x="177228" y="166530"/>
-                  <a:pt x="162560" y="203200"/>
-                </a:cubicBezTo>
-                <a:cubicBezTo>
-                  <a:pt x="133170" y="276675"/>
-                  <a:pt x="152356" y="238825"/>
-                  <a:pt x="101600" y="314960"/>
-                </a:cubicBezTo>
-                <a:cubicBezTo>
-                  <a:pt x="98213" y="335280"/>
-                  <a:pt x="98480" y="356560"/>
-                  <a:pt x="91440" y="375920"/>
-                </a:cubicBezTo>
-                <a:cubicBezTo>
-                  <a:pt x="84691" y="394479"/>
-                  <a:pt x="71426" y="409974"/>
-                  <a:pt x="60960" y="426720"/>
-                </a:cubicBezTo>
-                <a:cubicBezTo>
-                  <a:pt x="43297" y="454981"/>
-                  <a:pt x="32385" y="464661"/>
-                  <a:pt x="20320" y="497840"/>
-                </a:cubicBezTo>
-                <a:cubicBezTo>
-                  <a:pt x="11894" y="521011"/>
-                  <a:pt x="6773" y="545253"/>
-                  <a:pt x="0" y="568960"/>
-                </a:cubicBezTo>
-                <a:cubicBezTo>
-                  <a:pt x="20262" y="660139"/>
-                  <a:pt x="9984" y="648799"/>
-                  <a:pt x="50800" y="721360"/>
-                </a:cubicBezTo>
-                <a:cubicBezTo>
-                  <a:pt x="72711" y="760313"/>
-                  <a:pt x="100728" y="822306"/>
-                  <a:pt x="142240" y="853440"/>
-                </a:cubicBezTo>
-                <a:cubicBezTo>
-                  <a:pt x="199329" y="896256"/>
-                  <a:pt x="177902" y="875487"/>
-                  <a:pt x="233680" y="894080"/>
-                </a:cubicBezTo>
-                <a:cubicBezTo>
-                  <a:pt x="250982" y="899847"/>
-                  <a:pt x="266787" y="909977"/>
-                  <a:pt x="284480" y="914400"/>
-                </a:cubicBezTo>
-                <a:cubicBezTo>
-                  <a:pt x="307712" y="920208"/>
-                  <a:pt x="331978" y="920623"/>
-                  <a:pt x="355600" y="924560"/>
-                </a:cubicBezTo>
-                <a:cubicBezTo>
-                  <a:pt x="484650" y="946068"/>
-                  <a:pt x="299811" y="926521"/>
-                  <a:pt x="538480" y="944880"/>
-                </a:cubicBezTo>
-                <a:cubicBezTo>
-                  <a:pt x="552027" y="948267"/>
-                  <a:pt x="565428" y="952302"/>
-                  <a:pt x="579120" y="955040"/>
-                </a:cubicBezTo>
-                <a:cubicBezTo>
-                  <a:pt x="599320" y="959080"/>
-                  <a:pt x="619970" y="960731"/>
-                  <a:pt x="640080" y="965200"/>
-                </a:cubicBezTo>
-                <a:cubicBezTo>
-                  <a:pt x="650535" y="967523"/>
-                  <a:pt x="660400" y="971973"/>
-                  <a:pt x="670560" y="975360"/>
-                </a:cubicBezTo>
-                <a:lnTo>
-                  <a:pt x="853440" y="965200"/>
-                </a:lnTo>
-                <a:cubicBezTo>
-                  <a:pt x="870909" y="959959"/>
-                  <a:pt x="865604" y="930712"/>
-                  <a:pt x="873760" y="914400"/>
-                </a:cubicBezTo>
-                <a:cubicBezTo>
-                  <a:pt x="879221" y="903478"/>
-                  <a:pt x="888022" y="894522"/>
-                  <a:pt x="894080" y="883920"/>
-                </a:cubicBezTo>
-                <a:cubicBezTo>
-                  <a:pt x="901594" y="870770"/>
-                  <a:pt x="907627" y="856827"/>
-                  <a:pt x="914400" y="843280"/>
-                </a:cubicBezTo>
-                <a:cubicBezTo>
-                  <a:pt x="917787" y="762000"/>
-                  <a:pt x="914771" y="680199"/>
-                  <a:pt x="924560" y="599440"/>
-                </a:cubicBezTo>
-                <a:cubicBezTo>
-                  <a:pt x="928426" y="567545"/>
-                  <a:pt x="948739" y="539505"/>
-                  <a:pt x="955040" y="508000"/>
-                </a:cubicBezTo>
-                <a:cubicBezTo>
-                  <a:pt x="962376" y="471319"/>
-                  <a:pt x="961813" y="433493"/>
-                  <a:pt x="965200" y="396240"/>
-                </a:cubicBezTo>
-                <a:cubicBezTo>
-                  <a:pt x="961813" y="358987"/>
-                  <a:pt x="965316" y="320448"/>
-                  <a:pt x="955040" y="284480"/>
-                </a:cubicBezTo>
-                <a:cubicBezTo>
-                  <a:pt x="937079" y="221617"/>
-                  <a:pt x="908886" y="189074"/>
-                  <a:pt x="873760" y="142240"/>
-                </a:cubicBezTo>
-                <a:cubicBezTo>
-                  <a:pt x="854412" y="84195"/>
-                  <a:pt x="868572" y="113898"/>
-                  <a:pt x="802640" y="40640"/>
-                </a:cubicBezTo>
-                <a:cubicBezTo>
-                  <a:pt x="793028" y="29960"/>
-                  <a:pt x="786410" y="11999"/>
-                  <a:pt x="772160" y="10160"/>
-                </a:cubicBezTo>
-                <a:cubicBezTo>
-                  <a:pt x="678053" y="-1983"/>
-                  <a:pt x="582507" y="3387"/>
-                  <a:pt x="487680" y="0"/>
-                </a:cubicBezTo>
-                <a:cubicBezTo>
-                  <a:pt x="399039" y="5909"/>
-                  <a:pt x="357734" y="2007"/>
-                  <a:pt x="284480" y="20320"/>
-                </a:cubicBezTo>
-                <a:cubicBezTo>
-                  <a:pt x="274090" y="22917"/>
-                  <a:pt x="264160" y="27093"/>
-                  <a:pt x="254000" y="30480"/>
-                </a:cubicBezTo>
-                <a:cubicBezTo>
-                  <a:pt x="242325" y="65504"/>
-                  <a:pt x="238760" y="72813"/>
-                  <a:pt x="223520" y="101600"/>
-                </a:cubicBezTo>
-                <a:close/>
-              </a:path>
-            </a:pathLst>
-          </a:custGeom>
-          <a:solidFill>
-            <a:schemeClr val="accent6">
-              <a:lumMod val="40000"/>
-              <a:lumOff val="60000"/>
-              <a:alpha val="25000"/>
-            </a:schemeClr>
-          </a:solidFill>
-        </p:spPr>
-        <p:style>
-          <a:lnRef idx="2">
-            <a:schemeClr val="accent1">
-              <a:shade val="50000"/>
-            </a:schemeClr>
-          </a:lnRef>
-          <a:fillRef idx="1">
-            <a:schemeClr val="accent1"/>
-          </a:fillRef>
-          <a:effectRef idx="0">
-            <a:schemeClr val="accent1"/>
-          </a:effectRef>
-          <a:fontRef idx="minor">
-            <a:schemeClr val="lt1"/>
-          </a:fontRef>
-        </p:style>
-        <p:txBody>
-          <a:bodyPr rtlCol="0" anchor="ctr"/>
-          <a:lstStyle/>
-          <a:p>
-            <a:pPr marL="0" marR="0" lvl="0" indent="0" algn="ctr" defTabSz="914400" rtl="0" eaLnBrk="1" fontAlgn="auto" latinLnBrk="0" hangingPunct="1">
-              <a:lnSpc>
-                <a:spcPct val="100000"/>
-              </a:lnSpc>
-              <a:spcBef>
-                <a:spcPts val="0"/>
-              </a:spcBef>
-              <a:spcAft>
-                <a:spcPts val="0"/>
-              </a:spcAft>
-              <a:buClrTx/>
-              <a:buSzTx/>
-              <a:buFontTx/>
-              <a:buNone/>
-              <a:tabLst/>
-              <a:defRPr/>
-            </a:pPr>
-            <a:endParaRPr kumimoji="0" lang="en-US" sz="1800" b="0" i="0" u="none" strike="noStrike" kern="1200" cap="none" spc="0" normalizeH="0" baseline="0" noProof="0">
-              <a:ln>
-                <a:noFill/>
-              </a:ln>
-              <a:solidFill>
-                <a:prstClr val="white"/>
-              </a:solidFill>
-              <a:effectLst/>
-              <a:uLnTx/>
-              <a:uFillTx/>
-              <a:latin typeface="Calibri" panose="020F0502020204030204"/>
-              <a:ea typeface="+mn-ea"/>
-              <a:cs typeface="+mn-cs"/>
-            </a:endParaRPr>
-          </a:p>
-        </p:txBody>
-      </p:sp>
-    </p:spTree>
-    <p:extLst>
-      <p:ext uri="{BB962C8B-B14F-4D97-AF65-F5344CB8AC3E}">
-        <p14:creationId xmlns:p14="http://schemas.microsoft.com/office/powerpoint/2010/main" val="3057736246"/>
-      </p:ext>
-    </p:extLst>
-  </p:cSld>
-  <p:clrMapOvr>
-    <a:masterClrMapping/>
-  </p:clrMapOvr>
-  <mc:AlternateContent xmlns:mc="http://schemas.openxmlformats.org/markup-compatibility/2006" xmlns:p159="http://schemas.microsoft.com/office/powerpoint/2015/09/main">
-    <mc:Choice Requires="p159">
-      <p:transition xmlns:p14="http://schemas.microsoft.com/office/powerpoint/2010/main" spd="slow" p14:dur="2000">
-        <p159:morph option="byObject"/>
-      </p:transition>
-    </mc:Choice>
-    <mc:Fallback xmlns="">
-      <p:transition spd="slow">
-        <p:fade/>
-      </p:transition>
-    </mc:Fallback>
-  </mc:AlternateContent>
-</p:sld>
-</file>
-
-<file path=ppt/slides/slide11.xml><?xml version="1.0" encoding="utf-8"?>
-<p:sld xmlns:a="http://schemas.openxmlformats.org/drawingml/2006/main" xmlns:r="http://schemas.openxmlformats.org/officeDocument/2006/relationships" xmlns:p="http://schemas.openxmlformats.org/presentationml/2006/main">
-  <p:cSld>
-    <p:spTree>
-      <p:nvGrpSpPr>
-        <p:cNvPr id="1" name=""/>
-        <p:cNvGrpSpPr/>
-        <p:nvPr/>
-      </p:nvGrpSpPr>
-      <p:grpSpPr>
-        <a:xfrm>
-          <a:off x="0" y="0"/>
-          <a:ext cx="0" cy="0"/>
-          <a:chOff x="0" y="0"/>
-          <a:chExt cx="0" cy="0"/>
-        </a:xfrm>
-      </p:grpSpPr>
-      <p:sp>
-        <p:nvSpPr>
-          <p:cNvPr id="2" name="Title 1">
-            <a:extLst>
-              <a:ext uri="{FF2B5EF4-FFF2-40B4-BE49-F238E27FC236}">
-                <a16:creationId xmlns:a16="http://schemas.microsoft.com/office/drawing/2014/main" id="{022A1C08-F088-44F3-A554-2C9BCDFFFF90}"/>
-              </a:ext>
-            </a:extLst>
-          </p:cNvPr>
-          <p:cNvSpPr>
-            <a:spLocks noGrp="1"/>
-          </p:cNvSpPr>
-          <p:nvPr>
-            <p:ph type="title"/>
-          </p:nvPr>
-        </p:nvSpPr>
-        <p:spPr/>
-        <p:txBody>
-          <a:bodyPr/>
-          <a:lstStyle/>
-          <a:p>
-            <a:r>
-              <a:rPr lang="en-US" dirty="0"/>
-              <a:t>Let’s Predict on Unseen Data</a:t>
-            </a:r>
-          </a:p>
-        </p:txBody>
-      </p:sp>
-      <p:sp>
-        <p:nvSpPr>
-          <p:cNvPr id="3" name="Content Placeholder 2">
-            <a:extLst>
-              <a:ext uri="{FF2B5EF4-FFF2-40B4-BE49-F238E27FC236}">
-                <a16:creationId xmlns:a16="http://schemas.microsoft.com/office/drawing/2014/main" id="{A79DB37C-7C75-41C8-821A-F09082E29E87}"/>
-              </a:ext>
-            </a:extLst>
-          </p:cNvPr>
-          <p:cNvSpPr>
-            <a:spLocks noGrp="1"/>
-          </p:cNvSpPr>
-          <p:nvPr>
-            <p:ph idx="1"/>
-          </p:nvPr>
-        </p:nvSpPr>
-        <p:spPr>
-          <a:xfrm>
-            <a:off x="5988737" y="1947683"/>
-            <a:ext cx="2691581" cy="455459"/>
-          </a:xfrm>
-        </p:spPr>
-        <p:txBody>
-          <a:bodyPr>
-            <a:normAutofit lnSpcReduction="10000"/>
-          </a:bodyPr>
-          <a:lstStyle/>
-          <a:p>
-            <a:pPr marL="0" indent="0">
-              <a:buNone/>
-            </a:pPr>
-            <a:r>
-              <a:rPr lang="en-US" dirty="0"/>
-              <a:t>Training Data</a:t>
-            </a:r>
-          </a:p>
-        </p:txBody>
-      </p:sp>
-      <p:pic>
-        <p:nvPicPr>
-          <p:cNvPr id="2050" name="Picture 2" descr="By6Y9ht39imXAAAAAElFTkSuQmCC (482×357)">
-            <a:extLst>
-              <a:ext uri="{FF2B5EF4-FFF2-40B4-BE49-F238E27FC236}">
-                <a16:creationId xmlns:a16="http://schemas.microsoft.com/office/drawing/2014/main" id="{DD123E85-49DA-44AE-B8DC-522426C0FCC9}"/>
-              </a:ext>
-            </a:extLst>
-          </p:cNvPr>
-          <p:cNvPicPr>
-            <a:picLocks noChangeAspect="1" noChangeArrowheads="1"/>
-          </p:cNvPicPr>
-          <p:nvPr/>
-        </p:nvPicPr>
-        <p:blipFill>
-          <a:blip r:embed="rId2">
-            <a:extLst>
-              <a:ext uri="{28A0092B-C50C-407E-A947-70E740481C1C}">
-                <a14:useLocalDpi xmlns:a14="http://schemas.microsoft.com/office/drawing/2010/main" val="0"/>
-              </a:ext>
-            </a:extLst>
-          </a:blip>
-          <a:srcRect/>
-          <a:stretch>
-            <a:fillRect/>
-          </a:stretch>
-        </p:blipFill>
-        <p:spPr bwMode="auto">
-          <a:xfrm>
-            <a:off x="5837718" y="2446542"/>
-            <a:ext cx="4591050" cy="3400425"/>
-          </a:xfrm>
-          <a:prstGeom prst="rect">
-            <a:avLst/>
-          </a:prstGeom>
-          <a:noFill/>
-          <a:extLst>
-            <a:ext uri="{909E8E84-426E-40DD-AFC4-6F175D3DCCD1}">
-              <a14:hiddenFill xmlns:a14="http://schemas.microsoft.com/office/drawing/2010/main">
-                <a:solidFill>
-                  <a:srgbClr val="FFFFFF"/>
-                </a:solidFill>
-              </a14:hiddenFill>
-            </a:ext>
-          </a:extLst>
-        </p:spPr>
-      </p:pic>
-      <p:cxnSp>
-        <p:nvCxnSpPr>
-          <p:cNvPr id="10" name="Straight Connector 9">
-            <a:extLst>
-              <a:ext uri="{FF2B5EF4-FFF2-40B4-BE49-F238E27FC236}">
-                <a16:creationId xmlns:a16="http://schemas.microsoft.com/office/drawing/2014/main" id="{C1C41949-E3D7-956A-6608-150D83B8DE82}"/>
-              </a:ext>
-            </a:extLst>
-          </p:cNvPr>
-          <p:cNvCxnSpPr>
-            <a:cxnSpLocks/>
-          </p:cNvCxnSpPr>
-          <p:nvPr/>
-        </p:nvCxnSpPr>
-        <p:spPr>
-          <a:xfrm flipV="1">
-            <a:off x="6658493" y="2446542"/>
-            <a:ext cx="0" cy="3139611"/>
-          </a:xfrm>
-          <a:prstGeom prst="line">
-            <a:avLst/>
-          </a:prstGeom>
-          <a:ln w="25400"/>
-        </p:spPr>
-        <p:style>
-          <a:lnRef idx="1">
-            <a:schemeClr val="accent1"/>
-          </a:lnRef>
-          <a:fillRef idx="0">
-            <a:schemeClr val="accent1"/>
-          </a:fillRef>
-          <a:effectRef idx="0">
-            <a:schemeClr val="accent1"/>
-          </a:effectRef>
-          <a:fontRef idx="minor">
-            <a:schemeClr val="tx1"/>
-          </a:fontRef>
-        </p:style>
-      </p:cxnSp>
-      <p:cxnSp>
-        <p:nvCxnSpPr>
-          <p:cNvPr id="5" name="Straight Connector 4">
-            <a:extLst>
-              <a:ext uri="{FF2B5EF4-FFF2-40B4-BE49-F238E27FC236}">
-                <a16:creationId xmlns:a16="http://schemas.microsoft.com/office/drawing/2014/main" id="{3230D586-FE3F-DB99-D55C-F85424372C67}"/>
-              </a:ext>
-            </a:extLst>
-          </p:cNvPr>
-          <p:cNvCxnSpPr>
-            <a:cxnSpLocks/>
-          </p:cNvCxnSpPr>
-          <p:nvPr/>
-        </p:nvCxnSpPr>
-        <p:spPr>
-          <a:xfrm flipV="1">
-            <a:off x="7459285" y="2446542"/>
-            <a:ext cx="0" cy="3156237"/>
-          </a:xfrm>
-          <a:prstGeom prst="line">
-            <a:avLst/>
-          </a:prstGeom>
-          <a:ln w="25400">
-            <a:solidFill>
-              <a:schemeClr val="accent2"/>
-            </a:solidFill>
-          </a:ln>
-        </p:spPr>
-        <p:style>
-          <a:lnRef idx="1">
-            <a:schemeClr val="accent1"/>
-          </a:lnRef>
-          <a:fillRef idx="0">
-            <a:schemeClr val="accent1"/>
-          </a:fillRef>
-          <a:effectRef idx="0">
-            <a:schemeClr val="accent1"/>
-          </a:effectRef>
-          <a:fontRef idx="minor">
-            <a:schemeClr val="tx1"/>
-          </a:fontRef>
-        </p:style>
-      </p:cxnSp>
-      <p:sp>
-        <p:nvSpPr>
-          <p:cNvPr id="6" name="TextBox 5">
-            <a:extLst>
-              <a:ext uri="{FF2B5EF4-FFF2-40B4-BE49-F238E27FC236}">
-                <a16:creationId xmlns:a16="http://schemas.microsoft.com/office/drawing/2014/main" id="{78C82ABE-E9D5-1BCC-6C1D-44E2EE74A229}"/>
-              </a:ext>
-            </a:extLst>
-          </p:cNvPr>
-          <p:cNvSpPr txBox="1"/>
-          <p:nvPr/>
-        </p:nvSpPr>
-        <p:spPr>
-          <a:xfrm>
-            <a:off x="838200" y="2204720"/>
-            <a:ext cx="4099418" cy="2862322"/>
-          </a:xfrm>
-          <a:prstGeom prst="rect">
-            <a:avLst/>
-          </a:prstGeom>
-          <a:noFill/>
-        </p:spPr>
-        <p:txBody>
-          <a:bodyPr wrap="square" rtlCol="0">
-            <a:spAutoFit/>
-          </a:bodyPr>
-          <a:lstStyle/>
-          <a:p>
-            <a:pPr marL="0" marR="0" lvl="0" indent="0" algn="l" defTabSz="914400" rtl="0" eaLnBrk="1" fontAlgn="auto" latinLnBrk="0" hangingPunct="1">
-              <a:lnSpc>
-                <a:spcPct val="100000"/>
-              </a:lnSpc>
-              <a:spcBef>
-                <a:spcPts val="0"/>
-              </a:spcBef>
-              <a:spcAft>
-                <a:spcPts val="0"/>
-              </a:spcAft>
-              <a:buClrTx/>
-              <a:buSzTx/>
-              <a:buFontTx/>
-              <a:buNone/>
-              <a:tabLst/>
-              <a:defRPr/>
-            </a:pPr>
-            <a:r>
-              <a:rPr kumimoji="0" lang="en-US" sz="2000" b="0" i="0" u="none" strike="noStrike" kern="1200" cap="none" spc="0" normalizeH="0" baseline="0" noProof="0" dirty="0">
-                <a:ln>
-                  <a:noFill/>
-                </a:ln>
-                <a:solidFill>
-                  <a:prstClr val="black"/>
-                </a:solidFill>
-                <a:effectLst/>
-                <a:uLnTx/>
-                <a:uFillTx/>
-                <a:latin typeface="Calibri" panose="020F0502020204030204"/>
-                <a:ea typeface="+mn-ea"/>
-                <a:cs typeface="+mn-cs"/>
-              </a:rPr>
-              <a:t>What will be predicted for unseen data with X &gt; 0?</a:t>
-            </a:r>
-          </a:p>
-          <a:p>
-            <a:pPr marL="0" marR="0" lvl="0" indent="0" algn="l" defTabSz="914400" rtl="0" eaLnBrk="1" fontAlgn="auto" latinLnBrk="0" hangingPunct="1">
-              <a:lnSpc>
-                <a:spcPct val="100000"/>
-              </a:lnSpc>
-              <a:spcBef>
-                <a:spcPts val="0"/>
-              </a:spcBef>
-              <a:spcAft>
-                <a:spcPts val="0"/>
-              </a:spcAft>
-              <a:buClrTx/>
-              <a:buSzTx/>
-              <a:buFontTx/>
-              <a:buNone/>
-              <a:tabLst/>
-              <a:defRPr/>
-            </a:pPr>
-            <a:endParaRPr kumimoji="0" lang="en-US" sz="2000" b="0" i="0" u="none" strike="noStrike" kern="1200" cap="none" spc="0" normalizeH="0" baseline="0" noProof="0" dirty="0">
-              <a:ln>
-                <a:noFill/>
-              </a:ln>
-              <a:solidFill>
-                <a:prstClr val="black"/>
-              </a:solidFill>
-              <a:effectLst/>
-              <a:uLnTx/>
-              <a:uFillTx/>
-              <a:latin typeface="Calibri" panose="020F0502020204030204"/>
-              <a:ea typeface="+mn-ea"/>
-              <a:cs typeface="+mn-cs"/>
-            </a:endParaRPr>
-          </a:p>
-          <a:p>
-            <a:pPr marL="0" marR="0" lvl="0" indent="0" algn="l" defTabSz="914400" rtl="0" eaLnBrk="1" fontAlgn="auto" latinLnBrk="0" hangingPunct="1">
-              <a:lnSpc>
-                <a:spcPct val="100000"/>
-              </a:lnSpc>
-              <a:spcBef>
-                <a:spcPts val="0"/>
-              </a:spcBef>
-              <a:spcAft>
-                <a:spcPts val="0"/>
-              </a:spcAft>
-              <a:buClrTx/>
-              <a:buSzTx/>
-              <a:buFontTx/>
-              <a:buNone/>
-              <a:tabLst/>
-              <a:defRPr/>
-            </a:pPr>
-            <a:r>
-              <a:rPr kumimoji="0" lang="en-US" sz="2000" b="0" i="0" u="none" strike="noStrike" kern="1200" cap="none" spc="0" normalizeH="0" baseline="0" noProof="0" dirty="0">
-                <a:ln>
-                  <a:noFill/>
-                </a:ln>
-                <a:solidFill>
-                  <a:prstClr val="black"/>
-                </a:solidFill>
-                <a:effectLst/>
-                <a:uLnTx/>
-                <a:uFillTx/>
-                <a:latin typeface="Calibri" panose="020F0502020204030204"/>
-                <a:ea typeface="+mn-ea"/>
-                <a:cs typeface="+mn-cs"/>
-              </a:rPr>
-              <a:t>The decision tree model learned that if the X value is greater than -0.7, then the prediction should be around 0</a:t>
-            </a:r>
-          </a:p>
-          <a:p>
-            <a:pPr marL="0" marR="0" lvl="0" indent="0" algn="l" defTabSz="914400" rtl="0" eaLnBrk="1" fontAlgn="auto" latinLnBrk="0" hangingPunct="1">
-              <a:lnSpc>
-                <a:spcPct val="100000"/>
-              </a:lnSpc>
-              <a:spcBef>
-                <a:spcPts val="0"/>
-              </a:spcBef>
-              <a:spcAft>
-                <a:spcPts val="0"/>
-              </a:spcAft>
-              <a:buClrTx/>
-              <a:buSzTx/>
-              <a:buFontTx/>
-              <a:buNone/>
-              <a:tabLst/>
-              <a:defRPr/>
-            </a:pPr>
-            <a:endParaRPr kumimoji="0" lang="en-US" sz="2000" b="0" i="0" u="none" strike="noStrike" kern="1200" cap="none" spc="0" normalizeH="0" baseline="0" noProof="0" dirty="0">
-              <a:ln>
-                <a:noFill/>
-              </a:ln>
-              <a:solidFill>
-                <a:prstClr val="black"/>
-              </a:solidFill>
-              <a:effectLst/>
-              <a:uLnTx/>
-              <a:uFillTx/>
-              <a:latin typeface="Calibri" panose="020F0502020204030204"/>
-              <a:ea typeface="+mn-ea"/>
-              <a:cs typeface="+mn-cs"/>
-            </a:endParaRPr>
-          </a:p>
-          <a:p>
-            <a:pPr marL="0" marR="0" lvl="0" indent="0" algn="l" defTabSz="914400" rtl="0" eaLnBrk="1" fontAlgn="auto" latinLnBrk="0" hangingPunct="1">
-              <a:lnSpc>
-                <a:spcPct val="100000"/>
-              </a:lnSpc>
-              <a:spcBef>
-                <a:spcPts val="0"/>
-              </a:spcBef>
-              <a:spcAft>
-                <a:spcPts val="0"/>
-              </a:spcAft>
-              <a:buClrTx/>
-              <a:buSzTx/>
-              <a:buFontTx/>
-              <a:buNone/>
-              <a:tabLst/>
-              <a:defRPr/>
-            </a:pPr>
-            <a:r>
-              <a:rPr kumimoji="0" lang="en-US" sz="2000" b="0" i="0" u="none" strike="noStrike" kern="1200" cap="none" spc="0" normalizeH="0" baseline="0" noProof="0" dirty="0">
-                <a:ln>
-                  <a:noFill/>
-                </a:ln>
-                <a:solidFill>
-                  <a:prstClr val="black"/>
-                </a:solidFill>
-                <a:effectLst/>
-                <a:uLnTx/>
-                <a:uFillTx/>
-                <a:latin typeface="Calibri" panose="020F0502020204030204"/>
-                <a:ea typeface="+mn-ea"/>
-                <a:cs typeface="+mn-cs"/>
-              </a:rPr>
-              <a:t> </a:t>
-            </a:r>
-          </a:p>
-        </p:txBody>
-      </p:sp>
-      <p:sp>
-        <p:nvSpPr>
-          <p:cNvPr id="8" name="Freeform: Shape 7">
-            <a:extLst>
-              <a:ext uri="{FF2B5EF4-FFF2-40B4-BE49-F238E27FC236}">
-                <a16:creationId xmlns:a16="http://schemas.microsoft.com/office/drawing/2014/main" id="{B32981B2-95A9-7D4D-913E-9C1DE15FFF8C}"/>
-              </a:ext>
-            </a:extLst>
-          </p:cNvPr>
-          <p:cNvSpPr/>
-          <p:nvPr/>
-        </p:nvSpPr>
-        <p:spPr>
-          <a:xfrm>
-            <a:off x="8158480" y="2743200"/>
-            <a:ext cx="2428240" cy="2714563"/>
-          </a:xfrm>
-          <a:custGeom>
-            <a:avLst/>
-            <a:gdLst>
-              <a:gd name="connsiteX0" fmla="*/ 91440 w 2428240"/>
-              <a:gd name="connsiteY0" fmla="*/ 2692400 h 2714563"/>
-              <a:gd name="connsiteX1" fmla="*/ 40640 w 2428240"/>
-              <a:gd name="connsiteY1" fmla="*/ 2540000 h 2714563"/>
-              <a:gd name="connsiteX2" fmla="*/ 0 w 2428240"/>
-              <a:gd name="connsiteY2" fmla="*/ 2428240 h 2714563"/>
-              <a:gd name="connsiteX3" fmla="*/ 40640 w 2428240"/>
-              <a:gd name="connsiteY3" fmla="*/ 2225040 h 2714563"/>
-              <a:gd name="connsiteX4" fmla="*/ 111760 w 2428240"/>
-              <a:gd name="connsiteY4" fmla="*/ 2153920 h 2714563"/>
-              <a:gd name="connsiteX5" fmla="*/ 152400 w 2428240"/>
-              <a:gd name="connsiteY5" fmla="*/ 2082800 h 2714563"/>
-              <a:gd name="connsiteX6" fmla="*/ 172720 w 2428240"/>
-              <a:gd name="connsiteY6" fmla="*/ 1991360 h 2714563"/>
-              <a:gd name="connsiteX7" fmla="*/ 294640 w 2428240"/>
-              <a:gd name="connsiteY7" fmla="*/ 1767840 h 2714563"/>
-              <a:gd name="connsiteX8" fmla="*/ 355600 w 2428240"/>
-              <a:gd name="connsiteY8" fmla="*/ 1625600 h 2714563"/>
-              <a:gd name="connsiteX9" fmla="*/ 406400 w 2428240"/>
-              <a:gd name="connsiteY9" fmla="*/ 1524000 h 2714563"/>
-              <a:gd name="connsiteX10" fmla="*/ 528320 w 2428240"/>
-              <a:gd name="connsiteY10" fmla="*/ 1300480 h 2714563"/>
-              <a:gd name="connsiteX11" fmla="*/ 568960 w 2428240"/>
-              <a:gd name="connsiteY11" fmla="*/ 1229360 h 2714563"/>
-              <a:gd name="connsiteX12" fmla="*/ 660400 w 2428240"/>
-              <a:gd name="connsiteY12" fmla="*/ 1056640 h 2714563"/>
-              <a:gd name="connsiteX13" fmla="*/ 822960 w 2428240"/>
-              <a:gd name="connsiteY13" fmla="*/ 853440 h 2714563"/>
-              <a:gd name="connsiteX14" fmla="*/ 1036320 w 2428240"/>
-              <a:gd name="connsiteY14" fmla="*/ 650240 h 2714563"/>
-              <a:gd name="connsiteX15" fmla="*/ 1127760 w 2428240"/>
-              <a:gd name="connsiteY15" fmla="*/ 558800 h 2714563"/>
-              <a:gd name="connsiteX16" fmla="*/ 1188720 w 2428240"/>
-              <a:gd name="connsiteY16" fmla="*/ 497840 h 2714563"/>
-              <a:gd name="connsiteX17" fmla="*/ 1493520 w 2428240"/>
-              <a:gd name="connsiteY17" fmla="*/ 294640 h 2714563"/>
-              <a:gd name="connsiteX18" fmla="*/ 1564640 w 2428240"/>
-              <a:gd name="connsiteY18" fmla="*/ 274320 h 2714563"/>
-              <a:gd name="connsiteX19" fmla="*/ 1889760 w 2428240"/>
-              <a:gd name="connsiteY19" fmla="*/ 91440 h 2714563"/>
-              <a:gd name="connsiteX20" fmla="*/ 1991360 w 2428240"/>
-              <a:gd name="connsiteY20" fmla="*/ 40640 h 2714563"/>
-              <a:gd name="connsiteX21" fmla="*/ 2153920 w 2428240"/>
-              <a:gd name="connsiteY21" fmla="*/ 0 h 2714563"/>
-              <a:gd name="connsiteX22" fmla="*/ 2397760 w 2428240"/>
-              <a:gd name="connsiteY22" fmla="*/ 213360 h 2714563"/>
-              <a:gd name="connsiteX23" fmla="*/ 2428240 w 2428240"/>
-              <a:gd name="connsiteY23" fmla="*/ 314960 h 2714563"/>
-              <a:gd name="connsiteX24" fmla="*/ 2387600 w 2428240"/>
-              <a:gd name="connsiteY24" fmla="*/ 436880 h 2714563"/>
-              <a:gd name="connsiteX25" fmla="*/ 2346960 w 2428240"/>
-              <a:gd name="connsiteY25" fmla="*/ 548640 h 2714563"/>
-              <a:gd name="connsiteX26" fmla="*/ 2286000 w 2428240"/>
-              <a:gd name="connsiteY26" fmla="*/ 640080 h 2714563"/>
-              <a:gd name="connsiteX27" fmla="*/ 2225040 w 2428240"/>
-              <a:gd name="connsiteY27" fmla="*/ 762000 h 2714563"/>
-              <a:gd name="connsiteX28" fmla="*/ 2082800 w 2428240"/>
-              <a:gd name="connsiteY28" fmla="*/ 1117600 h 2714563"/>
-              <a:gd name="connsiteX29" fmla="*/ 1971040 w 2428240"/>
-              <a:gd name="connsiteY29" fmla="*/ 1412240 h 2714563"/>
-              <a:gd name="connsiteX30" fmla="*/ 1869440 w 2428240"/>
-              <a:gd name="connsiteY30" fmla="*/ 1605280 h 2714563"/>
-              <a:gd name="connsiteX31" fmla="*/ 1737360 w 2428240"/>
-              <a:gd name="connsiteY31" fmla="*/ 1889760 h 2714563"/>
-              <a:gd name="connsiteX32" fmla="*/ 1706880 w 2428240"/>
-              <a:gd name="connsiteY32" fmla="*/ 1991360 h 2714563"/>
-              <a:gd name="connsiteX33" fmla="*/ 1696720 w 2428240"/>
-              <a:gd name="connsiteY33" fmla="*/ 2113280 h 2714563"/>
-              <a:gd name="connsiteX34" fmla="*/ 1676400 w 2428240"/>
-              <a:gd name="connsiteY34" fmla="*/ 2143760 h 2714563"/>
-              <a:gd name="connsiteX35" fmla="*/ 1666240 w 2428240"/>
-              <a:gd name="connsiteY35" fmla="*/ 2174240 h 2714563"/>
-              <a:gd name="connsiteX36" fmla="*/ 1645920 w 2428240"/>
-              <a:gd name="connsiteY36" fmla="*/ 2286000 h 2714563"/>
-              <a:gd name="connsiteX37" fmla="*/ 1605280 w 2428240"/>
-              <a:gd name="connsiteY37" fmla="*/ 2346960 h 2714563"/>
-              <a:gd name="connsiteX38" fmla="*/ 1483360 w 2428240"/>
-              <a:gd name="connsiteY38" fmla="*/ 2479040 h 2714563"/>
-              <a:gd name="connsiteX39" fmla="*/ 1452880 w 2428240"/>
-              <a:gd name="connsiteY39" fmla="*/ 2499360 h 2714563"/>
-              <a:gd name="connsiteX40" fmla="*/ 1412240 w 2428240"/>
-              <a:gd name="connsiteY40" fmla="*/ 2550160 h 2714563"/>
-              <a:gd name="connsiteX41" fmla="*/ 1371600 w 2428240"/>
-              <a:gd name="connsiteY41" fmla="*/ 2570480 h 2714563"/>
-              <a:gd name="connsiteX42" fmla="*/ 1290320 w 2428240"/>
-              <a:gd name="connsiteY42" fmla="*/ 2631440 h 2714563"/>
-              <a:gd name="connsiteX43" fmla="*/ 1188720 w 2428240"/>
-              <a:gd name="connsiteY43" fmla="*/ 2651760 h 2714563"/>
-              <a:gd name="connsiteX44" fmla="*/ 1076960 w 2428240"/>
-              <a:gd name="connsiteY44" fmla="*/ 2682240 h 2714563"/>
-              <a:gd name="connsiteX45" fmla="*/ 497840 w 2428240"/>
-              <a:gd name="connsiteY45" fmla="*/ 2712720 h 2714563"/>
-              <a:gd name="connsiteX46" fmla="*/ 91440 w 2428240"/>
-              <a:gd name="connsiteY46" fmla="*/ 2692400 h 2714563"/>
-            </a:gdLst>
-            <a:ahLst/>
-            <a:cxnLst>
-              <a:cxn ang="0">
-                <a:pos x="connsiteX0" y="connsiteY0"/>
-              </a:cxn>
-              <a:cxn ang="0">
-                <a:pos x="connsiteX1" y="connsiteY1"/>
-              </a:cxn>
-              <a:cxn ang="0">
-                <a:pos x="connsiteX2" y="connsiteY2"/>
-              </a:cxn>
-              <a:cxn ang="0">
-                <a:pos x="connsiteX3" y="connsiteY3"/>
-              </a:cxn>
-              <a:cxn ang="0">
-                <a:pos x="connsiteX4" y="connsiteY4"/>
-              </a:cxn>
-              <a:cxn ang="0">
-                <a:pos x="connsiteX5" y="connsiteY5"/>
-              </a:cxn>
-              <a:cxn ang="0">
-                <a:pos x="connsiteX6" y="connsiteY6"/>
-              </a:cxn>
-              <a:cxn ang="0">
-                <a:pos x="connsiteX7" y="connsiteY7"/>
-              </a:cxn>
-              <a:cxn ang="0">
-                <a:pos x="connsiteX8" y="connsiteY8"/>
-              </a:cxn>
-              <a:cxn ang="0">
-                <a:pos x="connsiteX9" y="connsiteY9"/>
-              </a:cxn>
-              <a:cxn ang="0">
-                <a:pos x="connsiteX10" y="connsiteY10"/>
-              </a:cxn>
-              <a:cxn ang="0">
-                <a:pos x="connsiteX11" y="connsiteY11"/>
-              </a:cxn>
-              <a:cxn ang="0">
-                <a:pos x="connsiteX12" y="connsiteY12"/>
-              </a:cxn>
-              <a:cxn ang="0">
-                <a:pos x="connsiteX13" y="connsiteY13"/>
-              </a:cxn>
-              <a:cxn ang="0">
-                <a:pos x="connsiteX14" y="connsiteY14"/>
-              </a:cxn>
-              <a:cxn ang="0">
-                <a:pos x="connsiteX15" y="connsiteY15"/>
-              </a:cxn>
-              <a:cxn ang="0">
-                <a:pos x="connsiteX16" y="connsiteY16"/>
-              </a:cxn>
-              <a:cxn ang="0">
-                <a:pos x="connsiteX17" y="connsiteY17"/>
-              </a:cxn>
-              <a:cxn ang="0">
-                <a:pos x="connsiteX18" y="connsiteY18"/>
-              </a:cxn>
-              <a:cxn ang="0">
-                <a:pos x="connsiteX19" y="connsiteY19"/>
-              </a:cxn>
-              <a:cxn ang="0">
-                <a:pos x="connsiteX20" y="connsiteY20"/>
-              </a:cxn>
-              <a:cxn ang="0">
-                <a:pos x="connsiteX21" y="connsiteY21"/>
-              </a:cxn>
-              <a:cxn ang="0">
-                <a:pos x="connsiteX22" y="connsiteY22"/>
-              </a:cxn>
-              <a:cxn ang="0">
-                <a:pos x="connsiteX23" y="connsiteY23"/>
-              </a:cxn>
-              <a:cxn ang="0">
-                <a:pos x="connsiteX24" y="connsiteY24"/>
-              </a:cxn>
-              <a:cxn ang="0">
-                <a:pos x="connsiteX25" y="connsiteY25"/>
-              </a:cxn>
-              <a:cxn ang="0">
-                <a:pos x="connsiteX26" y="connsiteY26"/>
-              </a:cxn>
-              <a:cxn ang="0">
-                <a:pos x="connsiteX27" y="connsiteY27"/>
-              </a:cxn>
-              <a:cxn ang="0">
-                <a:pos x="connsiteX28" y="connsiteY28"/>
-              </a:cxn>
-              <a:cxn ang="0">
-                <a:pos x="connsiteX29" y="connsiteY29"/>
-              </a:cxn>
-              <a:cxn ang="0">
-                <a:pos x="connsiteX30" y="connsiteY30"/>
-              </a:cxn>
-              <a:cxn ang="0">
-                <a:pos x="connsiteX31" y="connsiteY31"/>
-              </a:cxn>
-              <a:cxn ang="0">
-                <a:pos x="connsiteX32" y="connsiteY32"/>
-              </a:cxn>
-              <a:cxn ang="0">
-                <a:pos x="connsiteX33" y="connsiteY33"/>
-              </a:cxn>
-              <a:cxn ang="0">
-                <a:pos x="connsiteX34" y="connsiteY34"/>
-              </a:cxn>
-              <a:cxn ang="0">
-                <a:pos x="connsiteX35" y="connsiteY35"/>
-              </a:cxn>
-              <a:cxn ang="0">
-                <a:pos x="connsiteX36" y="connsiteY36"/>
-              </a:cxn>
-              <a:cxn ang="0">
-                <a:pos x="connsiteX37" y="connsiteY37"/>
-              </a:cxn>
-              <a:cxn ang="0">
-                <a:pos x="connsiteX38" y="connsiteY38"/>
-              </a:cxn>
-              <a:cxn ang="0">
-                <a:pos x="connsiteX39" y="connsiteY39"/>
-              </a:cxn>
-              <a:cxn ang="0">
-                <a:pos x="connsiteX40" y="connsiteY40"/>
-              </a:cxn>
-              <a:cxn ang="0">
-                <a:pos x="connsiteX41" y="connsiteY41"/>
-              </a:cxn>
-              <a:cxn ang="0">
-                <a:pos x="connsiteX42" y="connsiteY42"/>
-              </a:cxn>
-              <a:cxn ang="0">
-                <a:pos x="connsiteX43" y="connsiteY43"/>
-              </a:cxn>
-              <a:cxn ang="0">
-                <a:pos x="connsiteX44" y="connsiteY44"/>
-              </a:cxn>
-              <a:cxn ang="0">
-                <a:pos x="connsiteX45" y="connsiteY45"/>
-              </a:cxn>
-              <a:cxn ang="0">
-                <a:pos x="connsiteX46" y="connsiteY46"/>
-              </a:cxn>
-            </a:cxnLst>
-            <a:rect l="l" t="t" r="r" b="b"/>
-            <a:pathLst>
-              <a:path w="2428240" h="2714563">
-                <a:moveTo>
-                  <a:pt x="91440" y="2692400"/>
-                </a:moveTo>
-                <a:cubicBezTo>
-                  <a:pt x="15240" y="2663613"/>
-                  <a:pt x="58156" y="2590602"/>
-                  <a:pt x="40640" y="2540000"/>
-                </a:cubicBezTo>
-                <a:cubicBezTo>
-                  <a:pt x="27673" y="2502541"/>
-                  <a:pt x="0" y="2428240"/>
-                  <a:pt x="0" y="2428240"/>
-                </a:cubicBezTo>
-                <a:cubicBezTo>
-                  <a:pt x="7031" y="2371995"/>
-                  <a:pt x="16311" y="2271266"/>
-                  <a:pt x="40640" y="2225040"/>
-                </a:cubicBezTo>
-                <a:cubicBezTo>
-                  <a:pt x="56255" y="2195372"/>
-                  <a:pt x="91047" y="2180282"/>
-                  <a:pt x="111760" y="2153920"/>
-                </a:cubicBezTo>
-                <a:cubicBezTo>
-                  <a:pt x="128629" y="2132450"/>
-                  <a:pt x="138853" y="2106507"/>
-                  <a:pt x="152400" y="2082800"/>
-                </a:cubicBezTo>
-                <a:cubicBezTo>
-                  <a:pt x="159173" y="2052320"/>
-                  <a:pt x="160270" y="2019994"/>
-                  <a:pt x="172720" y="1991360"/>
-                </a:cubicBezTo>
-                <a:cubicBezTo>
-                  <a:pt x="290044" y="1721514"/>
-                  <a:pt x="217921" y="1954157"/>
-                  <a:pt x="294640" y="1767840"/>
-                </a:cubicBezTo>
-                <a:cubicBezTo>
-                  <a:pt x="398059" y="1516681"/>
-                  <a:pt x="267597" y="1790605"/>
-                  <a:pt x="355600" y="1625600"/>
-                </a:cubicBezTo>
-                <a:cubicBezTo>
-                  <a:pt x="373418" y="1592191"/>
-                  <a:pt x="388636" y="1557438"/>
-                  <a:pt x="406400" y="1524000"/>
-                </a:cubicBezTo>
-                <a:cubicBezTo>
-                  <a:pt x="446217" y="1449050"/>
-                  <a:pt x="487321" y="1374790"/>
-                  <a:pt x="528320" y="1300480"/>
-                </a:cubicBezTo>
-                <a:cubicBezTo>
-                  <a:pt x="541510" y="1276573"/>
-                  <a:pt x="557661" y="1254217"/>
-                  <a:pt x="568960" y="1229360"/>
-                </a:cubicBezTo>
-                <a:cubicBezTo>
-                  <a:pt x="606281" y="1147254"/>
-                  <a:pt x="611136" y="1120683"/>
-                  <a:pt x="660400" y="1056640"/>
-                </a:cubicBezTo>
-                <a:cubicBezTo>
-                  <a:pt x="713287" y="987887"/>
-                  <a:pt x="758777" y="911788"/>
-                  <a:pt x="822960" y="853440"/>
-                </a:cubicBezTo>
-                <a:cubicBezTo>
-                  <a:pt x="864395" y="815772"/>
-                  <a:pt x="999733" y="695973"/>
-                  <a:pt x="1036320" y="650240"/>
-                </a:cubicBezTo>
-                <a:cubicBezTo>
-                  <a:pt x="1112181" y="555413"/>
-                  <a:pt x="1038352" y="640080"/>
-                  <a:pt x="1127760" y="558800"/>
-                </a:cubicBezTo>
-                <a:cubicBezTo>
-                  <a:pt x="1149024" y="539470"/>
-                  <a:pt x="1166739" y="516350"/>
-                  <a:pt x="1188720" y="497840"/>
-                </a:cubicBezTo>
-                <a:cubicBezTo>
-                  <a:pt x="1287017" y="415063"/>
-                  <a:pt x="1377215" y="352792"/>
-                  <a:pt x="1493520" y="294640"/>
-                </a:cubicBezTo>
-                <a:cubicBezTo>
-                  <a:pt x="1515572" y="283614"/>
-                  <a:pt x="1540933" y="281093"/>
-                  <a:pt x="1564640" y="274320"/>
-                </a:cubicBezTo>
-                <a:cubicBezTo>
-                  <a:pt x="1930291" y="51750"/>
-                  <a:pt x="1677140" y="192155"/>
-                  <a:pt x="1889760" y="91440"/>
-                </a:cubicBezTo>
-                <a:cubicBezTo>
-                  <a:pt x="1923979" y="75231"/>
-                  <a:pt x="1956204" y="54702"/>
-                  <a:pt x="1991360" y="40640"/>
-                </a:cubicBezTo>
-                <a:cubicBezTo>
-                  <a:pt x="2060692" y="12907"/>
-                  <a:pt x="2088379" y="10923"/>
-                  <a:pt x="2153920" y="0"/>
-                </a:cubicBezTo>
-                <a:cubicBezTo>
-                  <a:pt x="2294382" y="100330"/>
-                  <a:pt x="2351948" y="91195"/>
-                  <a:pt x="2397760" y="213360"/>
-                </a:cubicBezTo>
-                <a:cubicBezTo>
-                  <a:pt x="2410175" y="246467"/>
-                  <a:pt x="2418080" y="281093"/>
-                  <a:pt x="2428240" y="314960"/>
-                </a:cubicBezTo>
-                <a:cubicBezTo>
-                  <a:pt x="2410575" y="403287"/>
-                  <a:pt x="2428538" y="331612"/>
-                  <a:pt x="2387600" y="436880"/>
-                </a:cubicBezTo>
-                <a:cubicBezTo>
-                  <a:pt x="2373233" y="473825"/>
-                  <a:pt x="2364688" y="513185"/>
-                  <a:pt x="2346960" y="548640"/>
-                </a:cubicBezTo>
-                <a:cubicBezTo>
-                  <a:pt x="2330577" y="581405"/>
-                  <a:pt x="2304175" y="608274"/>
-                  <a:pt x="2286000" y="640080"/>
-                </a:cubicBezTo>
-                <a:cubicBezTo>
-                  <a:pt x="2263457" y="679530"/>
-                  <a:pt x="2243595" y="720524"/>
-                  <a:pt x="2225040" y="762000"/>
-                </a:cubicBezTo>
-                <a:cubicBezTo>
-                  <a:pt x="2026289" y="1206266"/>
-                  <a:pt x="2168540" y="884877"/>
-                  <a:pt x="2082800" y="1117600"/>
-                </a:cubicBezTo>
-                <a:cubicBezTo>
-                  <a:pt x="2046487" y="1216165"/>
-                  <a:pt x="2025083" y="1322168"/>
-                  <a:pt x="1971040" y="1412240"/>
-                </a:cubicBezTo>
-                <a:cubicBezTo>
-                  <a:pt x="1871946" y="1577397"/>
-                  <a:pt x="1943833" y="1448228"/>
-                  <a:pt x="1869440" y="1605280"/>
-                </a:cubicBezTo>
-                <a:cubicBezTo>
-                  <a:pt x="1830105" y="1688321"/>
-                  <a:pt x="1761259" y="1810098"/>
-                  <a:pt x="1737360" y="1889760"/>
-                </a:cubicBezTo>
-                <a:lnTo>
-                  <a:pt x="1706880" y="1991360"/>
-                </a:lnTo>
-                <a:cubicBezTo>
-                  <a:pt x="1703493" y="2032000"/>
-                  <a:pt x="1704718" y="2073291"/>
-                  <a:pt x="1696720" y="2113280"/>
-                </a:cubicBezTo>
-                <a:cubicBezTo>
-                  <a:pt x="1694325" y="2125254"/>
-                  <a:pt x="1681861" y="2132838"/>
-                  <a:pt x="1676400" y="2143760"/>
-                </a:cubicBezTo>
-                <a:cubicBezTo>
-                  <a:pt x="1671611" y="2153339"/>
-                  <a:pt x="1668484" y="2163768"/>
-                  <a:pt x="1666240" y="2174240"/>
-                </a:cubicBezTo>
-                <a:cubicBezTo>
-                  <a:pt x="1658306" y="2211264"/>
-                  <a:pt x="1658522" y="2250295"/>
-                  <a:pt x="1645920" y="2286000"/>
-                </a:cubicBezTo>
-                <a:cubicBezTo>
-                  <a:pt x="1637792" y="2309029"/>
-                  <a:pt x="1620170" y="2327603"/>
-                  <a:pt x="1605280" y="2346960"/>
-                </a:cubicBezTo>
-                <a:cubicBezTo>
-                  <a:pt x="1575839" y="2385233"/>
-                  <a:pt x="1520177" y="2446314"/>
-                  <a:pt x="1483360" y="2479040"/>
-                </a:cubicBezTo>
-                <a:cubicBezTo>
-                  <a:pt x="1474234" y="2487152"/>
-                  <a:pt x="1461514" y="2490726"/>
-                  <a:pt x="1452880" y="2499360"/>
-                </a:cubicBezTo>
-                <a:cubicBezTo>
-                  <a:pt x="1437546" y="2514694"/>
-                  <a:pt x="1428560" y="2535880"/>
-                  <a:pt x="1412240" y="2550160"/>
-                </a:cubicBezTo>
-                <a:cubicBezTo>
-                  <a:pt x="1400842" y="2560133"/>
-                  <a:pt x="1384202" y="2562079"/>
-                  <a:pt x="1371600" y="2570480"/>
-                </a:cubicBezTo>
-                <a:cubicBezTo>
-                  <a:pt x="1343421" y="2589266"/>
-                  <a:pt x="1321268" y="2617685"/>
-                  <a:pt x="1290320" y="2631440"/>
-                </a:cubicBezTo>
-                <a:cubicBezTo>
-                  <a:pt x="1258759" y="2645467"/>
-                  <a:pt x="1222318" y="2643760"/>
-                  <a:pt x="1188720" y="2651760"/>
-                </a:cubicBezTo>
-                <a:cubicBezTo>
-                  <a:pt x="1151156" y="2660704"/>
-                  <a:pt x="1114762" y="2674365"/>
-                  <a:pt x="1076960" y="2682240"/>
-                </a:cubicBezTo>
-                <a:cubicBezTo>
-                  <a:pt x="883020" y="2722644"/>
-                  <a:pt x="703459" y="2710181"/>
-                  <a:pt x="497840" y="2712720"/>
-                </a:cubicBezTo>
-                <a:cubicBezTo>
-                  <a:pt x="372543" y="2714267"/>
-                  <a:pt x="167640" y="2721187"/>
-                  <a:pt x="91440" y="2692400"/>
-                </a:cubicBezTo>
-                <a:close/>
-              </a:path>
-            </a:pathLst>
-          </a:custGeom>
-          <a:solidFill>
-            <a:schemeClr val="accent6">
-              <a:lumMod val="40000"/>
-              <a:lumOff val="60000"/>
-              <a:alpha val="25000"/>
-            </a:schemeClr>
-          </a:solidFill>
-        </p:spPr>
-        <p:style>
-          <a:lnRef idx="2">
-            <a:schemeClr val="accent1">
-              <a:shade val="50000"/>
-            </a:schemeClr>
-          </a:lnRef>
-          <a:fillRef idx="1">
-            <a:schemeClr val="accent1"/>
-          </a:fillRef>
-          <a:effectRef idx="0">
-            <a:schemeClr val="accent1"/>
-          </a:effectRef>
-          <a:fontRef idx="minor">
-            <a:schemeClr val="lt1"/>
-          </a:fontRef>
-        </p:style>
-        <p:txBody>
-          <a:bodyPr rtlCol="0" anchor="ctr"/>
-          <a:lstStyle/>
-          <a:p>
-            <a:pPr marL="0" marR="0" lvl="0" indent="0" algn="ctr" defTabSz="914400" rtl="0" eaLnBrk="1" fontAlgn="auto" latinLnBrk="0" hangingPunct="1">
-              <a:lnSpc>
-                <a:spcPct val="100000"/>
-              </a:lnSpc>
-              <a:spcBef>
-                <a:spcPts val="0"/>
-              </a:spcBef>
-              <a:spcAft>
-                <a:spcPts val="0"/>
-              </a:spcAft>
-              <a:buClrTx/>
-              <a:buSzTx/>
-              <a:buFontTx/>
-              <a:buNone/>
-              <a:tabLst/>
-              <a:defRPr/>
-            </a:pPr>
-            <a:endParaRPr kumimoji="0" lang="en-US" sz="1800" b="0" i="0" u="none" strike="noStrike" kern="1200" cap="none" spc="0" normalizeH="0" baseline="0" noProof="0">
-              <a:ln>
-                <a:noFill/>
-              </a:ln>
-              <a:solidFill>
-                <a:prstClr val="white"/>
-              </a:solidFill>
-              <a:effectLst/>
-              <a:uLnTx/>
-              <a:uFillTx/>
-              <a:latin typeface="Calibri" panose="020F0502020204030204"/>
-              <a:ea typeface="+mn-ea"/>
-              <a:cs typeface="+mn-cs"/>
-            </a:endParaRPr>
-          </a:p>
-        </p:txBody>
-      </p:sp>
-    </p:spTree>
-    <p:extLst>
-      <p:ext uri="{BB962C8B-B14F-4D97-AF65-F5344CB8AC3E}">
-        <p14:creationId xmlns:p14="http://schemas.microsoft.com/office/powerpoint/2010/main" val="917134264"/>
-      </p:ext>
-    </p:extLst>
-  </p:cSld>
-  <p:clrMapOvr>
-    <a:masterClrMapping/>
-  </p:clrMapOvr>
-  <mc:AlternateContent xmlns:mc="http://schemas.openxmlformats.org/markup-compatibility/2006" xmlns:p159="http://schemas.microsoft.com/office/powerpoint/2015/09/main">
-    <mc:Choice Requires="p159">
-      <p:transition xmlns:p14="http://schemas.microsoft.com/office/powerpoint/2010/main" spd="slow" p14:dur="2000">
-        <p159:morph option="byObject"/>
-      </p:transition>
-    </mc:Choice>
-    <mc:Fallback xmlns="">
-      <p:transition spd="slow">
-        <p:fade/>
-      </p:transition>
-    </mc:Fallback>
-  </mc:AlternateContent>
-</p:sld>
-</file>
-
-<file path=ppt/slides/slide12.xml><?xml version="1.0" encoding="utf-8"?>
-<p:sld xmlns:a="http://schemas.openxmlformats.org/drawingml/2006/main" xmlns:r="http://schemas.openxmlformats.org/officeDocument/2006/relationships" xmlns:p="http://schemas.openxmlformats.org/presentationml/2006/main">
-  <p:cSld>
-    <p:spTree>
-      <p:nvGrpSpPr>
-        <p:cNvPr id="1" name=""/>
-        <p:cNvGrpSpPr/>
-        <p:nvPr/>
-      </p:nvGrpSpPr>
-      <p:grpSpPr>
-        <a:xfrm>
-          <a:off x="0" y="0"/>
-          <a:ext cx="0" cy="0"/>
-          <a:chOff x="0" y="0"/>
-          <a:chExt cx="0" cy="0"/>
-        </a:xfrm>
-      </p:grpSpPr>
-      <p:sp>
-        <p:nvSpPr>
-          <p:cNvPr id="2" name="Title 1">
-            <a:extLst>
-              <a:ext uri="{FF2B5EF4-FFF2-40B4-BE49-F238E27FC236}">
-                <a16:creationId xmlns:a16="http://schemas.microsoft.com/office/drawing/2014/main" id="{CF4E52D4-550E-4C42-A319-86B73A606E24}"/>
-              </a:ext>
-            </a:extLst>
-          </p:cNvPr>
-          <p:cNvSpPr>
-            <a:spLocks noGrp="1"/>
-          </p:cNvSpPr>
-          <p:nvPr>
-            <p:ph type="title"/>
-          </p:nvPr>
-        </p:nvSpPr>
-        <p:spPr/>
-        <p:txBody>
-          <a:bodyPr/>
-          <a:lstStyle/>
-          <a:p>
-            <a:r>
-              <a:rPr lang="en-US" dirty="0"/>
-              <a:t>Why Do Decision Trees Tend to Overfit?</a:t>
-            </a:r>
-          </a:p>
-        </p:txBody>
-      </p:sp>
-      <mc:AlternateContent xmlns:mc="http://schemas.openxmlformats.org/markup-compatibility/2006" xmlns:a14="http://schemas.microsoft.com/office/drawing/2010/main">
-        <mc:Choice Requires="a14">
-          <p:sp>
-            <p:nvSpPr>
-              <p:cNvPr id="3" name="Content Placeholder 2">
-                <a:extLst>
-                  <a:ext uri="{FF2B5EF4-FFF2-40B4-BE49-F238E27FC236}">
-                    <a16:creationId xmlns:a16="http://schemas.microsoft.com/office/drawing/2014/main" id="{E00C7A32-1B77-4D1D-A6B5-83CEADF85C48}"/>
-                  </a:ext>
-                </a:extLst>
-              </p:cNvPr>
-              <p:cNvSpPr>
-                <a:spLocks noGrp="1"/>
-              </p:cNvSpPr>
-              <p:nvPr>
-                <p:ph idx="1"/>
-              </p:nvPr>
-            </p:nvSpPr>
-            <p:spPr>
-              <a:xfrm>
-                <a:off x="838200" y="1825625"/>
-                <a:ext cx="7009016" cy="4351338"/>
-              </a:xfrm>
-            </p:spPr>
-            <p:txBody>
-              <a:bodyPr>
-                <a:normAutofit/>
-              </a:bodyPr>
-              <a:lstStyle/>
-              <a:p>
-                <a:r>
-                  <a:rPr lang="en-US" dirty="0"/>
-                  <a:t>Each additional split adds complexity</a:t>
-                </a:r>
-              </a:p>
-              <a:p>
-                <a:endParaRPr lang="en-US" dirty="0"/>
-              </a:p>
-              <a:p>
-                <a:r>
-                  <a:rPr lang="en-US" dirty="0"/>
-                  <a:t>Similar to estimating more </a:t>
-                </a:r>
-                <a14:m>
-                  <m:oMath xmlns:m="http://schemas.openxmlformats.org/officeDocument/2006/math">
-                    <m:r>
-                      <a:rPr lang="en-US" b="0" i="1" smtClean="0">
-                        <a:latin typeface="Cambria Math" panose="02040503050406030204" pitchFamily="18" charset="0"/>
-                      </a:rPr>
-                      <m:t>𝛽</m:t>
-                    </m:r>
-                  </m:oMath>
-                </a14:m>
-                <a:r>
-                  <a:rPr lang="en-US" dirty="0"/>
-                  <a:t>s in linear regression</a:t>
-                </a:r>
-              </a:p>
-              <a:p>
-                <a:endParaRPr lang="en-US" dirty="0"/>
-              </a:p>
-              <a:p>
-                <a:r>
-                  <a:rPr lang="en-US" dirty="0"/>
-                  <a:t>Biggest challenge is that as we have more leaves, the number of datapoints in each leaf will fall.</a:t>
-                </a:r>
-              </a:p>
-              <a:p>
-                <a:endParaRPr lang="en-US" dirty="0"/>
-              </a:p>
-              <a:p>
-                <a:pPr marL="0" indent="0">
-                  <a:buNone/>
-                </a:pPr>
-                <a:endParaRPr lang="en-US" dirty="0"/>
-              </a:p>
-              <a:p>
-                <a:endParaRPr lang="en-US" dirty="0"/>
-              </a:p>
-              <a:p>
-                <a:endParaRPr lang="en-US" dirty="0"/>
-              </a:p>
-            </p:txBody>
-          </p:sp>
-        </mc:Choice>
-        <mc:Fallback xmlns="">
-          <p:sp>
-            <p:nvSpPr>
-              <p:cNvPr id="3" name="Content Placeholder 2">
-                <a:extLst>
-                  <a:ext uri="{FF2B5EF4-FFF2-40B4-BE49-F238E27FC236}">
-                    <a16:creationId xmlns:a16="http://schemas.microsoft.com/office/drawing/2014/main" id="{E00C7A32-1B77-4D1D-A6B5-83CEADF85C48}"/>
-                  </a:ext>
-                </a:extLst>
-              </p:cNvPr>
-              <p:cNvSpPr>
-                <a:spLocks noGrp="1" noRot="1" noChangeAspect="1" noMove="1" noResize="1" noEditPoints="1" noAdjustHandles="1" noChangeArrowheads="1" noChangeShapeType="1" noTextEdit="1"/>
-              </p:cNvSpPr>
-              <p:nvPr>
-                <p:ph idx="1"/>
-              </p:nvPr>
-            </p:nvSpPr>
-            <p:spPr>
-              <a:xfrm>
-                <a:off x="838200" y="1825625"/>
-                <a:ext cx="7009016" cy="4351338"/>
-              </a:xfrm>
-              <a:blipFill>
-                <a:blip r:embed="rId2"/>
-                <a:stretch>
-                  <a:fillRect l="-1567" t="-2241" r="-1567"/>
-                </a:stretch>
-              </a:blipFill>
-            </p:spPr>
-            <p:txBody>
-              <a:bodyPr/>
-              <a:lstStyle/>
-              <a:p>
-                <a:r>
-                  <a:rPr lang="en-US">
-                    <a:noFill/>
-                  </a:rPr>
-                  <a:t> </a:t>
-                </a:r>
-              </a:p>
-            </p:txBody>
-          </p:sp>
-        </mc:Fallback>
-      </mc:AlternateContent>
-      <p:pic>
-        <p:nvPicPr>
-          <p:cNvPr id="18" name="Picture 17">
-            <a:extLst>
-              <a:ext uri="{FF2B5EF4-FFF2-40B4-BE49-F238E27FC236}">
-                <a16:creationId xmlns:a16="http://schemas.microsoft.com/office/drawing/2014/main" id="{0EFE97A5-DEA8-4654-A79B-7EC406EE1B36}"/>
-              </a:ext>
-            </a:extLst>
-          </p:cNvPr>
-          <p:cNvPicPr>
-            <a:picLocks noChangeAspect="1"/>
-          </p:cNvPicPr>
-          <p:nvPr/>
-        </p:nvPicPr>
-        <p:blipFill>
-          <a:blip r:embed="rId3"/>
-          <a:stretch>
-            <a:fillRect/>
-          </a:stretch>
-        </p:blipFill>
-        <p:spPr>
-          <a:xfrm>
-            <a:off x="8036581" y="1690688"/>
-            <a:ext cx="4041879" cy="5167312"/>
-          </a:xfrm>
-          <a:prstGeom prst="rect">
-            <a:avLst/>
-          </a:prstGeom>
-        </p:spPr>
-      </p:pic>
-    </p:spTree>
-    <p:extLst>
-      <p:ext uri="{BB962C8B-B14F-4D97-AF65-F5344CB8AC3E}">
-        <p14:creationId xmlns:p14="http://schemas.microsoft.com/office/powerpoint/2010/main" val="614934555"/>
-      </p:ext>
-    </p:extLst>
-  </p:cSld>
-  <p:clrMapOvr>
-    <a:masterClrMapping/>
-  </p:clrMapOvr>
-  <mc:AlternateContent xmlns:mc="http://schemas.openxmlformats.org/markup-compatibility/2006" xmlns:p159="http://schemas.microsoft.com/office/powerpoint/2015/09/main">
-    <mc:Choice Requires="p159">
-      <p:transition xmlns:p14="http://schemas.microsoft.com/office/powerpoint/2010/main" spd="slow" p14:dur="2000">
-        <p159:morph option="byObject"/>
-      </p:transition>
-    </mc:Choice>
-    <mc:Fallback xmlns="">
-      <p:transition spd="slow">
-        <p:fade/>
-      </p:transition>
-    </mc:Fallback>
-  </mc:AlternateContent>
-</p:sld>
-</file>
-
-<file path=ppt/slides/slide13.xml><?xml version="1.0" encoding="utf-8"?>
-<p:sld xmlns:a="http://schemas.openxmlformats.org/drawingml/2006/main" xmlns:r="http://schemas.openxmlformats.org/officeDocument/2006/relationships" xmlns:p="http://schemas.openxmlformats.org/presentationml/2006/main">
-  <p:cSld>
-    <p:spTree>
-      <p:nvGrpSpPr>
-        <p:cNvPr id="1" name=""/>
-        <p:cNvGrpSpPr/>
-        <p:nvPr/>
-      </p:nvGrpSpPr>
-      <p:grpSpPr>
-        <a:xfrm>
-          <a:off x="0" y="0"/>
-          <a:ext cx="0" cy="0"/>
-          <a:chOff x="0" y="0"/>
-          <a:chExt cx="0" cy="0"/>
-        </a:xfrm>
-      </p:grpSpPr>
-      <p:sp>
-        <p:nvSpPr>
-          <p:cNvPr id="2" name="Title 1">
-            <a:extLst>
-              <a:ext uri="{FF2B5EF4-FFF2-40B4-BE49-F238E27FC236}">
-                <a16:creationId xmlns:a16="http://schemas.microsoft.com/office/drawing/2014/main" id="{B52BF51B-318B-47C8-B5AE-01D441B53CC1}"/>
-              </a:ext>
-            </a:extLst>
-          </p:cNvPr>
-          <p:cNvSpPr>
-            <a:spLocks noGrp="1"/>
-          </p:cNvSpPr>
-          <p:nvPr>
-            <p:ph type="title"/>
-          </p:nvPr>
-        </p:nvSpPr>
-        <p:spPr/>
-        <p:txBody>
-          <a:bodyPr/>
-          <a:lstStyle/>
-          <a:p>
-            <a:r>
-              <a:rPr lang="en-US" dirty="0"/>
-              <a:t>How Do We Reduce/Prevent Over-fitting?</a:t>
-            </a:r>
-          </a:p>
-        </p:txBody>
-      </p:sp>
-      <mc:AlternateContent xmlns:mc="http://schemas.openxmlformats.org/markup-compatibility/2006" xmlns:a14="http://schemas.microsoft.com/office/drawing/2010/main">
-        <mc:Choice Requires="a14">
-          <p:sp>
-            <p:nvSpPr>
-              <p:cNvPr id="3" name="Content Placeholder 2">
-                <a:extLst>
-                  <a:ext uri="{FF2B5EF4-FFF2-40B4-BE49-F238E27FC236}">
-                    <a16:creationId xmlns:a16="http://schemas.microsoft.com/office/drawing/2014/main" id="{3F8230F5-4881-425C-97B7-0392AD7EE166}"/>
-                  </a:ext>
-                </a:extLst>
-              </p:cNvPr>
-              <p:cNvSpPr>
-                <a:spLocks noGrp="1"/>
-              </p:cNvSpPr>
-              <p:nvPr>
-                <p:ph idx="1"/>
-              </p:nvPr>
-            </p:nvSpPr>
-            <p:spPr/>
-            <p:txBody>
-              <a:bodyPr/>
-              <a:lstStyle/>
-              <a:p>
-                <a:r>
-                  <a:rPr lang="en-US" dirty="0"/>
-                  <a:t>Regularize:</a:t>
-                </a:r>
-              </a:p>
-              <a:p>
-                <a:pPr lvl="1"/>
-                <a:r>
-                  <a:rPr lang="en-US" dirty="0"/>
-                  <a:t>“Make regular” --- exert more control over the model building process </a:t>
-                </a:r>
-              </a:p>
-              <a:p>
-                <a:pPr lvl="1"/>
-                <a:endParaRPr lang="en-US" dirty="0"/>
-              </a:p>
-              <a:p>
-                <a:pPr lvl="1"/>
-                <a:r>
-                  <a:rPr lang="en-US" dirty="0"/>
-                  <a:t>Ordinary least squares</a:t>
-                </a:r>
-              </a:p>
-              <a:p>
-                <a:pPr lvl="2"/>
-                <a:r>
-                  <a:rPr lang="en-US" dirty="0"/>
-                  <a:t>We changed the objective function to penalize big </a:t>
-                </a:r>
-                <a14:m>
-                  <m:oMath xmlns:m="http://schemas.openxmlformats.org/officeDocument/2006/math">
-                    <m:r>
-                      <a:rPr lang="en-US" b="0" i="1" smtClean="0">
-                        <a:latin typeface="Cambria Math" panose="02040503050406030204" pitchFamily="18" charset="0"/>
-                      </a:rPr>
-                      <m:t>𝛽</m:t>
-                    </m:r>
-                  </m:oMath>
-                </a14:m>
-                <a:r>
-                  <a:rPr lang="en-US" dirty="0"/>
-                  <a:t>s</a:t>
-                </a:r>
-              </a:p>
-              <a:p>
-                <a:pPr lvl="1"/>
-                <a:endParaRPr lang="en-US" dirty="0"/>
-              </a:p>
-              <a:p>
-                <a:pPr lvl="1"/>
-                <a:r>
-                  <a:rPr lang="en-US" dirty="0"/>
-                  <a:t>Decision trees</a:t>
-                </a:r>
-              </a:p>
-              <a:p>
-                <a:pPr lvl="2"/>
-                <a:r>
-                  <a:rPr lang="en-US" dirty="0"/>
-                  <a:t>Limit the growth of tree depth</a:t>
-                </a:r>
-              </a:p>
-            </p:txBody>
-          </p:sp>
-        </mc:Choice>
-        <mc:Fallback xmlns="">
-          <p:sp>
-            <p:nvSpPr>
-              <p:cNvPr id="3" name="Content Placeholder 2">
-                <a:extLst>
-                  <a:ext uri="{FF2B5EF4-FFF2-40B4-BE49-F238E27FC236}">
-                    <a16:creationId xmlns:a16="http://schemas.microsoft.com/office/drawing/2014/main" id="{3F8230F5-4881-425C-97B7-0392AD7EE166}"/>
-                  </a:ext>
-                </a:extLst>
-              </p:cNvPr>
-              <p:cNvSpPr>
-                <a:spLocks noGrp="1" noRot="1" noChangeAspect="1" noMove="1" noResize="1" noEditPoints="1" noAdjustHandles="1" noChangeArrowheads="1" noChangeShapeType="1" noTextEdit="1"/>
-              </p:cNvSpPr>
-              <p:nvPr>
-                <p:ph idx="1"/>
-              </p:nvPr>
-            </p:nvSpPr>
-            <p:spPr>
-              <a:blipFill>
-                <a:blip r:embed="rId2"/>
-                <a:stretch>
-                  <a:fillRect l="-1043" t="-2241"/>
-                </a:stretch>
-              </a:blipFill>
-            </p:spPr>
-            <p:txBody>
-              <a:bodyPr/>
-              <a:lstStyle/>
-              <a:p>
-                <a:r>
-                  <a:rPr lang="en-US">
-                    <a:noFill/>
-                  </a:rPr>
-                  <a:t> </a:t>
-                </a:r>
-              </a:p>
-            </p:txBody>
-          </p:sp>
-        </mc:Fallback>
-      </mc:AlternateContent>
-    </p:spTree>
-    <p:extLst>
-      <p:ext uri="{BB962C8B-B14F-4D97-AF65-F5344CB8AC3E}">
-        <p14:creationId xmlns:p14="http://schemas.microsoft.com/office/powerpoint/2010/main" val="184234522"/>
-      </p:ext>
-    </p:extLst>
-  </p:cSld>
-  <p:clrMapOvr>
-    <a:masterClrMapping/>
-  </p:clrMapOvr>
-  <mc:AlternateContent xmlns:mc="http://schemas.openxmlformats.org/markup-compatibility/2006" xmlns:p159="http://schemas.microsoft.com/office/powerpoint/2015/09/main">
-    <mc:Choice Requires="p159">
-      <p:transition xmlns:p14="http://schemas.microsoft.com/office/powerpoint/2010/main" spd="slow" p14:dur="2000">
-        <p159:morph option="byObject"/>
-      </p:transition>
-    </mc:Choice>
-    <mc:Fallback xmlns="">
-      <p:transition spd="slow">
-        <p:fade/>
-      </p:transition>
-    </mc:Fallback>
-  </mc:AlternateContent>
-</p:sld>
-</file>
-
-<file path=ppt/slides/slide14.xml><?xml version="1.0" encoding="utf-8"?>
-<p:sld xmlns:a="http://schemas.openxmlformats.org/drawingml/2006/main" xmlns:r="http://schemas.openxmlformats.org/officeDocument/2006/relationships" xmlns:p="http://schemas.openxmlformats.org/presentationml/2006/main">
-  <p:cSld>
-    <p:spTree>
-      <p:nvGrpSpPr>
-        <p:cNvPr id="1" name=""/>
-        <p:cNvGrpSpPr/>
-        <p:nvPr/>
-      </p:nvGrpSpPr>
-      <p:grpSpPr>
-        <a:xfrm>
-          <a:off x="0" y="0"/>
-          <a:ext cx="0" cy="0"/>
-          <a:chOff x="0" y="0"/>
-          <a:chExt cx="0" cy="0"/>
-        </a:xfrm>
-      </p:grpSpPr>
-      <p:sp>
-        <p:nvSpPr>
-          <p:cNvPr id="2" name="Title 1">
-            <a:extLst>
-              <a:ext uri="{FF2B5EF4-FFF2-40B4-BE49-F238E27FC236}">
-                <a16:creationId xmlns:a16="http://schemas.microsoft.com/office/drawing/2014/main" id="{AE844B35-62D8-4B7B-AD58-D17B5B8EDDF4}"/>
-              </a:ext>
-            </a:extLst>
-          </p:cNvPr>
-          <p:cNvSpPr>
-            <a:spLocks noGrp="1"/>
-          </p:cNvSpPr>
-          <p:nvPr>
-            <p:ph type="title"/>
-          </p:nvPr>
-        </p:nvSpPr>
-        <p:spPr/>
-        <p:txBody>
-          <a:bodyPr/>
-          <a:lstStyle/>
-          <a:p>
-            <a:r>
-              <a:rPr lang="en-US" dirty="0"/>
-              <a:t>How Do We Regularize</a:t>
-            </a:r>
-          </a:p>
-        </p:txBody>
-      </p:sp>
-      <mc:AlternateContent xmlns:mc="http://schemas.openxmlformats.org/markup-compatibility/2006" xmlns:a14="http://schemas.microsoft.com/office/drawing/2010/main">
-        <mc:Choice Requires="a14">
-          <p:sp>
-            <p:nvSpPr>
-              <p:cNvPr id="3" name="Content Placeholder 2">
-                <a:extLst>
-                  <a:ext uri="{FF2B5EF4-FFF2-40B4-BE49-F238E27FC236}">
-                    <a16:creationId xmlns:a16="http://schemas.microsoft.com/office/drawing/2014/main" id="{11BB22B1-CF02-44EC-83CC-68AC74E7C01B}"/>
-                  </a:ext>
-                </a:extLst>
-              </p:cNvPr>
-              <p:cNvSpPr>
-                <a:spLocks noGrp="1"/>
-              </p:cNvSpPr>
-              <p:nvPr>
-                <p:ph idx="1"/>
-              </p:nvPr>
-            </p:nvSpPr>
-            <p:spPr/>
-            <p:txBody>
-              <a:bodyPr>
-                <a:normAutofit lnSpcReduction="10000"/>
-              </a:bodyPr>
-              <a:lstStyle/>
-              <a:p>
-                <a:r>
-                  <a:rPr lang="en-US" dirty="0"/>
-                  <a:t>Through specifying </a:t>
-                </a:r>
-                <a:r>
-                  <a:rPr lang="en-US" b="1" i="1" dirty="0"/>
-                  <a:t>hyperparameters</a:t>
-                </a:r>
-                <a:r>
-                  <a:rPr lang="en-US" dirty="0"/>
-                  <a:t> that exert that extra control over the model building process</a:t>
-                </a:r>
-              </a:p>
-              <a:p>
-                <a:endParaRPr lang="en-US" dirty="0"/>
-              </a:p>
-              <a:p>
-                <a:r>
-                  <a:rPr lang="en-US" dirty="0"/>
-                  <a:t>Linear regression: </a:t>
-                </a:r>
-                <a14:m>
-                  <m:oMath xmlns:m="http://schemas.openxmlformats.org/officeDocument/2006/math">
-                    <m:r>
-                      <a:rPr lang="en-US" b="0" i="1" smtClean="0">
-                        <a:latin typeface="Cambria Math" panose="02040503050406030204" pitchFamily="18" charset="0"/>
-                      </a:rPr>
-                      <m:t>𝜆</m:t>
-                    </m:r>
-                  </m:oMath>
-                </a14:m>
-                <a:r>
-                  <a:rPr lang="en-US" dirty="0"/>
-                  <a:t>, lambda</a:t>
-                </a:r>
-              </a:p>
-              <a:p>
-                <a:pPr lvl="1"/>
-                <a:r>
-                  <a:rPr lang="en-US" dirty="0"/>
-                  <a:t>Controls how much to penalize for big </a:t>
-                </a:r>
-                <a14:m>
-                  <m:oMath xmlns:m="http://schemas.openxmlformats.org/officeDocument/2006/math">
-                    <m:r>
-                      <a:rPr lang="en-US" b="0" i="1" smtClean="0">
-                        <a:latin typeface="Cambria Math" panose="02040503050406030204" pitchFamily="18" charset="0"/>
-                      </a:rPr>
-                      <m:t>𝛽</m:t>
-                    </m:r>
-                  </m:oMath>
-                </a14:m>
-                <a:r>
-                  <a:rPr lang="en-US" dirty="0"/>
-                  <a:t>s</a:t>
-                </a:r>
-              </a:p>
-              <a:p>
-                <a:pPr lvl="2"/>
-                <a14:m>
-                  <m:oMath xmlns:m="http://schemas.openxmlformats.org/officeDocument/2006/math">
-                    <m:nary>
-                      <m:naryPr>
-                        <m:chr m:val="∑"/>
-                        <m:supHide m:val="on"/>
-                        <m:ctrlPr>
-                          <a:rPr lang="en-US" i="1" smtClean="0">
-                            <a:latin typeface="Cambria Math" panose="02040503050406030204" pitchFamily="18" charset="0"/>
-                          </a:rPr>
-                        </m:ctrlPr>
-                      </m:naryPr>
-                      <m:sub>
-                        <m:r>
-                          <a:rPr lang="en-US" i="1">
-                            <a:latin typeface="Cambria Math" panose="02040503050406030204" pitchFamily="18" charset="0"/>
-                          </a:rPr>
-                          <m:t>𝑖</m:t>
-                        </m:r>
-                      </m:sub>
-                      <m:sup/>
-                      <m:e>
-                        <m:sSup>
-                          <m:sSupPr>
-                            <m:ctrlPr>
-                              <a:rPr lang="en-US" i="1">
-                                <a:latin typeface="Cambria Math" panose="02040503050406030204" pitchFamily="18" charset="0"/>
-                              </a:rPr>
-                            </m:ctrlPr>
-                          </m:sSupPr>
-                          <m:e>
-                            <m:d>
-                              <m:dPr>
-                                <m:ctrlPr>
-                                  <a:rPr lang="en-US" i="1">
-                                    <a:latin typeface="Cambria Math" panose="02040503050406030204" pitchFamily="18" charset="0"/>
-                                  </a:rPr>
-                                </m:ctrlPr>
-                              </m:dPr>
-                              <m:e>
-                                <m:sSub>
-                                  <m:sSubPr>
-                                    <m:ctrlPr>
-                                      <a:rPr lang="en-US" i="1">
-                                        <a:latin typeface="Cambria Math" panose="02040503050406030204" pitchFamily="18" charset="0"/>
-                                      </a:rPr>
-                                    </m:ctrlPr>
-                                  </m:sSubPr>
-                                  <m:e>
-                                    <m:r>
-                                      <a:rPr lang="en-US" i="1">
-                                        <a:latin typeface="Cambria Math" panose="02040503050406030204" pitchFamily="18" charset="0"/>
-                                      </a:rPr>
-                                      <m:t>𝑌</m:t>
-                                    </m:r>
-                                  </m:e>
-                                  <m:sub>
-                                    <m:r>
-                                      <a:rPr lang="en-US" i="1">
-                                        <a:latin typeface="Cambria Math" panose="02040503050406030204" pitchFamily="18" charset="0"/>
-                                      </a:rPr>
-                                      <m:t>𝑖</m:t>
-                                    </m:r>
-                                  </m:sub>
-                                </m:sSub>
-                                <m:r>
-                                  <a:rPr lang="en-US" i="1">
-                                    <a:latin typeface="Cambria Math" panose="02040503050406030204" pitchFamily="18" charset="0"/>
-                                  </a:rPr>
-                                  <m:t>−</m:t>
-                                </m:r>
-                                <m:sSub>
-                                  <m:sSubPr>
-                                    <m:ctrlPr>
-                                      <a:rPr lang="en-US" i="1">
-                                        <a:latin typeface="Cambria Math" panose="02040503050406030204" pitchFamily="18" charset="0"/>
-                                      </a:rPr>
-                                    </m:ctrlPr>
-                                  </m:sSubPr>
-                                  <m:e>
-                                    <m:acc>
-                                      <m:accPr>
-                                        <m:chr m:val="̂"/>
-                                        <m:ctrlPr>
-                                          <a:rPr lang="en-US" i="1">
-                                            <a:latin typeface="Cambria Math" panose="02040503050406030204" pitchFamily="18" charset="0"/>
-                                          </a:rPr>
-                                        </m:ctrlPr>
-                                      </m:accPr>
-                                      <m:e>
-                                        <m:r>
-                                          <a:rPr lang="en-US" i="1">
-                                            <a:latin typeface="Cambria Math" panose="02040503050406030204" pitchFamily="18" charset="0"/>
-                                          </a:rPr>
-                                          <m:t>𝑌</m:t>
-                                        </m:r>
-                                      </m:e>
-                                    </m:acc>
-                                  </m:e>
-                                  <m:sub>
-                                    <m:r>
-                                      <a:rPr lang="en-US" i="1">
-                                        <a:latin typeface="Cambria Math" panose="02040503050406030204" pitchFamily="18" charset="0"/>
-                                      </a:rPr>
-                                      <m:t>𝑖</m:t>
-                                    </m:r>
-                                  </m:sub>
-                                </m:sSub>
-                              </m:e>
-                            </m:d>
-                          </m:e>
-                          <m:sup>
-                            <m:r>
-                              <a:rPr lang="en-US" i="1">
-                                <a:latin typeface="Cambria Math" panose="02040503050406030204" pitchFamily="18" charset="0"/>
-                              </a:rPr>
-                              <m:t>2</m:t>
-                            </m:r>
-                          </m:sup>
-                        </m:sSup>
-                      </m:e>
-                    </m:nary>
-                    <m:r>
-                      <a:rPr lang="en-US" b="0" i="1" smtClean="0">
-                        <a:latin typeface="Cambria Math" panose="02040503050406030204" pitchFamily="18" charset="0"/>
-                      </a:rPr>
-                      <m:t>+</m:t>
-                    </m:r>
-                    <m:r>
-                      <a:rPr lang="en-US" b="0" i="1" smtClean="0">
-                        <a:latin typeface="Cambria Math" panose="02040503050406030204" pitchFamily="18" charset="0"/>
-                      </a:rPr>
-                      <m:t>𝜆</m:t>
-                    </m:r>
-                    <m:r>
-                      <a:rPr lang="en-US" b="0" i="1" smtClean="0">
-                        <a:latin typeface="Cambria Math" panose="02040503050406030204" pitchFamily="18" charset="0"/>
-                      </a:rPr>
-                      <m:t> </m:t>
-                    </m:r>
-                    <m:nary>
-                      <m:naryPr>
-                        <m:chr m:val="∑"/>
-                        <m:supHide m:val="on"/>
-                        <m:ctrlPr>
-                          <a:rPr lang="en-US" b="0" i="1" smtClean="0">
-                            <a:latin typeface="Cambria Math" panose="02040503050406030204" pitchFamily="18" charset="0"/>
-                          </a:rPr>
-                        </m:ctrlPr>
-                      </m:naryPr>
-                      <m:sub>
-                        <m:r>
-                          <a:rPr lang="en-US" b="0" i="1" smtClean="0">
-                            <a:latin typeface="Cambria Math" panose="02040503050406030204" pitchFamily="18" charset="0"/>
-                          </a:rPr>
-                          <m:t>𝑗</m:t>
-                        </m:r>
-                      </m:sub>
-                      <m:sup/>
-                      <m:e>
-                        <m:sSubSup>
-                          <m:sSubSupPr>
-                            <m:ctrlPr>
-                              <a:rPr lang="en-US" b="0" i="1" smtClean="0">
-                                <a:latin typeface="Cambria Math" panose="02040503050406030204" pitchFamily="18" charset="0"/>
-                              </a:rPr>
-                            </m:ctrlPr>
-                          </m:sSubSupPr>
-                          <m:e>
-                            <m:r>
-                              <a:rPr lang="en-US" b="0" i="1" smtClean="0">
-                                <a:latin typeface="Cambria Math" panose="02040503050406030204" pitchFamily="18" charset="0"/>
-                              </a:rPr>
-                              <m:t>𝛽</m:t>
-                            </m:r>
-                          </m:e>
-                          <m:sub>
-                            <m:r>
-                              <a:rPr lang="en-US" b="0" i="1" smtClean="0">
-                                <a:latin typeface="Cambria Math" panose="02040503050406030204" pitchFamily="18" charset="0"/>
-                              </a:rPr>
-                              <m:t>𝑗</m:t>
-                            </m:r>
-                          </m:sub>
-                          <m:sup>
-                            <m:r>
-                              <a:rPr lang="en-US" b="0" i="1" smtClean="0">
-                                <a:latin typeface="Cambria Math" panose="02040503050406030204" pitchFamily="18" charset="0"/>
-                              </a:rPr>
-                              <m:t>2</m:t>
-                            </m:r>
-                          </m:sup>
-                        </m:sSubSup>
-                      </m:e>
-                    </m:nary>
-                  </m:oMath>
-                </a14:m>
-                <a:endParaRPr lang="en-US" dirty="0"/>
-              </a:p>
-              <a:p>
-                <a:pPr lvl="2"/>
-                <a:endParaRPr lang="en-US" dirty="0"/>
-              </a:p>
-              <a:p>
-                <a:r>
-                  <a:rPr lang="en-US" dirty="0"/>
-                  <a:t>Decision trees:</a:t>
-                </a:r>
-              </a:p>
-              <a:p>
-                <a:pPr lvl="1"/>
-                <a:r>
-                  <a:rPr lang="en-US" dirty="0"/>
-                  <a:t>Maximum depth</a:t>
-                </a:r>
-              </a:p>
-              <a:p>
-                <a:pPr lvl="1"/>
-                <a:r>
-                  <a:rPr lang="en-US" dirty="0"/>
-                  <a:t>Minimum number of data points in a node to make a split</a:t>
-                </a:r>
-              </a:p>
-            </p:txBody>
-          </p:sp>
-        </mc:Choice>
-        <mc:Fallback xmlns="">
-          <p:sp>
-            <p:nvSpPr>
-              <p:cNvPr id="3" name="Content Placeholder 2">
-                <a:extLst>
-                  <a:ext uri="{FF2B5EF4-FFF2-40B4-BE49-F238E27FC236}">
-                    <a16:creationId xmlns:a16="http://schemas.microsoft.com/office/drawing/2014/main" id="{11BB22B1-CF02-44EC-83CC-68AC74E7C01B}"/>
-                  </a:ext>
-                </a:extLst>
-              </p:cNvPr>
-              <p:cNvSpPr>
-                <a:spLocks noGrp="1" noRot="1" noChangeAspect="1" noMove="1" noResize="1" noEditPoints="1" noAdjustHandles="1" noChangeArrowheads="1" noChangeShapeType="1" noTextEdit="1"/>
-              </p:cNvSpPr>
-              <p:nvPr>
-                <p:ph idx="1"/>
-              </p:nvPr>
-            </p:nvSpPr>
-            <p:spPr>
-              <a:blipFill>
-                <a:blip r:embed="rId2"/>
-                <a:stretch>
-                  <a:fillRect l="-1043" t="-3081"/>
-                </a:stretch>
-              </a:blipFill>
-            </p:spPr>
-            <p:txBody>
-              <a:bodyPr/>
-              <a:lstStyle/>
-              <a:p>
-                <a:r>
-                  <a:rPr lang="en-US">
-                    <a:noFill/>
-                  </a:rPr>
-                  <a:t> </a:t>
-                </a:r>
-              </a:p>
-            </p:txBody>
-          </p:sp>
-        </mc:Fallback>
-      </mc:AlternateContent>
-    </p:spTree>
-    <p:extLst>
-      <p:ext uri="{BB962C8B-B14F-4D97-AF65-F5344CB8AC3E}">
-        <p14:creationId xmlns:p14="http://schemas.microsoft.com/office/powerpoint/2010/main" val="3290141692"/>
-      </p:ext>
-    </p:extLst>
-  </p:cSld>
-  <p:clrMapOvr>
-    <a:masterClrMapping/>
-  </p:clrMapOvr>
-  <mc:AlternateContent xmlns:mc="http://schemas.openxmlformats.org/markup-compatibility/2006" xmlns:p159="http://schemas.microsoft.com/office/powerpoint/2015/09/main">
-    <mc:Choice Requires="p159">
-      <p:transition xmlns:p14="http://schemas.microsoft.com/office/powerpoint/2010/main" spd="slow" p14:dur="2000">
-        <p159:morph option="byObject"/>
-      </p:transition>
-    </mc:Choice>
-    <mc:Fallback xmlns="">
-      <p:transition spd="slow">
-        <p:fade/>
-      </p:transition>
-    </mc:Fallback>
-  </mc:AlternateContent>
-</p:sld>
-</file>
-
-<file path=ppt/slides/slide15.xml><?xml version="1.0" encoding="utf-8"?>
-<p:sld xmlns:a="http://schemas.openxmlformats.org/drawingml/2006/main" xmlns:r="http://schemas.openxmlformats.org/officeDocument/2006/relationships" xmlns:p="http://schemas.openxmlformats.org/presentationml/2006/main">
-  <p:cSld>
-    <p:spTree>
-      <p:nvGrpSpPr>
-        <p:cNvPr id="1" name=""/>
-        <p:cNvGrpSpPr/>
-        <p:nvPr/>
-      </p:nvGrpSpPr>
-      <p:grpSpPr>
-        <a:xfrm>
-          <a:off x="0" y="0"/>
-          <a:ext cx="0" cy="0"/>
-          <a:chOff x="0" y="0"/>
-          <a:chExt cx="0" cy="0"/>
-        </a:xfrm>
-      </p:grpSpPr>
-      <p:sp>
-        <p:nvSpPr>
-          <p:cNvPr id="2" name="Title 1">
-            <a:extLst>
-              <a:ext uri="{FF2B5EF4-FFF2-40B4-BE49-F238E27FC236}">
-                <a16:creationId xmlns:a16="http://schemas.microsoft.com/office/drawing/2014/main" id="{CF4E52D4-550E-4C42-A319-86B73A606E24}"/>
-              </a:ext>
-            </a:extLst>
-          </p:cNvPr>
-          <p:cNvSpPr>
-            <a:spLocks noGrp="1"/>
-          </p:cNvSpPr>
-          <p:nvPr>
-            <p:ph type="title"/>
-          </p:nvPr>
-        </p:nvSpPr>
-        <p:spPr/>
-        <p:txBody>
-          <a:bodyPr/>
-          <a:lstStyle/>
-          <a:p>
-            <a:r>
-              <a:rPr lang="en-US" dirty="0"/>
-              <a:t>Bias-Variance Tradeoff for Decision Trees</a:t>
-            </a:r>
-          </a:p>
-        </p:txBody>
-      </p:sp>
-      <p:sp>
-        <p:nvSpPr>
-          <p:cNvPr id="3" name="Content Placeholder 2">
-            <a:extLst>
-              <a:ext uri="{FF2B5EF4-FFF2-40B4-BE49-F238E27FC236}">
-                <a16:creationId xmlns:a16="http://schemas.microsoft.com/office/drawing/2014/main" id="{E00C7A32-1B77-4D1D-A6B5-83CEADF85C48}"/>
-              </a:ext>
-            </a:extLst>
-          </p:cNvPr>
-          <p:cNvSpPr>
-            <a:spLocks noGrp="1"/>
-          </p:cNvSpPr>
-          <p:nvPr>
-            <p:ph idx="1"/>
-          </p:nvPr>
-        </p:nvSpPr>
-        <p:spPr>
-          <a:xfrm>
-            <a:off x="838200" y="1825625"/>
-            <a:ext cx="7009016" cy="4351338"/>
-          </a:xfrm>
-        </p:spPr>
-        <p:txBody>
-          <a:bodyPr>
-            <a:normAutofit fontScale="92500"/>
-          </a:bodyPr>
-          <a:lstStyle/>
-          <a:p>
-            <a:r>
-              <a:rPr lang="en-US" dirty="0"/>
-              <a:t>Setup: Run many models with different samples. Look at the predictions across models.</a:t>
-            </a:r>
-          </a:p>
-          <a:p>
-            <a:endParaRPr lang="en-US" dirty="0"/>
-          </a:p>
-          <a:p>
-            <a:r>
-              <a:rPr lang="en-US" dirty="0"/>
-              <a:t>High bias: On average, the predictions are systematically different from the true values</a:t>
-            </a:r>
-          </a:p>
-          <a:p>
-            <a:endParaRPr lang="en-US" dirty="0"/>
-          </a:p>
-          <a:p>
-            <a:r>
-              <a:rPr lang="en-US" dirty="0"/>
-              <a:t>High variance: On average, get very different predictions for the same data point</a:t>
-            </a:r>
-          </a:p>
-          <a:p>
-            <a:pPr marL="0" indent="0">
-              <a:buNone/>
-            </a:pPr>
-            <a:endParaRPr lang="en-US" dirty="0"/>
-          </a:p>
-          <a:p>
-            <a:endParaRPr lang="en-US" dirty="0"/>
-          </a:p>
-          <a:p>
-            <a:endParaRPr lang="en-US" dirty="0"/>
-          </a:p>
-        </p:txBody>
-      </p:sp>
-      <p:pic>
-        <p:nvPicPr>
-          <p:cNvPr id="18" name="Picture 17">
-            <a:extLst>
-              <a:ext uri="{FF2B5EF4-FFF2-40B4-BE49-F238E27FC236}">
-                <a16:creationId xmlns:a16="http://schemas.microsoft.com/office/drawing/2014/main" id="{0EFE97A5-DEA8-4654-A79B-7EC406EE1B36}"/>
-              </a:ext>
-            </a:extLst>
-          </p:cNvPr>
-          <p:cNvPicPr>
-            <a:picLocks noChangeAspect="1"/>
-          </p:cNvPicPr>
-          <p:nvPr/>
-        </p:nvPicPr>
-        <p:blipFill>
-          <a:blip r:embed="rId2"/>
-          <a:stretch>
-            <a:fillRect/>
-          </a:stretch>
-        </p:blipFill>
-        <p:spPr>
-          <a:xfrm>
-            <a:off x="8036581" y="1690688"/>
-            <a:ext cx="4041879" cy="5167312"/>
-          </a:xfrm>
-          <a:prstGeom prst="rect">
-            <a:avLst/>
-          </a:prstGeom>
-        </p:spPr>
-      </p:pic>
-    </p:spTree>
-    <p:extLst>
-      <p:ext uri="{BB962C8B-B14F-4D97-AF65-F5344CB8AC3E}">
-        <p14:creationId xmlns:p14="http://schemas.microsoft.com/office/powerpoint/2010/main" val="2480888025"/>
-      </p:ext>
-    </p:extLst>
-  </p:cSld>
-  <p:clrMapOvr>
-    <a:masterClrMapping/>
-  </p:clrMapOvr>
-  <mc:AlternateContent xmlns:mc="http://schemas.openxmlformats.org/markup-compatibility/2006" xmlns:p159="http://schemas.microsoft.com/office/powerpoint/2015/09/main">
-    <mc:Choice Requires="p159">
-      <p:transition xmlns:p14="http://schemas.microsoft.com/office/powerpoint/2010/main" spd="slow" p14:dur="2000">
-        <p159:morph option="byObject"/>
-      </p:transition>
-    </mc:Choice>
-    <mc:Fallback xmlns="">
-      <p:transition spd="slow">
-        <p:fade/>
-      </p:transition>
-    </mc:Fallback>
-  </mc:AlternateContent>
-</p:sld>
-</file>
-
-<file path=ppt/slides/slide16.xml><?xml version="1.0" encoding="utf-8"?>
-<p:sld xmlns:a="http://schemas.openxmlformats.org/drawingml/2006/main" xmlns:r="http://schemas.openxmlformats.org/officeDocument/2006/relationships" xmlns:p="http://schemas.openxmlformats.org/presentationml/2006/main">
-  <p:cSld>
-    <p:spTree>
-      <p:nvGrpSpPr>
-        <p:cNvPr id="1" name=""/>
-        <p:cNvGrpSpPr/>
-        <p:nvPr/>
-      </p:nvGrpSpPr>
-      <p:grpSpPr>
-        <a:xfrm>
-          <a:off x="0" y="0"/>
-          <a:ext cx="0" cy="0"/>
-          <a:chOff x="0" y="0"/>
-          <a:chExt cx="0" cy="0"/>
-        </a:xfrm>
-      </p:grpSpPr>
-      <p:sp>
-        <p:nvSpPr>
-          <p:cNvPr id="2" name="Title 1">
-            <a:extLst>
-              <a:ext uri="{FF2B5EF4-FFF2-40B4-BE49-F238E27FC236}">
-                <a16:creationId xmlns:a16="http://schemas.microsoft.com/office/drawing/2014/main" id="{644EE6AC-3A1C-4987-89B1-6530E284D3DA}"/>
-              </a:ext>
-            </a:extLst>
-          </p:cNvPr>
-          <p:cNvSpPr>
-            <a:spLocks noGrp="1"/>
-          </p:cNvSpPr>
-          <p:nvPr>
-            <p:ph type="title"/>
-          </p:nvPr>
-        </p:nvSpPr>
-        <p:spPr/>
-        <p:txBody>
-          <a:bodyPr/>
-          <a:lstStyle/>
-          <a:p>
-            <a:r>
-              <a:rPr lang="en-US" dirty="0"/>
-              <a:t>Bias-Variance Tradeoff</a:t>
-            </a:r>
-          </a:p>
-        </p:txBody>
-      </p:sp>
-      <p:sp>
-        <p:nvSpPr>
-          <p:cNvPr id="3" name="Content Placeholder 2">
-            <a:extLst>
-              <a:ext uri="{FF2B5EF4-FFF2-40B4-BE49-F238E27FC236}">
-                <a16:creationId xmlns:a16="http://schemas.microsoft.com/office/drawing/2014/main" id="{2B5135AA-AD39-47C0-8893-0408709814CE}"/>
-              </a:ext>
-            </a:extLst>
-          </p:cNvPr>
-          <p:cNvSpPr>
-            <a:spLocks noGrp="1"/>
-          </p:cNvSpPr>
-          <p:nvPr>
-            <p:ph idx="1"/>
-          </p:nvPr>
-        </p:nvSpPr>
-        <p:spPr/>
-        <p:txBody>
-          <a:bodyPr/>
-          <a:lstStyle/>
-          <a:p>
-            <a:r>
-              <a:rPr lang="en-US" dirty="0">
-                <a:hlinkClick r:id="rId2"/>
-              </a:rPr>
-              <a:t>Source</a:t>
-            </a:r>
-            <a:endParaRPr lang="en-US" dirty="0"/>
-          </a:p>
-        </p:txBody>
-      </p:sp>
-      <p:pic>
-        <p:nvPicPr>
-          <p:cNvPr id="5" name="Picture 4">
-            <a:extLst>
-              <a:ext uri="{FF2B5EF4-FFF2-40B4-BE49-F238E27FC236}">
-                <a16:creationId xmlns:a16="http://schemas.microsoft.com/office/drawing/2014/main" id="{8EBB11D2-1ABC-4E85-8C78-A43392A77D91}"/>
-              </a:ext>
-            </a:extLst>
-          </p:cNvPr>
-          <p:cNvPicPr>
-            <a:picLocks noChangeAspect="1"/>
-          </p:cNvPicPr>
-          <p:nvPr/>
-        </p:nvPicPr>
-        <p:blipFill>
-          <a:blip r:embed="rId3"/>
-          <a:stretch>
-            <a:fillRect/>
-          </a:stretch>
-        </p:blipFill>
-        <p:spPr>
-          <a:xfrm>
-            <a:off x="3459169" y="1623581"/>
-            <a:ext cx="6142032" cy="4869294"/>
-          </a:xfrm>
-          <a:prstGeom prst="rect">
-            <a:avLst/>
-          </a:prstGeom>
-        </p:spPr>
-      </p:pic>
-    </p:spTree>
-    <p:extLst>
-      <p:ext uri="{BB962C8B-B14F-4D97-AF65-F5344CB8AC3E}">
-        <p14:creationId xmlns:p14="http://schemas.microsoft.com/office/powerpoint/2010/main" val="3346686199"/>
-      </p:ext>
-    </p:extLst>
-  </p:cSld>
-  <p:clrMapOvr>
-    <a:masterClrMapping/>
-  </p:clrMapOvr>
-  <mc:AlternateContent xmlns:mc="http://schemas.openxmlformats.org/markup-compatibility/2006" xmlns:p159="http://schemas.microsoft.com/office/powerpoint/2015/09/main">
-    <mc:Choice Requires="p159">
-      <p:transition xmlns:p14="http://schemas.microsoft.com/office/powerpoint/2010/main" spd="slow" p14:dur="2000">
-        <p159:morph option="byObject"/>
-      </p:transition>
-    </mc:Choice>
-    <mc:Fallback xmlns="">
-      <p:transition spd="slow">
-        <p:fade/>
-      </p:transition>
-    </mc:Fallback>
-  </mc:AlternateContent>
-</p:sld>
-</file>
-
-<file path=ppt/slides/slide17.xml><?xml version="1.0" encoding="utf-8"?>
-<p:sld xmlns:a="http://schemas.openxmlformats.org/drawingml/2006/main" xmlns:r="http://schemas.openxmlformats.org/officeDocument/2006/relationships" xmlns:p="http://schemas.openxmlformats.org/presentationml/2006/main">
-  <p:cSld>
     <p:bg>
       <p:bgPr>
         <a:solidFill>
@@ -9957,7 +6820,7 @@
 </p:sld>
 </file>
 
-<file path=ppt/slides/slide18.xml><?xml version="1.0" encoding="utf-8"?>
+<file path=ppt/slides/slide11.xml><?xml version="1.0" encoding="utf-8"?>
 <p:sld xmlns:a="http://schemas.openxmlformats.org/drawingml/2006/main" xmlns:r="http://schemas.openxmlformats.org/officeDocument/2006/relationships" xmlns:p="http://schemas.openxmlformats.org/presentationml/2006/main">
   <p:cSld>
     <p:spTree>
@@ -10397,208 +7260,7 @@
 </p:sld>
 </file>
 
-<file path=ppt/slides/slide19.xml><?xml version="1.0" encoding="utf-8"?>
-<p:sld xmlns:a="http://schemas.openxmlformats.org/drawingml/2006/main" xmlns:r="http://schemas.openxmlformats.org/officeDocument/2006/relationships" xmlns:p="http://schemas.openxmlformats.org/presentationml/2006/main">
-  <p:cSld>
-    <p:spTree>
-      <p:nvGrpSpPr>
-        <p:cNvPr id="1" name=""/>
-        <p:cNvGrpSpPr/>
-        <p:nvPr/>
-      </p:nvGrpSpPr>
-      <p:grpSpPr>
-        <a:xfrm>
-          <a:off x="0" y="0"/>
-          <a:ext cx="0" cy="0"/>
-          <a:chOff x="0" y="0"/>
-          <a:chExt cx="0" cy="0"/>
-        </a:xfrm>
-      </p:grpSpPr>
-      <p:sp>
-        <p:nvSpPr>
-          <p:cNvPr id="2" name="Title 1">
-            <a:extLst>
-              <a:ext uri="{FF2B5EF4-FFF2-40B4-BE49-F238E27FC236}">
-                <a16:creationId xmlns:a16="http://schemas.microsoft.com/office/drawing/2014/main" id="{924A9202-E0DF-40FE-B5F6-5AE467A69753}"/>
-              </a:ext>
-            </a:extLst>
-          </p:cNvPr>
-          <p:cNvSpPr>
-            <a:spLocks noGrp="1"/>
-          </p:cNvSpPr>
-          <p:nvPr>
-            <p:ph type="title"/>
-          </p:nvPr>
-        </p:nvSpPr>
-        <p:spPr/>
-        <p:txBody>
-          <a:bodyPr/>
-          <a:lstStyle/>
-          <a:p>
-            <a:r>
-              <a:rPr lang="en-US" dirty="0"/>
-              <a:t>A Note on Random Forest</a:t>
-            </a:r>
-          </a:p>
-        </p:txBody>
-      </p:sp>
-      <p:sp>
-        <p:nvSpPr>
-          <p:cNvPr id="3" name="Content Placeholder 2">
-            <a:extLst>
-              <a:ext uri="{FF2B5EF4-FFF2-40B4-BE49-F238E27FC236}">
-                <a16:creationId xmlns:a16="http://schemas.microsoft.com/office/drawing/2014/main" id="{FC77A3A3-1092-473A-BE6F-6C3E8A9B110E}"/>
-              </a:ext>
-            </a:extLst>
-          </p:cNvPr>
-          <p:cNvSpPr>
-            <a:spLocks noGrp="1"/>
-          </p:cNvSpPr>
-          <p:nvPr>
-            <p:ph idx="1"/>
-          </p:nvPr>
-        </p:nvSpPr>
-        <p:spPr/>
-        <p:txBody>
-          <a:bodyPr/>
-          <a:lstStyle/>
-          <a:p>
-            <a:r>
-              <a:rPr lang="en-US" dirty="0"/>
-              <a:t>First illustration of the real power of machine learning</a:t>
-            </a:r>
-          </a:p>
-          <a:p>
-            <a:endParaRPr lang="en-US" dirty="0"/>
-          </a:p>
-          <a:p>
-            <a:r>
-              <a:rPr lang="en-US" dirty="0"/>
-              <a:t>Smash a bunch of apparently “dumb” things together to get a very predictive model</a:t>
-            </a:r>
-          </a:p>
-          <a:p>
-            <a:endParaRPr lang="en-US" dirty="0"/>
-          </a:p>
-          <a:p>
-            <a:r>
-              <a:rPr lang="en-US" dirty="0"/>
-              <a:t>In the process, we’ll move away from transparency</a:t>
-            </a:r>
-          </a:p>
-          <a:p>
-            <a:pPr lvl="1"/>
-            <a:r>
-              <a:rPr lang="en-US" dirty="0"/>
-              <a:t>Random forest is hard to visualize </a:t>
-            </a:r>
-          </a:p>
-        </p:txBody>
-      </p:sp>
-    </p:spTree>
-    <p:extLst>
-      <p:ext uri="{BB962C8B-B14F-4D97-AF65-F5344CB8AC3E}">
-        <p14:creationId xmlns:p14="http://schemas.microsoft.com/office/powerpoint/2010/main" val="3084008823"/>
-      </p:ext>
-    </p:extLst>
-  </p:cSld>
-  <p:clrMapOvr>
-    <a:masterClrMapping/>
-  </p:clrMapOvr>
-</p:sld>
-</file>
-
-<file path=ppt/slides/slide2.xml><?xml version="1.0" encoding="utf-8"?>
-<p:sld xmlns:a="http://schemas.openxmlformats.org/drawingml/2006/main" xmlns:r="http://schemas.openxmlformats.org/officeDocument/2006/relationships" xmlns:p="http://schemas.openxmlformats.org/presentationml/2006/main">
-  <p:cSld>
-    <p:bg>
-      <p:bgPr>
-        <a:solidFill>
-          <a:schemeClr val="tx1"/>
-        </a:solidFill>
-        <a:effectLst/>
-      </p:bgPr>
-    </p:bg>
-    <p:spTree>
-      <p:nvGrpSpPr>
-        <p:cNvPr id="1" name=""/>
-        <p:cNvGrpSpPr/>
-        <p:nvPr/>
-      </p:nvGrpSpPr>
-      <p:grpSpPr>
-        <a:xfrm>
-          <a:off x="0" y="0"/>
-          <a:ext cx="0" cy="0"/>
-          <a:chOff x="0" y="0"/>
-          <a:chExt cx="0" cy="0"/>
-        </a:xfrm>
-      </p:grpSpPr>
-      <p:sp>
-        <p:nvSpPr>
-          <p:cNvPr id="2" name="Title 1">
-            <a:extLst>
-              <a:ext uri="{FF2B5EF4-FFF2-40B4-BE49-F238E27FC236}">
-                <a16:creationId xmlns:a16="http://schemas.microsoft.com/office/drawing/2014/main" id="{2E1A626C-6016-4AFE-A3A3-82B8BA196E1C}"/>
-              </a:ext>
-            </a:extLst>
-          </p:cNvPr>
-          <p:cNvSpPr>
-            <a:spLocks noGrp="1"/>
-          </p:cNvSpPr>
-          <p:nvPr>
-            <p:ph type="title"/>
-          </p:nvPr>
-        </p:nvSpPr>
-        <p:spPr>
-          <a:xfrm>
-            <a:off x="838200" y="2766218"/>
-            <a:ext cx="10515600" cy="1325563"/>
-          </a:xfrm>
-        </p:spPr>
-        <p:txBody>
-          <a:bodyPr>
-            <a:normAutofit/>
-          </a:bodyPr>
-          <a:lstStyle/>
-          <a:p>
-            <a:pPr algn="ctr"/>
-            <a:r>
-              <a:rPr lang="en-US" dirty="0">
-                <a:solidFill>
-                  <a:schemeClr val="bg1"/>
-                </a:solidFill>
-              </a:rPr>
-              <a:t>Recap Overfitting + Decision Trees</a:t>
-            </a:r>
-          </a:p>
-        </p:txBody>
-      </p:sp>
-    </p:spTree>
-    <p:extLst>
-      <p:ext uri="{BB962C8B-B14F-4D97-AF65-F5344CB8AC3E}">
-        <p14:creationId xmlns:p14="http://schemas.microsoft.com/office/powerpoint/2010/main" val="211426820"/>
-      </p:ext>
-    </p:extLst>
-  </p:cSld>
-  <p:clrMapOvr>
-    <a:masterClrMapping/>
-  </p:clrMapOvr>
-  <mc:AlternateContent xmlns:mc="http://schemas.openxmlformats.org/markup-compatibility/2006" xmlns:p159="http://schemas.microsoft.com/office/powerpoint/2015/09/main">
-    <mc:Choice Requires="p159">
-      <p:transition xmlns:p14="http://schemas.microsoft.com/office/powerpoint/2010/main" spd="slow" p14:dur="2000">
-        <p159:morph option="byObject"/>
-      </p:transition>
-    </mc:Choice>
-    <mc:Fallback xmlns="">
-      <p:transition spd="slow">
-        <p:fade/>
-      </p:transition>
-    </mc:Fallback>
-  </mc:AlternateContent>
-</p:sld>
-</file>
-
-<file path=ppt/slides/slide20.xml><?xml version="1.0" encoding="utf-8"?>
+<file path=ppt/slides/slide12.xml><?xml version="1.0" encoding="utf-8"?>
 <p:sld xmlns:a="http://schemas.openxmlformats.org/drawingml/2006/main" xmlns:r="http://schemas.openxmlformats.org/officeDocument/2006/relationships" xmlns:p="http://schemas.openxmlformats.org/presentationml/2006/main">
   <p:cSld>
     <p:spTree>
@@ -10659,9 +7321,16 @@
             <p:ph idx="1"/>
           </p:nvPr>
         </p:nvSpPr>
-        <p:spPr/>
+        <p:spPr>
+          <a:xfrm>
+            <a:off x="838200" y="1825625"/>
+            <a:ext cx="4526280" cy="4351338"/>
+          </a:xfrm>
+        </p:spPr>
         <p:txBody>
-          <a:bodyPr/>
+          <a:bodyPr>
+            <a:normAutofit lnSpcReduction="10000"/>
+          </a:bodyPr>
           <a:lstStyle/>
           <a:p>
             <a:r>
@@ -10689,6 +7358,53 @@
           </a:p>
         </p:txBody>
       </p:sp>
+      <p:pic>
+        <p:nvPicPr>
+          <p:cNvPr id="4" name="Picture 2" descr="Article">
+            <a:extLst>
+              <a:ext uri="{FF2B5EF4-FFF2-40B4-BE49-F238E27FC236}">
+                <a16:creationId xmlns:a16="http://schemas.microsoft.com/office/drawing/2014/main" id="{8802ABEF-598E-18A9-7EB7-6EFC4F8BA3B8}"/>
+              </a:ext>
+            </a:extLst>
+          </p:cNvPr>
+          <p:cNvPicPr>
+            <a:picLocks noChangeAspect="1" noChangeArrowheads="1"/>
+          </p:cNvPicPr>
+          <p:nvPr/>
+        </p:nvPicPr>
+        <p:blipFill>
+          <a:blip r:embed="rId2">
+            <a:extLst>
+              <a:ext uri="{28A0092B-C50C-407E-A947-70E740481C1C}">
+                <a14:useLocalDpi xmlns:a14="http://schemas.microsoft.com/office/drawing/2010/main" val="0"/>
+              </a:ext>
+            </a:extLst>
+          </a:blip>
+          <a:srcRect/>
+          <a:stretch>
+            <a:fillRect/>
+          </a:stretch>
+        </p:blipFill>
+        <p:spPr bwMode="auto">
+          <a:xfrm>
+            <a:off x="5892357" y="1896428"/>
+            <a:ext cx="6303482" cy="4270375"/>
+          </a:xfrm>
+          <a:prstGeom prst="rect">
+            <a:avLst/>
+          </a:prstGeom>
+          <a:noFill/>
+          <a:extLst>
+            <a:ext uri="{909E8E84-426E-40DD-AFC4-6F175D3DCCD1}">
+              <a14:hiddenFill xmlns:a14="http://schemas.microsoft.com/office/drawing/2010/main">
+                <a:solidFill>
+                  <a:srgbClr val="FFFFFF"/>
+                </a:solidFill>
+              </a14:hiddenFill>
+            </a:ext>
+          </a:extLst>
+        </p:spPr>
+      </p:pic>
     </p:spTree>
     <p:extLst>
       <p:ext uri="{BB962C8B-B14F-4D97-AF65-F5344CB8AC3E}">
@@ -10714,127 +7430,7 @@
 </p:sld>
 </file>
 
-<file path=ppt/slides/slide21.xml><?xml version="1.0" encoding="utf-8"?>
-<p:sld xmlns:a="http://schemas.openxmlformats.org/drawingml/2006/main" xmlns:r="http://schemas.openxmlformats.org/officeDocument/2006/relationships" xmlns:p="http://schemas.openxmlformats.org/presentationml/2006/main">
-  <p:cSld>
-    <p:spTree>
-      <p:nvGrpSpPr>
-        <p:cNvPr id="1" name=""/>
-        <p:cNvGrpSpPr/>
-        <p:nvPr/>
-      </p:nvGrpSpPr>
-      <p:grpSpPr>
-        <a:xfrm>
-          <a:off x="0" y="0"/>
-          <a:ext cx="0" cy="0"/>
-          <a:chOff x="0" y="0"/>
-          <a:chExt cx="0" cy="0"/>
-        </a:xfrm>
-      </p:grpSpPr>
-      <p:sp>
-        <p:nvSpPr>
-          <p:cNvPr id="2" name="Title 1">
-            <a:extLst>
-              <a:ext uri="{FF2B5EF4-FFF2-40B4-BE49-F238E27FC236}">
-                <a16:creationId xmlns:a16="http://schemas.microsoft.com/office/drawing/2014/main" id="{4927F546-9E6E-49B8-832F-A8400CF8E012}"/>
-              </a:ext>
-            </a:extLst>
-          </p:cNvPr>
-          <p:cNvSpPr>
-            <a:spLocks noGrp="1"/>
-          </p:cNvSpPr>
-          <p:nvPr>
-            <p:ph type="title"/>
-          </p:nvPr>
-        </p:nvSpPr>
-        <p:spPr/>
-        <p:txBody>
-          <a:bodyPr/>
-          <a:lstStyle/>
-          <a:p>
-            <a:r>
-              <a:rPr lang="en-US" dirty="0">
-                <a:hlinkClick r:id="rId2"/>
-              </a:rPr>
-              <a:t>Source</a:t>
-            </a:r>
-            <a:endParaRPr lang="en-US" dirty="0"/>
-          </a:p>
-        </p:txBody>
-      </p:sp>
-      <p:pic>
-        <p:nvPicPr>
-          <p:cNvPr id="3074" name="Picture 2" descr="Article">
-            <a:extLst>
-              <a:ext uri="{FF2B5EF4-FFF2-40B4-BE49-F238E27FC236}">
-                <a16:creationId xmlns:a16="http://schemas.microsoft.com/office/drawing/2014/main" id="{ED4BA519-A66D-4289-9A50-D0BBA4D86EBA}"/>
-              </a:ext>
-            </a:extLst>
-          </p:cNvPr>
-          <p:cNvPicPr>
-            <a:picLocks noChangeAspect="1" noChangeArrowheads="1"/>
-          </p:cNvPicPr>
-          <p:nvPr/>
-        </p:nvPicPr>
-        <p:blipFill>
-          <a:blip r:embed="rId3">
-            <a:extLst>
-              <a:ext uri="{28A0092B-C50C-407E-A947-70E740481C1C}">
-                <a14:useLocalDpi xmlns:a14="http://schemas.microsoft.com/office/drawing/2010/main" val="0"/>
-              </a:ext>
-            </a:extLst>
-          </a:blip>
-          <a:srcRect/>
-          <a:stretch>
-            <a:fillRect/>
-          </a:stretch>
-        </p:blipFill>
-        <p:spPr bwMode="auto">
-          <a:xfrm>
-            <a:off x="2566988" y="1835180"/>
-            <a:ext cx="7058025" cy="4781550"/>
-          </a:xfrm>
-          <a:prstGeom prst="rect">
-            <a:avLst/>
-          </a:prstGeom>
-          <a:noFill/>
-          <a:extLst>
-            <a:ext uri="{909E8E84-426E-40DD-AFC4-6F175D3DCCD1}">
-              <a14:hiddenFill xmlns:a14="http://schemas.microsoft.com/office/drawing/2010/main">
-                <a:solidFill>
-                  <a:srgbClr val="FFFFFF"/>
-                </a:solidFill>
-              </a14:hiddenFill>
-            </a:ext>
-          </a:extLst>
-        </p:spPr>
-      </p:pic>
-    </p:spTree>
-    <p:extLst>
-      <p:ext uri="{BB962C8B-B14F-4D97-AF65-F5344CB8AC3E}">
-        <p14:creationId xmlns:p14="http://schemas.microsoft.com/office/powerpoint/2010/main" val="1094979508"/>
-      </p:ext>
-    </p:extLst>
-  </p:cSld>
-  <p:clrMapOvr>
-    <a:masterClrMapping/>
-  </p:clrMapOvr>
-  <mc:AlternateContent xmlns:mc="http://schemas.openxmlformats.org/markup-compatibility/2006" xmlns:p159="http://schemas.microsoft.com/office/powerpoint/2015/09/main">
-    <mc:Choice Requires="p159">
-      <p:transition xmlns:p14="http://schemas.microsoft.com/office/powerpoint/2010/main" spd="slow" p14:dur="2000">
-        <p159:morph option="byObject"/>
-      </p:transition>
-    </mc:Choice>
-    <mc:Fallback xmlns="">
-      <p:transition spd="slow">
-        <p:fade/>
-      </p:transition>
-    </mc:Fallback>
-  </mc:AlternateContent>
-</p:sld>
-</file>
-
-<file path=ppt/slides/slide22.xml><?xml version="1.0" encoding="utf-8"?>
+<file path=ppt/slides/slide13.xml><?xml version="1.0" encoding="utf-8"?>
 <p:sld xmlns:a="http://schemas.openxmlformats.org/drawingml/2006/main" xmlns:r="http://schemas.openxmlformats.org/officeDocument/2006/relationships" xmlns:p="http://schemas.openxmlformats.org/presentationml/2006/main">
   <p:cSld>
     <p:spTree>
@@ -10999,7 +7595,7 @@
 </p:sld>
 </file>
 
-<file path=ppt/slides/slide23.xml><?xml version="1.0" encoding="utf-8"?>
+<file path=ppt/slides/slide14.xml><?xml version="1.0" encoding="utf-8"?>
 <p:sld xmlns:a="http://schemas.openxmlformats.org/drawingml/2006/main" xmlns:r="http://schemas.openxmlformats.org/officeDocument/2006/relationships" xmlns:p="http://schemas.openxmlformats.org/presentationml/2006/main">
   <p:cSld>
     <p:spTree>
@@ -11144,7 +7740,7 @@
 </p:sld>
 </file>
 
-<file path=ppt/slides/slide24.xml><?xml version="1.0" encoding="utf-8"?>
+<file path=ppt/slides/slide15.xml><?xml version="1.0" encoding="utf-8"?>
 <p:sld xmlns:a="http://schemas.openxmlformats.org/drawingml/2006/main" xmlns:r="http://schemas.openxmlformats.org/officeDocument/2006/relationships" xmlns:p="http://schemas.openxmlformats.org/presentationml/2006/main">
   <p:cSld>
     <p:spTree>
@@ -11262,7 +7858,7 @@
 </p:sld>
 </file>
 
-<file path=ppt/slides/slide25.xml><?xml version="1.0" encoding="utf-8"?>
+<file path=ppt/slides/slide16.xml><?xml version="1.0" encoding="utf-8"?>
 <p:sld xmlns:a="http://schemas.openxmlformats.org/drawingml/2006/main" xmlns:r="http://schemas.openxmlformats.org/officeDocument/2006/relationships" xmlns:p="http://schemas.openxmlformats.org/presentationml/2006/main">
   <p:cSld>
     <p:spTree>
@@ -11565,7 +8161,7 @@
 </p:sld>
 </file>
 
-<file path=ppt/slides/slide26.xml><?xml version="1.0" encoding="utf-8"?>
+<file path=ppt/slides/slide17.xml><?xml version="1.0" encoding="utf-8"?>
 <p:sld xmlns:a="http://schemas.openxmlformats.org/drawingml/2006/main" xmlns:r="http://schemas.openxmlformats.org/officeDocument/2006/relationships" xmlns:p="http://schemas.openxmlformats.org/presentationml/2006/main">
   <p:cSld>
     <p:spTree>
@@ -11721,7 +8317,7 @@
 </p:sld>
 </file>
 
-<file path=ppt/slides/slide27.xml><?xml version="1.0" encoding="utf-8"?>
+<file path=ppt/slides/slide18.xml><?xml version="1.0" encoding="utf-8"?>
 <p:sld xmlns:a="http://schemas.openxmlformats.org/drawingml/2006/main" xmlns:r="http://schemas.openxmlformats.org/officeDocument/2006/relationships" xmlns:p="http://schemas.openxmlformats.org/presentationml/2006/main">
   <p:cSld>
     <p:spTree>
@@ -12339,7 +8935,7 @@
 </p:sld>
 </file>
 
-<file path=ppt/slides/slide28.xml><?xml version="1.0" encoding="utf-8"?>
+<file path=ppt/slides/slide19.xml><?xml version="1.0" encoding="utf-8"?>
 <p:sld xmlns:a="http://schemas.openxmlformats.org/drawingml/2006/main" xmlns:r="http://schemas.openxmlformats.org/officeDocument/2006/relationships" xmlns:p="http://schemas.openxmlformats.org/presentationml/2006/main">
   <p:cSld>
     <p:spTree>
@@ -12786,7 +9382,97 @@
 </p:sld>
 </file>
 
-<file path=ppt/slides/slide29.xml><?xml version="1.0" encoding="utf-8"?>
+<file path=ppt/slides/slide2.xml><?xml version="1.0" encoding="utf-8"?>
+<p:sld xmlns:a="http://schemas.openxmlformats.org/drawingml/2006/main" xmlns:r="http://schemas.openxmlformats.org/officeDocument/2006/relationships" xmlns:p="http://schemas.openxmlformats.org/presentationml/2006/main">
+  <p:cSld>
+    <p:bg>
+      <p:bgPr>
+        <a:solidFill>
+          <a:schemeClr val="tx1"/>
+        </a:solidFill>
+        <a:effectLst/>
+      </p:bgPr>
+    </p:bg>
+    <p:spTree>
+      <p:nvGrpSpPr>
+        <p:cNvPr id="1" name=""/>
+        <p:cNvGrpSpPr/>
+        <p:nvPr/>
+      </p:nvGrpSpPr>
+      <p:grpSpPr>
+        <a:xfrm>
+          <a:off x="0" y="0"/>
+          <a:ext cx="0" cy="0"/>
+          <a:chOff x="0" y="0"/>
+          <a:chExt cx="0" cy="0"/>
+        </a:xfrm>
+      </p:grpSpPr>
+      <p:sp>
+        <p:nvSpPr>
+          <p:cNvPr id="2" name="Title 1">
+            <a:extLst>
+              <a:ext uri="{FF2B5EF4-FFF2-40B4-BE49-F238E27FC236}">
+                <a16:creationId xmlns:a16="http://schemas.microsoft.com/office/drawing/2014/main" id="{2E1A626C-6016-4AFE-A3A3-82B8BA196E1C}"/>
+              </a:ext>
+            </a:extLst>
+          </p:cNvPr>
+          <p:cNvSpPr>
+            <a:spLocks noGrp="1"/>
+          </p:cNvSpPr>
+          <p:nvPr>
+            <p:ph type="title"/>
+          </p:nvPr>
+        </p:nvSpPr>
+        <p:spPr>
+          <a:xfrm>
+            <a:off x="838200" y="2766218"/>
+            <a:ext cx="10515600" cy="1325563"/>
+          </a:xfrm>
+        </p:spPr>
+        <p:txBody>
+          <a:bodyPr>
+            <a:normAutofit/>
+          </a:bodyPr>
+          <a:lstStyle/>
+          <a:p>
+            <a:pPr algn="ctr"/>
+            <a:r>
+              <a:rPr lang="en-US" dirty="0">
+                <a:solidFill>
+                  <a:schemeClr val="bg1"/>
+                </a:solidFill>
+              </a:rPr>
+              <a:t>Overfitting + Decision Trees</a:t>
+            </a:r>
+          </a:p>
+        </p:txBody>
+      </p:sp>
+    </p:spTree>
+    <p:extLst>
+      <p:ext uri="{BB962C8B-B14F-4D97-AF65-F5344CB8AC3E}">
+        <p14:creationId xmlns:p14="http://schemas.microsoft.com/office/powerpoint/2010/main" val="211426820"/>
+      </p:ext>
+    </p:extLst>
+  </p:cSld>
+  <p:clrMapOvr>
+    <a:masterClrMapping/>
+  </p:clrMapOvr>
+  <mc:AlternateContent xmlns:mc="http://schemas.openxmlformats.org/markup-compatibility/2006" xmlns:p159="http://schemas.microsoft.com/office/powerpoint/2015/09/main">
+    <mc:Choice Requires="p159">
+      <p:transition xmlns:p14="http://schemas.microsoft.com/office/powerpoint/2010/main" spd="slow" p14:dur="2000">
+        <p159:morph option="byObject"/>
+      </p:transition>
+    </mc:Choice>
+    <mc:Fallback xmlns="">
+      <p:transition spd="slow">
+        <p:fade/>
+      </p:transition>
+    </mc:Fallback>
+  </mc:AlternateContent>
+</p:sld>
+</file>
+
+<file path=ppt/slides/slide20.xml><?xml version="1.0" encoding="utf-8"?>
 <p:sld xmlns:a="http://schemas.openxmlformats.org/drawingml/2006/main" xmlns:r="http://schemas.openxmlformats.org/officeDocument/2006/relationships" xmlns:p="http://schemas.openxmlformats.org/presentationml/2006/main">
   <p:cSld>
     <p:spTree>
@@ -13257,158 +9943,7 @@
 </p:sld>
 </file>
 
-<file path=ppt/slides/slide3.xml><?xml version="1.0" encoding="utf-8"?>
-<p:sld xmlns:a="http://schemas.openxmlformats.org/drawingml/2006/main" xmlns:r="http://schemas.openxmlformats.org/officeDocument/2006/relationships" xmlns:p="http://schemas.openxmlformats.org/presentationml/2006/main">
-  <p:cSld>
-    <p:spTree>
-      <p:nvGrpSpPr>
-        <p:cNvPr id="1" name=""/>
-        <p:cNvGrpSpPr/>
-        <p:nvPr/>
-      </p:nvGrpSpPr>
-      <p:grpSpPr>
-        <a:xfrm>
-          <a:off x="0" y="0"/>
-          <a:ext cx="0" cy="0"/>
-          <a:chOff x="0" y="0"/>
-          <a:chExt cx="0" cy="0"/>
-        </a:xfrm>
-      </p:grpSpPr>
-      <p:sp>
-        <p:nvSpPr>
-          <p:cNvPr id="2" name="Title 1">
-            <a:extLst>
-              <a:ext uri="{FF2B5EF4-FFF2-40B4-BE49-F238E27FC236}">
-                <a16:creationId xmlns:a16="http://schemas.microsoft.com/office/drawing/2014/main" id="{C8B0F463-42CA-4F17-8DC3-B690F17E0587}"/>
-              </a:ext>
-            </a:extLst>
-          </p:cNvPr>
-          <p:cNvSpPr>
-            <a:spLocks noGrp="1"/>
-          </p:cNvSpPr>
-          <p:nvPr>
-            <p:ph type="title"/>
-          </p:nvPr>
-        </p:nvSpPr>
-        <p:spPr/>
-        <p:txBody>
-          <a:bodyPr/>
-          <a:lstStyle/>
-          <a:p>
-            <a:r>
-              <a:rPr lang="en-US" dirty="0"/>
-              <a:t>Overfitting/Underfitting</a:t>
-            </a:r>
-          </a:p>
-        </p:txBody>
-      </p:sp>
-      <p:sp>
-        <p:nvSpPr>
-          <p:cNvPr id="3" name="Content Placeholder 2">
-            <a:extLst>
-              <a:ext uri="{FF2B5EF4-FFF2-40B4-BE49-F238E27FC236}">
-                <a16:creationId xmlns:a16="http://schemas.microsoft.com/office/drawing/2014/main" id="{568919DE-343A-4FF3-B188-26C09DBF9D7A}"/>
-              </a:ext>
-            </a:extLst>
-          </p:cNvPr>
-          <p:cNvSpPr>
-            <a:spLocks noGrp="1"/>
-          </p:cNvSpPr>
-          <p:nvPr>
-            <p:ph idx="1"/>
-          </p:nvPr>
-        </p:nvSpPr>
-        <p:spPr/>
-        <p:txBody>
-          <a:bodyPr>
-            <a:normAutofit/>
-          </a:bodyPr>
-          <a:lstStyle/>
-          <a:p>
-            <a:pPr marL="0" indent="0">
-              <a:buNone/>
-            </a:pPr>
-            <a:endParaRPr lang="en-US" dirty="0"/>
-          </a:p>
-          <a:p>
-            <a:endParaRPr lang="en-US" dirty="0"/>
-          </a:p>
-        </p:txBody>
-      </p:sp>
-      <p:pic>
-        <p:nvPicPr>
-          <p:cNvPr id="1026" name="Picture 2">
-            <a:hlinkClick r:id="rId2"/>
-            <a:extLst>
-              <a:ext uri="{FF2B5EF4-FFF2-40B4-BE49-F238E27FC236}">
-                <a16:creationId xmlns:a16="http://schemas.microsoft.com/office/drawing/2014/main" id="{F48E9D4F-CFC0-4621-A75E-804C0C979416}"/>
-              </a:ext>
-            </a:extLst>
-          </p:cNvPr>
-          <p:cNvPicPr>
-            <a:picLocks noChangeAspect="1" noChangeArrowheads="1"/>
-          </p:cNvPicPr>
-          <p:nvPr/>
-        </p:nvPicPr>
-        <p:blipFill>
-          <a:blip r:embed="rId3">
-            <a:extLst>
-              <a:ext uri="{28A0092B-C50C-407E-A947-70E740481C1C}">
-                <a14:useLocalDpi xmlns:a14="http://schemas.microsoft.com/office/drawing/2010/main" val="0"/>
-              </a:ext>
-            </a:extLst>
-          </a:blip>
-          <a:srcRect/>
-          <a:stretch>
-            <a:fillRect/>
-          </a:stretch>
-        </p:blipFill>
-        <p:spPr bwMode="auto">
-          <a:xfrm>
-            <a:off x="2356857" y="2426666"/>
-            <a:ext cx="7143750" cy="2857500"/>
-          </a:xfrm>
-          <a:prstGeom prst="rect">
-            <a:avLst/>
-          </a:prstGeom>
-          <a:noFill/>
-          <a:extLst>
-            <a:ext uri="{909E8E84-426E-40DD-AFC4-6F175D3DCCD1}">
-              <a14:hiddenFill xmlns:a14="http://schemas.microsoft.com/office/drawing/2010/main">
-                <a:solidFill>
-                  <a:srgbClr val="FFFFFF"/>
-                </a:solidFill>
-              </a14:hiddenFill>
-            </a:ext>
-          </a:extLst>
-        </p:spPr>
-      </p:pic>
-    </p:spTree>
-    <p:extLst>
-      <p:ext uri="{BB962C8B-B14F-4D97-AF65-F5344CB8AC3E}">
-        <p14:creationId xmlns:p14="http://schemas.microsoft.com/office/powerpoint/2010/main" val="1671092761"/>
-      </p:ext>
-    </p:extLst>
-  </p:cSld>
-  <p:clrMapOvr>
-    <a:masterClrMapping/>
-  </p:clrMapOvr>
-  <mc:AlternateContent xmlns:mc="http://schemas.openxmlformats.org/markup-compatibility/2006" xmlns:p159="http://schemas.microsoft.com/office/powerpoint/2015/09/main">
-    <mc:Choice Requires="p159">
-      <p:transition xmlns:p14="http://schemas.microsoft.com/office/powerpoint/2010/main" spd="slow" p14:dur="2000">
-        <p159:morph option="byObject"/>
-      </p:transition>
-    </mc:Choice>
-    <mc:Fallback xmlns="">
-      <p:transition spd="slow">
-        <p:fade/>
-      </p:transition>
-    </mc:Fallback>
-  </mc:AlternateContent>
-</p:sld>
-</file>
-
-<file path=ppt/slides/slide30.xml><?xml version="1.0" encoding="utf-8"?>
+<file path=ppt/slides/slide21.xml><?xml version="1.0" encoding="utf-8"?>
 <p:sld xmlns:a="http://schemas.openxmlformats.org/drawingml/2006/main" xmlns:r="http://schemas.openxmlformats.org/officeDocument/2006/relationships" xmlns:p="http://schemas.openxmlformats.org/presentationml/2006/main">
   <p:cSld>
     <p:spTree>
@@ -14289,7 +10824,7 @@
 </p:sld>
 </file>
 
-<file path=ppt/slides/slide31.xml><?xml version="1.0" encoding="utf-8"?>
+<file path=ppt/slides/slide22.xml><?xml version="1.0" encoding="utf-8"?>
 <p:sld xmlns:a="http://schemas.openxmlformats.org/drawingml/2006/main" xmlns:r="http://schemas.openxmlformats.org/officeDocument/2006/relationships" xmlns:p="http://schemas.openxmlformats.org/presentationml/2006/main">
   <p:cSld>
     <p:spTree>
@@ -14563,7 +11098,7 @@
 </p:sld>
 </file>
 
-<file path=ppt/slides/slide32.xml><?xml version="1.0" encoding="utf-8"?>
+<file path=ppt/slides/slide23.xml><?xml version="1.0" encoding="utf-8"?>
 <p:sld xmlns:a="http://schemas.openxmlformats.org/drawingml/2006/main" xmlns:r="http://schemas.openxmlformats.org/officeDocument/2006/relationships" xmlns:p="http://schemas.openxmlformats.org/presentationml/2006/main">
   <p:cSld>
     <p:spTree>
@@ -15543,7 +12078,7 @@
 </p:sld>
 </file>
 
-<file path=ppt/slides/slide33.xml><?xml version="1.0" encoding="utf-8"?>
+<file path=ppt/slides/slide24.xml><?xml version="1.0" encoding="utf-8"?>
 <p:sld xmlns:a="http://schemas.openxmlformats.org/drawingml/2006/main" xmlns:r="http://schemas.openxmlformats.org/officeDocument/2006/relationships" xmlns:p="http://schemas.openxmlformats.org/presentationml/2006/main">
   <p:cSld>
     <p:spTree>
@@ -17370,7 +13905,7 @@
 </p:sld>
 </file>
 
-<file path=ppt/slides/slide34.xml><?xml version="1.0" encoding="utf-8"?>
+<file path=ppt/slides/slide25.xml><?xml version="1.0" encoding="utf-8"?>
 <p:sld xmlns:a="http://schemas.openxmlformats.org/drawingml/2006/main" xmlns:r="http://schemas.openxmlformats.org/officeDocument/2006/relationships" xmlns:p="http://schemas.openxmlformats.org/presentationml/2006/main">
   <p:cSld>
     <p:spTree>
@@ -19197,7 +15732,7 @@
 </p:sld>
 </file>
 
-<file path=ppt/slides/slide35.xml><?xml version="1.0" encoding="utf-8"?>
+<file path=ppt/slides/slide26.xml><?xml version="1.0" encoding="utf-8"?>
 <p:sld xmlns:a="http://schemas.openxmlformats.org/drawingml/2006/main" xmlns:r="http://schemas.openxmlformats.org/officeDocument/2006/relationships" xmlns:p="http://schemas.openxmlformats.org/presentationml/2006/main">
   <p:cSld>
     <p:spTree>
@@ -21003,7 +17538,7 @@
 </p:sld>
 </file>
 
-<file path=ppt/slides/slide36.xml><?xml version="1.0" encoding="utf-8"?>
+<file path=ppt/slides/slide27.xml><?xml version="1.0" encoding="utf-8"?>
 <p:sld xmlns:a="http://schemas.openxmlformats.org/drawingml/2006/main" xmlns:r="http://schemas.openxmlformats.org/officeDocument/2006/relationships" xmlns:p="http://schemas.openxmlformats.org/presentationml/2006/main">
   <p:cSld>
     <p:spTree>
@@ -22809,7 +19344,7 @@
 </p:sld>
 </file>
 
-<file path=ppt/slides/slide37.xml><?xml version="1.0" encoding="utf-8"?>
+<file path=ppt/slides/slide28.xml><?xml version="1.0" encoding="utf-8"?>
 <p:sld xmlns:a="http://schemas.openxmlformats.org/drawingml/2006/main" xmlns:r="http://schemas.openxmlformats.org/officeDocument/2006/relationships" xmlns:p="http://schemas.openxmlformats.org/presentationml/2006/main">
   <p:cSld>
     <p:spTree>
@@ -26747,7 +23282,7 @@
 </p:sld>
 </file>
 
-<file path=ppt/slides/slide38.xml><?xml version="1.0" encoding="utf-8"?>
+<file path=ppt/slides/slide29.xml><?xml version="1.0" encoding="utf-8"?>
 <p:sld xmlns:a="http://schemas.openxmlformats.org/drawingml/2006/main" xmlns:r="http://schemas.openxmlformats.org/officeDocument/2006/relationships" xmlns:p="http://schemas.openxmlformats.org/presentationml/2006/main">
   <p:cSld>
     <p:spTree>
@@ -27888,7 +24423,158 @@
 </p:sld>
 </file>
 
-<file path=ppt/slides/slide39.xml><?xml version="1.0" encoding="utf-8"?>
+<file path=ppt/slides/slide3.xml><?xml version="1.0" encoding="utf-8"?>
+<p:sld xmlns:a="http://schemas.openxmlformats.org/drawingml/2006/main" xmlns:r="http://schemas.openxmlformats.org/officeDocument/2006/relationships" xmlns:p="http://schemas.openxmlformats.org/presentationml/2006/main">
+  <p:cSld>
+    <p:spTree>
+      <p:nvGrpSpPr>
+        <p:cNvPr id="1" name=""/>
+        <p:cNvGrpSpPr/>
+        <p:nvPr/>
+      </p:nvGrpSpPr>
+      <p:grpSpPr>
+        <a:xfrm>
+          <a:off x="0" y="0"/>
+          <a:ext cx="0" cy="0"/>
+          <a:chOff x="0" y="0"/>
+          <a:chExt cx="0" cy="0"/>
+        </a:xfrm>
+      </p:grpSpPr>
+      <p:sp>
+        <p:nvSpPr>
+          <p:cNvPr id="2" name="Title 1">
+            <a:extLst>
+              <a:ext uri="{FF2B5EF4-FFF2-40B4-BE49-F238E27FC236}">
+                <a16:creationId xmlns:a16="http://schemas.microsoft.com/office/drawing/2014/main" id="{C8B0F463-42CA-4F17-8DC3-B690F17E0587}"/>
+              </a:ext>
+            </a:extLst>
+          </p:cNvPr>
+          <p:cNvSpPr>
+            <a:spLocks noGrp="1"/>
+          </p:cNvSpPr>
+          <p:nvPr>
+            <p:ph type="title"/>
+          </p:nvPr>
+        </p:nvSpPr>
+        <p:spPr/>
+        <p:txBody>
+          <a:bodyPr/>
+          <a:lstStyle/>
+          <a:p>
+            <a:r>
+              <a:rPr lang="en-US" dirty="0"/>
+              <a:t>Overfitting/Underfitting</a:t>
+            </a:r>
+          </a:p>
+        </p:txBody>
+      </p:sp>
+      <p:sp>
+        <p:nvSpPr>
+          <p:cNvPr id="3" name="Content Placeholder 2">
+            <a:extLst>
+              <a:ext uri="{FF2B5EF4-FFF2-40B4-BE49-F238E27FC236}">
+                <a16:creationId xmlns:a16="http://schemas.microsoft.com/office/drawing/2014/main" id="{568919DE-343A-4FF3-B188-26C09DBF9D7A}"/>
+              </a:ext>
+            </a:extLst>
+          </p:cNvPr>
+          <p:cNvSpPr>
+            <a:spLocks noGrp="1"/>
+          </p:cNvSpPr>
+          <p:nvPr>
+            <p:ph idx="1"/>
+          </p:nvPr>
+        </p:nvSpPr>
+        <p:spPr/>
+        <p:txBody>
+          <a:bodyPr>
+            <a:normAutofit/>
+          </a:bodyPr>
+          <a:lstStyle/>
+          <a:p>
+            <a:pPr marL="0" indent="0">
+              <a:buNone/>
+            </a:pPr>
+            <a:endParaRPr lang="en-US" dirty="0"/>
+          </a:p>
+          <a:p>
+            <a:endParaRPr lang="en-US" dirty="0"/>
+          </a:p>
+        </p:txBody>
+      </p:sp>
+      <p:pic>
+        <p:nvPicPr>
+          <p:cNvPr id="1026" name="Picture 2">
+            <a:hlinkClick r:id="rId2"/>
+            <a:extLst>
+              <a:ext uri="{FF2B5EF4-FFF2-40B4-BE49-F238E27FC236}">
+                <a16:creationId xmlns:a16="http://schemas.microsoft.com/office/drawing/2014/main" id="{F48E9D4F-CFC0-4621-A75E-804C0C979416}"/>
+              </a:ext>
+            </a:extLst>
+          </p:cNvPr>
+          <p:cNvPicPr>
+            <a:picLocks noChangeAspect="1" noChangeArrowheads="1"/>
+          </p:cNvPicPr>
+          <p:nvPr/>
+        </p:nvPicPr>
+        <p:blipFill>
+          <a:blip r:embed="rId3">
+            <a:extLst>
+              <a:ext uri="{28A0092B-C50C-407E-A947-70E740481C1C}">
+                <a14:useLocalDpi xmlns:a14="http://schemas.microsoft.com/office/drawing/2010/main" val="0"/>
+              </a:ext>
+            </a:extLst>
+          </a:blip>
+          <a:srcRect/>
+          <a:stretch>
+            <a:fillRect/>
+          </a:stretch>
+        </p:blipFill>
+        <p:spPr bwMode="auto">
+          <a:xfrm>
+            <a:off x="2356857" y="2426666"/>
+            <a:ext cx="7143750" cy="2857500"/>
+          </a:xfrm>
+          <a:prstGeom prst="rect">
+            <a:avLst/>
+          </a:prstGeom>
+          <a:noFill/>
+          <a:extLst>
+            <a:ext uri="{909E8E84-426E-40DD-AFC4-6F175D3DCCD1}">
+              <a14:hiddenFill xmlns:a14="http://schemas.microsoft.com/office/drawing/2010/main">
+                <a:solidFill>
+                  <a:srgbClr val="FFFFFF"/>
+                </a:solidFill>
+              </a14:hiddenFill>
+            </a:ext>
+          </a:extLst>
+        </p:spPr>
+      </p:pic>
+    </p:spTree>
+    <p:extLst>
+      <p:ext uri="{BB962C8B-B14F-4D97-AF65-F5344CB8AC3E}">
+        <p14:creationId xmlns:p14="http://schemas.microsoft.com/office/powerpoint/2010/main" val="1671092761"/>
+      </p:ext>
+    </p:extLst>
+  </p:cSld>
+  <p:clrMapOvr>
+    <a:masterClrMapping/>
+  </p:clrMapOvr>
+  <mc:AlternateContent xmlns:mc="http://schemas.openxmlformats.org/markup-compatibility/2006" xmlns:p159="http://schemas.microsoft.com/office/powerpoint/2015/09/main">
+    <mc:Choice Requires="p159">
+      <p:transition xmlns:p14="http://schemas.microsoft.com/office/powerpoint/2010/main" spd="slow" p14:dur="2000">
+        <p159:morph option="byObject"/>
+      </p:transition>
+    </mc:Choice>
+    <mc:Fallback xmlns="">
+      <p:transition spd="slow">
+        <p:fade/>
+      </p:transition>
+    </mc:Fallback>
+  </mc:AlternateContent>
+</p:sld>
+</file>
+
+<file path=ppt/slides/slide30.xml><?xml version="1.0" encoding="utf-8"?>
 <p:sld xmlns:a="http://schemas.openxmlformats.org/drawingml/2006/main" xmlns:r="http://schemas.openxmlformats.org/officeDocument/2006/relationships" xmlns:p="http://schemas.openxmlformats.org/presentationml/2006/main">
   <p:cSld>
     <p:spTree>
@@ -29029,198 +25715,7 @@
 </p:sld>
 </file>
 
-<file path=ppt/slides/slide4.xml><?xml version="1.0" encoding="utf-8"?>
-<p:sld xmlns:a="http://schemas.openxmlformats.org/drawingml/2006/main" xmlns:r="http://schemas.openxmlformats.org/officeDocument/2006/relationships" xmlns:p="http://schemas.openxmlformats.org/presentationml/2006/main">
-  <p:cSld>
-    <p:spTree>
-      <p:nvGrpSpPr>
-        <p:cNvPr id="1" name=""/>
-        <p:cNvGrpSpPr/>
-        <p:nvPr/>
-      </p:nvGrpSpPr>
-      <p:grpSpPr>
-        <a:xfrm>
-          <a:off x="0" y="0"/>
-          <a:ext cx="0" cy="0"/>
-          <a:chOff x="0" y="0"/>
-          <a:chExt cx="0" cy="0"/>
-        </a:xfrm>
-      </p:grpSpPr>
-      <p:sp>
-        <p:nvSpPr>
-          <p:cNvPr id="2" name="Title 1">
-            <a:extLst>
-              <a:ext uri="{FF2B5EF4-FFF2-40B4-BE49-F238E27FC236}">
-                <a16:creationId xmlns:a16="http://schemas.microsoft.com/office/drawing/2014/main" id="{022FBE75-68A0-477F-9934-4F0D70B9A44C}"/>
-              </a:ext>
-            </a:extLst>
-          </p:cNvPr>
-          <p:cNvSpPr>
-            <a:spLocks noGrp="1"/>
-          </p:cNvSpPr>
-          <p:nvPr>
-            <p:ph type="title"/>
-          </p:nvPr>
-        </p:nvSpPr>
-        <p:spPr/>
-        <p:txBody>
-          <a:bodyPr/>
-          <a:lstStyle/>
-          <a:p>
-            <a:r>
-              <a:rPr lang="en-US" dirty="0"/>
-              <a:t>Pros + Cons of Trees</a:t>
-            </a:r>
-          </a:p>
-        </p:txBody>
-      </p:sp>
-      <p:sp>
-        <p:nvSpPr>
-          <p:cNvPr id="3" name="Content Placeholder 2">
-            <a:extLst>
-              <a:ext uri="{FF2B5EF4-FFF2-40B4-BE49-F238E27FC236}">
-                <a16:creationId xmlns:a16="http://schemas.microsoft.com/office/drawing/2014/main" id="{6FB93115-6BCD-47EE-A9B9-38DD8195C24E}"/>
-              </a:ext>
-            </a:extLst>
-          </p:cNvPr>
-          <p:cNvSpPr>
-            <a:spLocks noGrp="1"/>
-          </p:cNvSpPr>
-          <p:nvPr>
-            <p:ph idx="1"/>
-          </p:nvPr>
-        </p:nvSpPr>
-        <p:spPr>
-          <a:xfrm>
-            <a:off x="838200" y="1825625"/>
-            <a:ext cx="5662961" cy="4351338"/>
-          </a:xfrm>
-        </p:spPr>
-        <p:txBody>
-          <a:bodyPr/>
-          <a:lstStyle/>
-          <a:p>
-            <a:r>
-              <a:rPr lang="en-US" dirty="0"/>
-              <a:t>Advantages:</a:t>
-            </a:r>
-          </a:p>
-          <a:p>
-            <a:pPr lvl="1"/>
-            <a:r>
-              <a:rPr lang="en-US" dirty="0"/>
-              <a:t>Automatically detect interactions</a:t>
-            </a:r>
-          </a:p>
-          <a:p>
-            <a:pPr lvl="1"/>
-            <a:r>
-              <a:rPr lang="en-US" dirty="0"/>
-              <a:t>Easy to explain </a:t>
-            </a:r>
-          </a:p>
-          <a:p>
-            <a:pPr lvl="1"/>
-            <a:r>
-              <a:rPr lang="en-US" dirty="0"/>
-              <a:t>Handle both categorical and numeric features</a:t>
-            </a:r>
-          </a:p>
-          <a:p>
-            <a:pPr lvl="2"/>
-            <a:r>
-              <a:rPr lang="en-US" dirty="0"/>
-              <a:t>No need to rescale</a:t>
-            </a:r>
-          </a:p>
-          <a:p>
-            <a:r>
-              <a:rPr lang="en-US" dirty="0"/>
-              <a:t>Disadvantages:</a:t>
-            </a:r>
-          </a:p>
-          <a:p>
-            <a:pPr lvl="1"/>
-            <a:r>
-              <a:rPr lang="en-US" dirty="0"/>
-              <a:t>Tend to be outperformed by other methods</a:t>
-            </a:r>
-          </a:p>
-          <a:p>
-            <a:pPr lvl="1"/>
-            <a:r>
-              <a:rPr lang="en-US" dirty="0"/>
-              <a:t>Brittle</a:t>
-            </a:r>
-          </a:p>
-          <a:p>
-            <a:pPr lvl="1"/>
-            <a:r>
-              <a:rPr lang="en-US" dirty="0"/>
-              <a:t>Can’t extrapolate </a:t>
-            </a:r>
-          </a:p>
-          <a:p>
-            <a:endParaRPr lang="en-US" dirty="0"/>
-          </a:p>
-        </p:txBody>
-      </p:sp>
-      <p:pic>
-        <p:nvPicPr>
-          <p:cNvPr id="4" name="Picture 3">
-            <a:extLst>
-              <a:ext uri="{FF2B5EF4-FFF2-40B4-BE49-F238E27FC236}">
-                <a16:creationId xmlns:a16="http://schemas.microsoft.com/office/drawing/2014/main" id="{9FCDE4BE-6E67-4A64-848C-CA541594DA89}"/>
-              </a:ext>
-            </a:extLst>
-          </p:cNvPr>
-          <p:cNvPicPr>
-            <a:picLocks noChangeAspect="1"/>
-          </p:cNvPicPr>
-          <p:nvPr/>
-        </p:nvPicPr>
-        <p:blipFill>
-          <a:blip r:embed="rId2"/>
-          <a:stretch>
-            <a:fillRect/>
-          </a:stretch>
-        </p:blipFill>
-        <p:spPr>
-          <a:xfrm>
-            <a:off x="6714123" y="0"/>
-            <a:ext cx="5364337" cy="6858000"/>
-          </a:xfrm>
-          <a:prstGeom prst="rect">
-            <a:avLst/>
-          </a:prstGeom>
-        </p:spPr>
-      </p:pic>
-    </p:spTree>
-    <p:extLst>
-      <p:ext uri="{BB962C8B-B14F-4D97-AF65-F5344CB8AC3E}">
-        <p14:creationId xmlns:p14="http://schemas.microsoft.com/office/powerpoint/2010/main" val="2419862250"/>
-      </p:ext>
-    </p:extLst>
-  </p:cSld>
-  <p:clrMapOvr>
-    <a:masterClrMapping/>
-  </p:clrMapOvr>
-  <mc:AlternateContent xmlns:mc="http://schemas.openxmlformats.org/markup-compatibility/2006" xmlns:p159="http://schemas.microsoft.com/office/powerpoint/2015/09/main">
-    <mc:Choice Requires="p159">
-      <p:transition xmlns:p14="http://schemas.microsoft.com/office/powerpoint/2010/main" spd="slow" p14:dur="2000">
-        <p159:morph option="byObject"/>
-      </p:transition>
-    </mc:Choice>
-    <mc:Fallback xmlns="">
-      <p:transition spd="slow">
-        <p:fade/>
-      </p:transition>
-    </mc:Fallback>
-  </mc:AlternateContent>
-</p:sld>
-</file>
-
-<file path=ppt/slides/slide40.xml><?xml version="1.0" encoding="utf-8"?>
+<file path=ppt/slides/slide31.xml><?xml version="1.0" encoding="utf-8"?>
 <p:sld xmlns:a="http://schemas.openxmlformats.org/drawingml/2006/main" xmlns:r="http://schemas.openxmlformats.org/officeDocument/2006/relationships" xmlns:p="http://schemas.openxmlformats.org/presentationml/2006/main">
   <p:cSld>
     <p:spTree>
@@ -31188,7 +27683,7 @@
 </p:sld>
 </file>
 
-<file path=ppt/slides/slide41.xml><?xml version="1.0" encoding="utf-8"?>
+<file path=ppt/slides/slide32.xml><?xml version="1.0" encoding="utf-8"?>
 <p:sld xmlns:a="http://schemas.openxmlformats.org/drawingml/2006/main" xmlns:r="http://schemas.openxmlformats.org/officeDocument/2006/relationships" xmlns:p="http://schemas.openxmlformats.org/presentationml/2006/main">
   <p:cSld>
     <p:spTree>
@@ -35141,7 +31636,7 @@
 </p:sld>
 </file>
 
-<file path=ppt/slides/slide42.xml><?xml version="1.0" encoding="utf-8"?>
+<file path=ppt/slides/slide33.xml><?xml version="1.0" encoding="utf-8"?>
 <p:sld xmlns:a="http://schemas.openxmlformats.org/drawingml/2006/main" xmlns:r="http://schemas.openxmlformats.org/officeDocument/2006/relationships" xmlns:p="http://schemas.openxmlformats.org/presentationml/2006/main">
   <p:cSld>
     <p:spTree>
@@ -37105,7 +33600,7 @@
 </p:sld>
 </file>
 
-<file path=ppt/slides/slide43.xml><?xml version="1.0" encoding="utf-8"?>
+<file path=ppt/slides/slide34.xml><?xml version="1.0" encoding="utf-8"?>
 <p:sld xmlns:a="http://schemas.openxmlformats.org/drawingml/2006/main" xmlns:r="http://schemas.openxmlformats.org/officeDocument/2006/relationships" xmlns:p="http://schemas.openxmlformats.org/presentationml/2006/main">
   <p:cSld>
     <p:spTree>
@@ -37306,6 +33801,197 @@
 </p:sld>
 </file>
 
+<file path=ppt/slides/slide4.xml><?xml version="1.0" encoding="utf-8"?>
+<p:sld xmlns:a="http://schemas.openxmlformats.org/drawingml/2006/main" xmlns:r="http://schemas.openxmlformats.org/officeDocument/2006/relationships" xmlns:p="http://schemas.openxmlformats.org/presentationml/2006/main">
+  <p:cSld>
+    <p:spTree>
+      <p:nvGrpSpPr>
+        <p:cNvPr id="1" name=""/>
+        <p:cNvGrpSpPr/>
+        <p:nvPr/>
+      </p:nvGrpSpPr>
+      <p:grpSpPr>
+        <a:xfrm>
+          <a:off x="0" y="0"/>
+          <a:ext cx="0" cy="0"/>
+          <a:chOff x="0" y="0"/>
+          <a:chExt cx="0" cy="0"/>
+        </a:xfrm>
+      </p:grpSpPr>
+      <p:sp>
+        <p:nvSpPr>
+          <p:cNvPr id="2" name="Title 1">
+            <a:extLst>
+              <a:ext uri="{FF2B5EF4-FFF2-40B4-BE49-F238E27FC236}">
+                <a16:creationId xmlns:a16="http://schemas.microsoft.com/office/drawing/2014/main" id="{022FBE75-68A0-477F-9934-4F0D70B9A44C}"/>
+              </a:ext>
+            </a:extLst>
+          </p:cNvPr>
+          <p:cNvSpPr>
+            <a:spLocks noGrp="1"/>
+          </p:cNvSpPr>
+          <p:nvPr>
+            <p:ph type="title"/>
+          </p:nvPr>
+        </p:nvSpPr>
+        <p:spPr/>
+        <p:txBody>
+          <a:bodyPr/>
+          <a:lstStyle/>
+          <a:p>
+            <a:r>
+              <a:rPr lang="en-US" dirty="0"/>
+              <a:t>Pros + Cons of Trees</a:t>
+            </a:r>
+          </a:p>
+        </p:txBody>
+      </p:sp>
+      <p:sp>
+        <p:nvSpPr>
+          <p:cNvPr id="3" name="Content Placeholder 2">
+            <a:extLst>
+              <a:ext uri="{FF2B5EF4-FFF2-40B4-BE49-F238E27FC236}">
+                <a16:creationId xmlns:a16="http://schemas.microsoft.com/office/drawing/2014/main" id="{6FB93115-6BCD-47EE-A9B9-38DD8195C24E}"/>
+              </a:ext>
+            </a:extLst>
+          </p:cNvPr>
+          <p:cNvSpPr>
+            <a:spLocks noGrp="1"/>
+          </p:cNvSpPr>
+          <p:nvPr>
+            <p:ph idx="1"/>
+          </p:nvPr>
+        </p:nvSpPr>
+        <p:spPr>
+          <a:xfrm>
+            <a:off x="838200" y="1825625"/>
+            <a:ext cx="5662961" cy="4351338"/>
+          </a:xfrm>
+        </p:spPr>
+        <p:txBody>
+          <a:bodyPr/>
+          <a:lstStyle/>
+          <a:p>
+            <a:r>
+              <a:rPr lang="en-US" dirty="0"/>
+              <a:t>Advantages:</a:t>
+            </a:r>
+          </a:p>
+          <a:p>
+            <a:pPr lvl="1"/>
+            <a:r>
+              <a:rPr lang="en-US" dirty="0"/>
+              <a:t>Automatically detect interactions</a:t>
+            </a:r>
+          </a:p>
+          <a:p>
+            <a:pPr lvl="1"/>
+            <a:r>
+              <a:rPr lang="en-US" dirty="0"/>
+              <a:t>Easy to explain </a:t>
+            </a:r>
+          </a:p>
+          <a:p>
+            <a:pPr lvl="1"/>
+            <a:r>
+              <a:rPr lang="en-US" dirty="0"/>
+              <a:t>Handle both categorical and numeric features</a:t>
+            </a:r>
+          </a:p>
+          <a:p>
+            <a:pPr lvl="2"/>
+            <a:r>
+              <a:rPr lang="en-US" dirty="0"/>
+              <a:t>No need to rescale</a:t>
+            </a:r>
+          </a:p>
+          <a:p>
+            <a:r>
+              <a:rPr lang="en-US" dirty="0"/>
+              <a:t>Disadvantages:</a:t>
+            </a:r>
+          </a:p>
+          <a:p>
+            <a:pPr lvl="1"/>
+            <a:r>
+              <a:rPr lang="en-US" dirty="0"/>
+              <a:t>Tend to be outperformed by other methods</a:t>
+            </a:r>
+          </a:p>
+          <a:p>
+            <a:pPr lvl="1"/>
+            <a:r>
+              <a:rPr lang="en-US" dirty="0"/>
+              <a:t>Brittle</a:t>
+            </a:r>
+          </a:p>
+          <a:p>
+            <a:pPr lvl="1"/>
+            <a:r>
+              <a:rPr lang="en-US" dirty="0"/>
+              <a:t>Can’t extrapolate </a:t>
+            </a:r>
+          </a:p>
+          <a:p>
+            <a:endParaRPr lang="en-US" dirty="0"/>
+          </a:p>
+        </p:txBody>
+      </p:sp>
+      <p:pic>
+        <p:nvPicPr>
+          <p:cNvPr id="4" name="Picture 3">
+            <a:extLst>
+              <a:ext uri="{FF2B5EF4-FFF2-40B4-BE49-F238E27FC236}">
+                <a16:creationId xmlns:a16="http://schemas.microsoft.com/office/drawing/2014/main" id="{9FCDE4BE-6E67-4A64-848C-CA541594DA89}"/>
+              </a:ext>
+            </a:extLst>
+          </p:cNvPr>
+          <p:cNvPicPr>
+            <a:picLocks noChangeAspect="1"/>
+          </p:cNvPicPr>
+          <p:nvPr/>
+        </p:nvPicPr>
+        <p:blipFill>
+          <a:blip r:embed="rId2"/>
+          <a:stretch>
+            <a:fillRect/>
+          </a:stretch>
+        </p:blipFill>
+        <p:spPr>
+          <a:xfrm>
+            <a:off x="6714123" y="0"/>
+            <a:ext cx="5364337" cy="6858000"/>
+          </a:xfrm>
+          <a:prstGeom prst="rect">
+            <a:avLst/>
+          </a:prstGeom>
+        </p:spPr>
+      </p:pic>
+    </p:spTree>
+    <p:extLst>
+      <p:ext uri="{BB962C8B-B14F-4D97-AF65-F5344CB8AC3E}">
+        <p14:creationId xmlns:p14="http://schemas.microsoft.com/office/powerpoint/2010/main" val="2419862250"/>
+      </p:ext>
+    </p:extLst>
+  </p:cSld>
+  <p:clrMapOvr>
+    <a:masterClrMapping/>
+  </p:clrMapOvr>
+  <mc:AlternateContent xmlns:mc="http://schemas.openxmlformats.org/markup-compatibility/2006" xmlns:p159="http://schemas.microsoft.com/office/powerpoint/2015/09/main">
+    <mc:Choice Requires="p159">
+      <p:transition xmlns:p14="http://schemas.microsoft.com/office/powerpoint/2010/main" spd="slow" p14:dur="2000">
+        <p159:morph option="byObject"/>
+      </p:transition>
+    </mc:Choice>
+    <mc:Fallback xmlns="">
+      <p:transition spd="slow">
+        <p:fade/>
+      </p:transition>
+    </mc:Fallback>
+  </mc:AlternateContent>
+</p:sld>
+</file>
+
 <file path=ppt/slides/slide5.xml><?xml version="1.0" encoding="utf-8"?>
 <p:sld xmlns:a="http://schemas.openxmlformats.org/drawingml/2006/main" xmlns:r="http://schemas.openxmlformats.org/officeDocument/2006/relationships" xmlns:p="http://schemas.openxmlformats.org/presentationml/2006/main">
   <p:cSld>
@@ -37328,7 +34014,7 @@
           <p:cNvPr id="2" name="Title 1">
             <a:extLst>
               <a:ext uri="{FF2B5EF4-FFF2-40B4-BE49-F238E27FC236}">
-                <a16:creationId xmlns:a16="http://schemas.microsoft.com/office/drawing/2014/main" id="{022A1C08-F088-44F3-A554-2C9BCDFFFF90}"/>
+                <a16:creationId xmlns:a16="http://schemas.microsoft.com/office/drawing/2014/main" id="{CF4E52D4-550E-4C42-A319-86B73A606E24}"/>
               </a:ext>
             </a:extLst>
           </p:cNvPr>
@@ -37346,183 +34032,174 @@
           <a:p>
             <a:r>
               <a:rPr lang="en-US" dirty="0"/>
-              <a:t>Decision Trees Can’t Extrapolate</a:t>
+              <a:t>Why Do Decision Trees Tend to Overfit?</a:t>
             </a:r>
           </a:p>
         </p:txBody>
       </p:sp>
-      <p:sp>
-        <p:nvSpPr>
-          <p:cNvPr id="3" name="Content Placeholder 2">
+      <mc:AlternateContent xmlns:mc="http://schemas.openxmlformats.org/markup-compatibility/2006" xmlns:a14="http://schemas.microsoft.com/office/drawing/2010/main">
+        <mc:Choice Requires="a14">
+          <p:sp>
+            <p:nvSpPr>
+              <p:cNvPr id="3" name="Content Placeholder 2">
+                <a:extLst>
+                  <a:ext uri="{FF2B5EF4-FFF2-40B4-BE49-F238E27FC236}">
+                    <a16:creationId xmlns:a16="http://schemas.microsoft.com/office/drawing/2014/main" id="{E00C7A32-1B77-4D1D-A6B5-83CEADF85C48}"/>
+                  </a:ext>
+                </a:extLst>
+              </p:cNvPr>
+              <p:cNvSpPr>
+                <a:spLocks noGrp="1"/>
+              </p:cNvSpPr>
+              <p:nvPr>
+                <p:ph idx="1"/>
+              </p:nvPr>
+            </p:nvSpPr>
+            <p:spPr>
+              <a:xfrm>
+                <a:off x="838200" y="1825625"/>
+                <a:ext cx="7009016" cy="4351338"/>
+              </a:xfrm>
+            </p:spPr>
+            <p:txBody>
+              <a:bodyPr>
+                <a:normAutofit/>
+              </a:bodyPr>
+              <a:lstStyle/>
+              <a:p>
+                <a:r>
+                  <a:rPr lang="en-US" dirty="0"/>
+                  <a:t>Each additional split adds complexity</a:t>
+                </a:r>
+              </a:p>
+              <a:p>
+                <a:endParaRPr lang="en-US" dirty="0"/>
+              </a:p>
+              <a:p>
+                <a:r>
+                  <a:rPr lang="en-US" dirty="0"/>
+                  <a:t>Similar to estimating more </a:t>
+                </a:r>
+                <a14:m>
+                  <m:oMath xmlns:m="http://schemas.openxmlformats.org/officeDocument/2006/math">
+                    <m:r>
+                      <a:rPr lang="en-US" b="0" i="1" smtClean="0">
+                        <a:latin typeface="Cambria Math" panose="02040503050406030204" pitchFamily="18" charset="0"/>
+                      </a:rPr>
+                      <m:t>𝛽</m:t>
+                    </m:r>
+                  </m:oMath>
+                </a14:m>
+                <a:r>
+                  <a:rPr lang="en-US" dirty="0"/>
+                  <a:t>s in linear regression</a:t>
+                </a:r>
+              </a:p>
+              <a:p>
+                <a:endParaRPr lang="en-US" dirty="0"/>
+              </a:p>
+              <a:p>
+                <a:r>
+                  <a:rPr lang="en-US" dirty="0"/>
+                  <a:t>Biggest challenge is that as we have more leaves, the number of datapoints in each leaf will fall.</a:t>
+                </a:r>
+              </a:p>
+              <a:p>
+                <a:endParaRPr lang="en-US" dirty="0"/>
+              </a:p>
+              <a:p>
+                <a:pPr marL="0" indent="0">
+                  <a:buNone/>
+                </a:pPr>
+                <a:endParaRPr lang="en-US" dirty="0"/>
+              </a:p>
+              <a:p>
+                <a:endParaRPr lang="en-US" dirty="0"/>
+              </a:p>
+              <a:p>
+                <a:endParaRPr lang="en-US" dirty="0"/>
+              </a:p>
+            </p:txBody>
+          </p:sp>
+        </mc:Choice>
+        <mc:Fallback xmlns="">
+          <p:sp>
+            <p:nvSpPr>
+              <p:cNvPr id="3" name="Content Placeholder 2">
+                <a:extLst>
+                  <a:ext uri="{FF2B5EF4-FFF2-40B4-BE49-F238E27FC236}">
+                    <a16:creationId xmlns:a16="http://schemas.microsoft.com/office/drawing/2014/main" id="{E00C7A32-1B77-4D1D-A6B5-83CEADF85C48}"/>
+                  </a:ext>
+                </a:extLst>
+              </p:cNvPr>
+              <p:cNvSpPr>
+                <a:spLocks noGrp="1" noRot="1" noChangeAspect="1" noMove="1" noResize="1" noEditPoints="1" noAdjustHandles="1" noChangeArrowheads="1" noChangeShapeType="1" noTextEdit="1"/>
+              </p:cNvSpPr>
+              <p:nvPr>
+                <p:ph idx="1"/>
+              </p:nvPr>
+            </p:nvSpPr>
+            <p:spPr>
+              <a:xfrm>
+                <a:off x="838200" y="1825625"/>
+                <a:ext cx="7009016" cy="4351338"/>
+              </a:xfrm>
+              <a:blipFill>
+                <a:blip r:embed="rId2"/>
+                <a:stretch>
+                  <a:fillRect l="-1567" t="-2241" r="-1567"/>
+                </a:stretch>
+              </a:blipFill>
+            </p:spPr>
+            <p:txBody>
+              <a:bodyPr/>
+              <a:lstStyle/>
+              <a:p>
+                <a:r>
+                  <a:rPr lang="en-US">
+                    <a:noFill/>
+                  </a:rPr>
+                  <a:t> </a:t>
+                </a:r>
+              </a:p>
+            </p:txBody>
+          </p:sp>
+        </mc:Fallback>
+      </mc:AlternateContent>
+      <p:pic>
+        <p:nvPicPr>
+          <p:cNvPr id="18" name="Picture 17">
             <a:extLst>
               <a:ext uri="{FF2B5EF4-FFF2-40B4-BE49-F238E27FC236}">
-                <a16:creationId xmlns:a16="http://schemas.microsoft.com/office/drawing/2014/main" id="{A79DB37C-7C75-41C8-821A-F09082E29E87}"/>
-              </a:ext>
-            </a:extLst>
-          </p:cNvPr>
-          <p:cNvSpPr>
-            <a:spLocks noGrp="1"/>
-          </p:cNvSpPr>
-          <p:nvPr>
-            <p:ph idx="1"/>
-          </p:nvPr>
-        </p:nvSpPr>
-        <p:spPr>
-          <a:xfrm>
-            <a:off x="3794177" y="1947683"/>
-            <a:ext cx="2691581" cy="455459"/>
-          </a:xfrm>
-        </p:spPr>
-        <p:txBody>
-          <a:bodyPr>
-            <a:normAutofit lnSpcReduction="10000"/>
-          </a:bodyPr>
-          <a:lstStyle/>
-          <a:p>
-            <a:pPr marL="0" indent="0">
-              <a:buNone/>
-            </a:pPr>
-            <a:r>
-              <a:rPr lang="en-US" dirty="0"/>
-              <a:t>Training Data</a:t>
-            </a:r>
-          </a:p>
-        </p:txBody>
-      </p:sp>
-      <p:pic>
-        <p:nvPicPr>
-          <p:cNvPr id="2050" name="Picture 2" descr="By6Y9ht39imXAAAAAElFTkSuQmCC (482×357)">
-            <a:extLst>
-              <a:ext uri="{FF2B5EF4-FFF2-40B4-BE49-F238E27FC236}">
-                <a16:creationId xmlns:a16="http://schemas.microsoft.com/office/drawing/2014/main" id="{DD123E85-49DA-44AE-B8DC-522426C0FCC9}"/>
+                <a16:creationId xmlns:a16="http://schemas.microsoft.com/office/drawing/2014/main" id="{0EFE97A5-DEA8-4654-A79B-7EC406EE1B36}"/>
               </a:ext>
             </a:extLst>
           </p:cNvPr>
           <p:cNvPicPr>
-            <a:picLocks noChangeAspect="1" noChangeArrowheads="1"/>
+            <a:picLocks noChangeAspect="1"/>
           </p:cNvPicPr>
           <p:nvPr/>
         </p:nvPicPr>
         <p:blipFill>
-          <a:blip r:embed="rId2">
-            <a:extLst>
-              <a:ext uri="{28A0092B-C50C-407E-A947-70E740481C1C}">
-                <a14:useLocalDpi xmlns:a14="http://schemas.microsoft.com/office/drawing/2010/main" val="0"/>
-              </a:ext>
-            </a:extLst>
-          </a:blip>
-          <a:srcRect/>
+          <a:blip r:embed="rId3"/>
           <a:stretch>
             <a:fillRect/>
           </a:stretch>
         </p:blipFill>
-        <p:spPr bwMode="auto">
+        <p:spPr>
           <a:xfrm>
-            <a:off x="3643158" y="2446542"/>
-            <a:ext cx="4591050" cy="3400425"/>
+            <a:off x="8036581" y="1690688"/>
+            <a:ext cx="4041879" cy="5167312"/>
           </a:xfrm>
           <a:prstGeom prst="rect">
             <a:avLst/>
           </a:prstGeom>
-          <a:noFill/>
-          <a:extLst>
-            <a:ext uri="{909E8E84-426E-40DD-AFC4-6F175D3DCCD1}">
-              <a14:hiddenFill xmlns:a14="http://schemas.microsoft.com/office/drawing/2010/main">
-                <a:solidFill>
-                  <a:srgbClr val="FFFFFF"/>
-                </a:solidFill>
-              </a14:hiddenFill>
-            </a:ext>
-          </a:extLst>
         </p:spPr>
       </p:pic>
-      <p:sp>
-        <p:nvSpPr>
-          <p:cNvPr id="4" name="Rectangle 3">
-            <a:extLst>
-              <a:ext uri="{FF2B5EF4-FFF2-40B4-BE49-F238E27FC236}">
-                <a16:creationId xmlns:a16="http://schemas.microsoft.com/office/drawing/2014/main" id="{E08CF654-B655-4278-BCA2-A0592C74BE10}"/>
-              </a:ext>
-            </a:extLst>
-          </p:cNvPr>
-          <p:cNvSpPr/>
-          <p:nvPr/>
-        </p:nvSpPr>
-        <p:spPr>
-          <a:xfrm>
-            <a:off x="3606728" y="2403142"/>
-            <a:ext cx="2521668" cy="3559277"/>
-          </a:xfrm>
-          <a:prstGeom prst="rect">
-            <a:avLst/>
-          </a:prstGeom>
-          <a:solidFill>
-            <a:srgbClr val="FADECB">
-              <a:alpha val="49000"/>
-            </a:srgbClr>
-          </a:solidFill>
-          <a:ln>
-            <a:noFill/>
-          </a:ln>
-        </p:spPr>
-        <p:style>
-          <a:lnRef idx="2">
-            <a:schemeClr val="accent1">
-              <a:shade val="50000"/>
-            </a:schemeClr>
-          </a:lnRef>
-          <a:fillRef idx="1">
-            <a:schemeClr val="accent1"/>
-          </a:fillRef>
-          <a:effectRef idx="0">
-            <a:schemeClr val="accent1"/>
-          </a:effectRef>
-          <a:fontRef idx="minor">
-            <a:schemeClr val="lt1"/>
-          </a:fontRef>
-        </p:style>
-        <p:txBody>
-          <a:bodyPr rtlCol="0" anchor="ctr"/>
-          <a:lstStyle/>
-          <a:p>
-            <a:pPr marL="0" marR="0" lvl="0" indent="0" algn="ctr" defTabSz="914400" rtl="0" eaLnBrk="1" fontAlgn="auto" latinLnBrk="0" hangingPunct="1">
-              <a:lnSpc>
-                <a:spcPct val="100000"/>
-              </a:lnSpc>
-              <a:spcBef>
-                <a:spcPts val="0"/>
-              </a:spcBef>
-              <a:spcAft>
-                <a:spcPts val="0"/>
-              </a:spcAft>
-              <a:buClrTx/>
-              <a:buSzTx/>
-              <a:buFontTx/>
-              <a:buNone/>
-              <a:tabLst/>
-              <a:defRPr/>
-            </a:pPr>
-            <a:endParaRPr kumimoji="0" lang="en-US" sz="1800" b="0" i="0" u="none" strike="noStrike" kern="1200" cap="none" spc="0" normalizeH="0" baseline="0" noProof="0">
-              <a:ln>
-                <a:noFill/>
-              </a:ln>
-              <a:solidFill>
-                <a:prstClr val="white"/>
-              </a:solidFill>
-              <a:effectLst/>
-              <a:uLnTx/>
-              <a:uFillTx/>
-              <a:latin typeface="Calibri" panose="020F0502020204030204"/>
-              <a:ea typeface="+mn-ea"/>
-              <a:cs typeface="+mn-cs"/>
-            </a:endParaRPr>
-          </a:p>
-        </p:txBody>
-      </p:sp>
     </p:spTree>
     <p:extLst>
       <p:ext uri="{BB962C8B-B14F-4D97-AF65-F5344CB8AC3E}">
-        <p14:creationId xmlns:p14="http://schemas.microsoft.com/office/powerpoint/2010/main" val="2074128531"/>
+        <p14:creationId xmlns:p14="http://schemas.microsoft.com/office/powerpoint/2010/main" val="614934555"/>
       </p:ext>
     </p:extLst>
   </p:cSld>
@@ -37566,7 +34243,7 @@
           <p:cNvPr id="2" name="Title 1">
             <a:extLst>
               <a:ext uri="{FF2B5EF4-FFF2-40B4-BE49-F238E27FC236}">
-                <a16:creationId xmlns:a16="http://schemas.microsoft.com/office/drawing/2014/main" id="{022A1C08-F088-44F3-A554-2C9BCDFFFF90}"/>
+                <a16:creationId xmlns:a16="http://schemas.microsoft.com/office/drawing/2014/main" id="{B52BF51B-318B-47C8-B5AE-01D441B53CC1}"/>
               </a:ext>
             </a:extLst>
           </p:cNvPr>
@@ -37584,220 +34261,143 @@
           <a:p>
             <a:r>
               <a:rPr lang="en-US" dirty="0"/>
-              <a:t>Decision Trees Can’t Extrapolate</a:t>
+              <a:t>How Do We Reduce/Prevent Over-fitting?</a:t>
             </a:r>
           </a:p>
         </p:txBody>
       </p:sp>
-      <p:sp>
-        <p:nvSpPr>
-          <p:cNvPr id="3" name="Content Placeholder 2">
-            <a:extLst>
-              <a:ext uri="{FF2B5EF4-FFF2-40B4-BE49-F238E27FC236}">
-                <a16:creationId xmlns:a16="http://schemas.microsoft.com/office/drawing/2014/main" id="{A79DB37C-7C75-41C8-821A-F09082E29E87}"/>
-              </a:ext>
-            </a:extLst>
-          </p:cNvPr>
-          <p:cNvSpPr>
-            <a:spLocks noGrp="1"/>
-          </p:cNvSpPr>
-          <p:nvPr>
-            <p:ph idx="1"/>
-          </p:nvPr>
-        </p:nvSpPr>
-        <p:spPr>
-          <a:xfrm>
-            <a:off x="3794177" y="1947683"/>
-            <a:ext cx="2691581" cy="455459"/>
-          </a:xfrm>
-        </p:spPr>
-        <p:txBody>
-          <a:bodyPr>
-            <a:normAutofit lnSpcReduction="10000"/>
-          </a:bodyPr>
-          <a:lstStyle/>
-          <a:p>
-            <a:pPr marL="0" indent="0">
-              <a:buNone/>
-            </a:pPr>
-            <a:r>
-              <a:rPr lang="en-US" dirty="0"/>
-              <a:t>Training Data</a:t>
-            </a:r>
-          </a:p>
-        </p:txBody>
-      </p:sp>
-      <p:pic>
-        <p:nvPicPr>
-          <p:cNvPr id="2050" name="Picture 2" descr="By6Y9ht39imXAAAAAElFTkSuQmCC (482×357)">
-            <a:extLst>
-              <a:ext uri="{FF2B5EF4-FFF2-40B4-BE49-F238E27FC236}">
-                <a16:creationId xmlns:a16="http://schemas.microsoft.com/office/drawing/2014/main" id="{DD123E85-49DA-44AE-B8DC-522426C0FCC9}"/>
-              </a:ext>
-            </a:extLst>
-          </p:cNvPr>
-          <p:cNvPicPr>
-            <a:picLocks noChangeAspect="1" noChangeArrowheads="1"/>
-          </p:cNvPicPr>
-          <p:nvPr/>
-        </p:nvPicPr>
-        <p:blipFill>
-          <a:blip r:embed="rId2">
-            <a:extLst>
-              <a:ext uri="{28A0092B-C50C-407E-A947-70E740481C1C}">
-                <a14:useLocalDpi xmlns:a14="http://schemas.microsoft.com/office/drawing/2010/main" val="0"/>
-              </a:ext>
-            </a:extLst>
-          </a:blip>
-          <a:srcRect/>
-          <a:stretch>
-            <a:fillRect/>
-          </a:stretch>
-        </p:blipFill>
-        <p:spPr bwMode="auto">
-          <a:xfrm>
-            <a:off x="3643158" y="2446542"/>
-            <a:ext cx="4591050" cy="3400425"/>
-          </a:xfrm>
-          <a:prstGeom prst="rect">
-            <a:avLst/>
-          </a:prstGeom>
-          <a:noFill/>
-          <a:extLst>
-            <a:ext uri="{909E8E84-426E-40DD-AFC4-6F175D3DCCD1}">
-              <a14:hiddenFill xmlns:a14="http://schemas.microsoft.com/office/drawing/2010/main">
-                <a:solidFill>
-                  <a:srgbClr val="FFFFFF"/>
-                </a:solidFill>
-              </a14:hiddenFill>
-            </a:ext>
-          </a:extLst>
-        </p:spPr>
-      </p:pic>
-      <p:sp>
-        <p:nvSpPr>
-          <p:cNvPr id="4" name="Rectangle 3">
-            <a:extLst>
-              <a:ext uri="{FF2B5EF4-FFF2-40B4-BE49-F238E27FC236}">
-                <a16:creationId xmlns:a16="http://schemas.microsoft.com/office/drawing/2014/main" id="{E08CF654-B655-4278-BCA2-A0592C74BE10}"/>
-              </a:ext>
-            </a:extLst>
-          </p:cNvPr>
-          <p:cNvSpPr/>
-          <p:nvPr/>
-        </p:nvSpPr>
-        <p:spPr>
-          <a:xfrm>
-            <a:off x="3606728" y="2403142"/>
-            <a:ext cx="2521668" cy="3559277"/>
-          </a:xfrm>
-          <a:prstGeom prst="rect">
-            <a:avLst/>
-          </a:prstGeom>
-          <a:solidFill>
-            <a:srgbClr val="FADECB">
-              <a:alpha val="49000"/>
-            </a:srgbClr>
-          </a:solidFill>
-          <a:ln>
-            <a:noFill/>
-          </a:ln>
-        </p:spPr>
-        <p:style>
-          <a:lnRef idx="2">
-            <a:schemeClr val="accent1">
-              <a:shade val="50000"/>
-            </a:schemeClr>
-          </a:lnRef>
-          <a:fillRef idx="1">
-            <a:schemeClr val="accent1"/>
-          </a:fillRef>
-          <a:effectRef idx="0">
-            <a:schemeClr val="accent1"/>
-          </a:effectRef>
-          <a:fontRef idx="minor">
-            <a:schemeClr val="lt1"/>
-          </a:fontRef>
-        </p:style>
-        <p:txBody>
-          <a:bodyPr rtlCol="0" anchor="ctr"/>
-          <a:lstStyle/>
-          <a:p>
-            <a:pPr marL="0" marR="0" lvl="0" indent="0" algn="ctr" defTabSz="914400" rtl="0" eaLnBrk="1" fontAlgn="auto" latinLnBrk="0" hangingPunct="1">
-              <a:lnSpc>
-                <a:spcPct val="100000"/>
-              </a:lnSpc>
-              <a:spcBef>
-                <a:spcPts val="0"/>
-              </a:spcBef>
-              <a:spcAft>
-                <a:spcPts val="0"/>
-              </a:spcAft>
-              <a:buClrTx/>
-              <a:buSzTx/>
-              <a:buFontTx/>
-              <a:buNone/>
-              <a:tabLst/>
-              <a:defRPr/>
-            </a:pPr>
-            <a:endParaRPr kumimoji="0" lang="en-US" sz="1800" b="0" i="0" u="none" strike="noStrike" kern="1200" cap="none" spc="0" normalizeH="0" baseline="0" noProof="0">
-              <a:ln>
-                <a:noFill/>
-              </a:ln>
-              <a:solidFill>
-                <a:prstClr val="white"/>
-              </a:solidFill>
-              <a:effectLst/>
-              <a:uLnTx/>
-              <a:uFillTx/>
-              <a:latin typeface="Calibri" panose="020F0502020204030204"/>
-              <a:ea typeface="+mn-ea"/>
-              <a:cs typeface="+mn-cs"/>
-            </a:endParaRPr>
-          </a:p>
-        </p:txBody>
-      </p:sp>
-      <p:cxnSp>
-        <p:nvCxnSpPr>
-          <p:cNvPr id="10" name="Straight Connector 9">
-            <a:extLst>
-              <a:ext uri="{FF2B5EF4-FFF2-40B4-BE49-F238E27FC236}">
-                <a16:creationId xmlns:a16="http://schemas.microsoft.com/office/drawing/2014/main" id="{C1C41949-E3D7-956A-6608-150D83B8DE82}"/>
-              </a:ext>
-            </a:extLst>
-          </p:cNvPr>
-          <p:cNvCxnSpPr/>
-          <p:nvPr/>
-        </p:nvCxnSpPr>
-        <p:spPr>
-          <a:xfrm flipV="1">
-            <a:off x="4463933" y="2560320"/>
-            <a:ext cx="0" cy="3025833"/>
-          </a:xfrm>
-          <a:prstGeom prst="line">
-            <a:avLst/>
-          </a:prstGeom>
-          <a:ln w="25400"/>
-        </p:spPr>
-        <p:style>
-          <a:lnRef idx="1">
-            <a:schemeClr val="accent1"/>
-          </a:lnRef>
-          <a:fillRef idx="0">
-            <a:schemeClr val="accent1"/>
-          </a:fillRef>
-          <a:effectRef idx="0">
-            <a:schemeClr val="accent1"/>
-          </a:effectRef>
-          <a:fontRef idx="minor">
-            <a:schemeClr val="tx1"/>
-          </a:fontRef>
-        </p:style>
-      </p:cxnSp>
+      <mc:AlternateContent xmlns:mc="http://schemas.openxmlformats.org/markup-compatibility/2006" xmlns:a14="http://schemas.microsoft.com/office/drawing/2010/main">
+        <mc:Choice Requires="a14">
+          <p:sp>
+            <p:nvSpPr>
+              <p:cNvPr id="3" name="Content Placeholder 2">
+                <a:extLst>
+                  <a:ext uri="{FF2B5EF4-FFF2-40B4-BE49-F238E27FC236}">
+                    <a16:creationId xmlns:a16="http://schemas.microsoft.com/office/drawing/2014/main" id="{3F8230F5-4881-425C-97B7-0392AD7EE166}"/>
+                  </a:ext>
+                </a:extLst>
+              </p:cNvPr>
+              <p:cNvSpPr>
+                <a:spLocks noGrp="1"/>
+              </p:cNvSpPr>
+              <p:nvPr>
+                <p:ph idx="1"/>
+              </p:nvPr>
+            </p:nvSpPr>
+            <p:spPr/>
+            <p:txBody>
+              <a:bodyPr/>
+              <a:lstStyle/>
+              <a:p>
+                <a:r>
+                  <a:rPr lang="en-US" dirty="0"/>
+                  <a:t>Regularize:</a:t>
+                </a:r>
+              </a:p>
+              <a:p>
+                <a:pPr lvl="1"/>
+                <a:r>
+                  <a:rPr lang="en-US" dirty="0"/>
+                  <a:t>“Make regular” --- exert more control over the model building process </a:t>
+                </a:r>
+              </a:p>
+              <a:p>
+                <a:pPr lvl="1"/>
+                <a:endParaRPr lang="en-US" dirty="0"/>
+              </a:p>
+              <a:p>
+                <a:pPr lvl="1"/>
+                <a:r>
+                  <a:rPr lang="en-US" dirty="0"/>
+                  <a:t>Ordinary least squares</a:t>
+                </a:r>
+              </a:p>
+              <a:p>
+                <a:pPr lvl="2"/>
+                <a:r>
+                  <a:rPr lang="en-US" dirty="0"/>
+                  <a:t>We changed the objective function to penalize big </a:t>
+                </a:r>
+                <a14:m>
+                  <m:oMath xmlns:m="http://schemas.openxmlformats.org/officeDocument/2006/math">
+                    <m:r>
+                      <a:rPr lang="en-US" b="0" i="1" smtClean="0">
+                        <a:latin typeface="Cambria Math" panose="02040503050406030204" pitchFamily="18" charset="0"/>
+                      </a:rPr>
+                      <m:t>𝛽</m:t>
+                    </m:r>
+                  </m:oMath>
+                </a14:m>
+                <a:r>
+                  <a:rPr lang="en-US" dirty="0"/>
+                  <a:t>s</a:t>
+                </a:r>
+              </a:p>
+              <a:p>
+                <a:pPr lvl="1"/>
+                <a:endParaRPr lang="en-US" dirty="0"/>
+              </a:p>
+              <a:p>
+                <a:pPr lvl="1"/>
+                <a:r>
+                  <a:rPr lang="en-US" dirty="0"/>
+                  <a:t>Decision trees</a:t>
+                </a:r>
+              </a:p>
+              <a:p>
+                <a:pPr lvl="2"/>
+                <a:r>
+                  <a:rPr lang="en-US" dirty="0"/>
+                  <a:t>Limit the growth of tree depth</a:t>
+                </a:r>
+              </a:p>
+            </p:txBody>
+          </p:sp>
+        </mc:Choice>
+        <mc:Fallback xmlns="">
+          <p:sp>
+            <p:nvSpPr>
+              <p:cNvPr id="3" name="Content Placeholder 2">
+                <a:extLst>
+                  <a:ext uri="{FF2B5EF4-FFF2-40B4-BE49-F238E27FC236}">
+                    <a16:creationId xmlns:a16="http://schemas.microsoft.com/office/drawing/2014/main" id="{3F8230F5-4881-425C-97B7-0392AD7EE166}"/>
+                  </a:ext>
+                </a:extLst>
+              </p:cNvPr>
+              <p:cNvSpPr>
+                <a:spLocks noGrp="1" noRot="1" noChangeAspect="1" noMove="1" noResize="1" noEditPoints="1" noAdjustHandles="1" noChangeArrowheads="1" noChangeShapeType="1" noTextEdit="1"/>
+              </p:cNvSpPr>
+              <p:nvPr>
+                <p:ph idx="1"/>
+              </p:nvPr>
+            </p:nvSpPr>
+            <p:spPr>
+              <a:blipFill>
+                <a:blip r:embed="rId2"/>
+                <a:stretch>
+                  <a:fillRect l="-1043" t="-2241"/>
+                </a:stretch>
+              </a:blipFill>
+            </p:spPr>
+            <p:txBody>
+              <a:bodyPr/>
+              <a:lstStyle/>
+              <a:p>
+                <a:r>
+                  <a:rPr lang="en-US">
+                    <a:noFill/>
+                  </a:rPr>
+                  <a:t> </a:t>
+                </a:r>
+              </a:p>
+            </p:txBody>
+          </p:sp>
+        </mc:Fallback>
+      </mc:AlternateContent>
     </p:spTree>
     <p:extLst>
       <p:ext uri="{BB962C8B-B14F-4D97-AF65-F5344CB8AC3E}">
-        <p14:creationId xmlns:p14="http://schemas.microsoft.com/office/powerpoint/2010/main" val="3509105801"/>
+        <p14:creationId xmlns:p14="http://schemas.microsoft.com/office/powerpoint/2010/main" val="184234522"/>
       </p:ext>
     </p:extLst>
   </p:cSld>
@@ -37841,7 +34441,7 @@
           <p:cNvPr id="2" name="Title 1">
             <a:extLst>
               <a:ext uri="{FF2B5EF4-FFF2-40B4-BE49-F238E27FC236}">
-                <a16:creationId xmlns:a16="http://schemas.microsoft.com/office/drawing/2014/main" id="{022A1C08-F088-44F3-A554-2C9BCDFFFF90}"/>
+                <a16:creationId xmlns:a16="http://schemas.microsoft.com/office/drawing/2014/main" id="{AE844B35-62D8-4B7B-AD58-D17B5B8EDDF4}"/>
               </a:ext>
             </a:extLst>
           </p:cNvPr>
@@ -37859,265 +34459,365 @@
           <a:p>
             <a:r>
               <a:rPr lang="en-US" dirty="0"/>
-              <a:t>Decision Trees Can’t Extrapolate</a:t>
+              <a:t>How Do We Regularize</a:t>
             </a:r>
           </a:p>
         </p:txBody>
       </p:sp>
-      <p:sp>
-        <p:nvSpPr>
-          <p:cNvPr id="3" name="Content Placeholder 2">
-            <a:extLst>
-              <a:ext uri="{FF2B5EF4-FFF2-40B4-BE49-F238E27FC236}">
-                <a16:creationId xmlns:a16="http://schemas.microsoft.com/office/drawing/2014/main" id="{A79DB37C-7C75-41C8-821A-F09082E29E87}"/>
-              </a:ext>
-            </a:extLst>
-          </p:cNvPr>
-          <p:cNvSpPr>
-            <a:spLocks noGrp="1"/>
-          </p:cNvSpPr>
-          <p:nvPr>
-            <p:ph idx="1"/>
-          </p:nvPr>
-        </p:nvSpPr>
-        <p:spPr>
-          <a:xfrm>
-            <a:off x="3794177" y="1947683"/>
-            <a:ext cx="2691581" cy="455459"/>
-          </a:xfrm>
-        </p:spPr>
-        <p:txBody>
-          <a:bodyPr>
-            <a:normAutofit lnSpcReduction="10000"/>
-          </a:bodyPr>
-          <a:lstStyle/>
-          <a:p>
-            <a:pPr marL="0" indent="0">
-              <a:buNone/>
-            </a:pPr>
-            <a:r>
-              <a:rPr lang="en-US" dirty="0"/>
-              <a:t>Training Data</a:t>
-            </a:r>
-          </a:p>
-        </p:txBody>
-      </p:sp>
-      <p:pic>
-        <p:nvPicPr>
-          <p:cNvPr id="2050" name="Picture 2" descr="By6Y9ht39imXAAAAAElFTkSuQmCC (482×357)">
-            <a:extLst>
-              <a:ext uri="{FF2B5EF4-FFF2-40B4-BE49-F238E27FC236}">
-                <a16:creationId xmlns:a16="http://schemas.microsoft.com/office/drawing/2014/main" id="{DD123E85-49DA-44AE-B8DC-522426C0FCC9}"/>
-              </a:ext>
-            </a:extLst>
-          </p:cNvPr>
-          <p:cNvPicPr>
-            <a:picLocks noChangeAspect="1" noChangeArrowheads="1"/>
-          </p:cNvPicPr>
-          <p:nvPr/>
-        </p:nvPicPr>
-        <p:blipFill>
-          <a:blip r:embed="rId2">
-            <a:extLst>
-              <a:ext uri="{28A0092B-C50C-407E-A947-70E740481C1C}">
-                <a14:useLocalDpi xmlns:a14="http://schemas.microsoft.com/office/drawing/2010/main" val="0"/>
-              </a:ext>
-            </a:extLst>
-          </a:blip>
-          <a:srcRect/>
-          <a:stretch>
-            <a:fillRect/>
-          </a:stretch>
-        </p:blipFill>
-        <p:spPr bwMode="auto">
-          <a:xfrm>
-            <a:off x="3643158" y="2446542"/>
-            <a:ext cx="4591050" cy="3400425"/>
-          </a:xfrm>
-          <a:prstGeom prst="rect">
-            <a:avLst/>
-          </a:prstGeom>
-          <a:noFill/>
-          <a:extLst>
-            <a:ext uri="{909E8E84-426E-40DD-AFC4-6F175D3DCCD1}">
-              <a14:hiddenFill xmlns:a14="http://schemas.microsoft.com/office/drawing/2010/main">
-                <a:solidFill>
-                  <a:srgbClr val="FFFFFF"/>
-                </a:solidFill>
-              </a14:hiddenFill>
-            </a:ext>
-          </a:extLst>
-        </p:spPr>
-      </p:pic>
-      <p:sp>
-        <p:nvSpPr>
-          <p:cNvPr id="4" name="Rectangle 3">
-            <a:extLst>
-              <a:ext uri="{FF2B5EF4-FFF2-40B4-BE49-F238E27FC236}">
-                <a16:creationId xmlns:a16="http://schemas.microsoft.com/office/drawing/2014/main" id="{E08CF654-B655-4278-BCA2-A0592C74BE10}"/>
-              </a:ext>
-            </a:extLst>
-          </p:cNvPr>
-          <p:cNvSpPr/>
-          <p:nvPr/>
-        </p:nvSpPr>
-        <p:spPr>
-          <a:xfrm>
-            <a:off x="3606728" y="2403142"/>
-            <a:ext cx="2521668" cy="3559277"/>
-          </a:xfrm>
-          <a:prstGeom prst="rect">
-            <a:avLst/>
-          </a:prstGeom>
-          <a:solidFill>
-            <a:srgbClr val="FADECB">
-              <a:alpha val="49000"/>
-            </a:srgbClr>
-          </a:solidFill>
-          <a:ln>
-            <a:noFill/>
-          </a:ln>
-        </p:spPr>
-        <p:style>
-          <a:lnRef idx="2">
-            <a:schemeClr val="accent1">
-              <a:shade val="50000"/>
-            </a:schemeClr>
-          </a:lnRef>
-          <a:fillRef idx="1">
-            <a:schemeClr val="accent1"/>
-          </a:fillRef>
-          <a:effectRef idx="0">
-            <a:schemeClr val="accent1"/>
-          </a:effectRef>
-          <a:fontRef idx="minor">
-            <a:schemeClr val="lt1"/>
-          </a:fontRef>
-        </p:style>
-        <p:txBody>
-          <a:bodyPr rtlCol="0" anchor="ctr"/>
-          <a:lstStyle/>
-          <a:p>
-            <a:pPr marL="0" marR="0" lvl="0" indent="0" algn="ctr" defTabSz="914400" rtl="0" eaLnBrk="1" fontAlgn="auto" latinLnBrk="0" hangingPunct="1">
-              <a:lnSpc>
-                <a:spcPct val="100000"/>
-              </a:lnSpc>
-              <a:spcBef>
-                <a:spcPts val="0"/>
-              </a:spcBef>
-              <a:spcAft>
-                <a:spcPts val="0"/>
-              </a:spcAft>
-              <a:buClrTx/>
-              <a:buSzTx/>
-              <a:buFontTx/>
-              <a:buNone/>
-              <a:tabLst/>
-              <a:defRPr/>
-            </a:pPr>
-            <a:endParaRPr kumimoji="0" lang="en-US" sz="1800" b="0" i="0" u="none" strike="noStrike" kern="1200" cap="none" spc="0" normalizeH="0" baseline="0" noProof="0">
-              <a:ln>
-                <a:noFill/>
-              </a:ln>
-              <a:solidFill>
-                <a:prstClr val="white"/>
-              </a:solidFill>
-              <a:effectLst/>
-              <a:uLnTx/>
-              <a:uFillTx/>
-              <a:latin typeface="Calibri" panose="020F0502020204030204"/>
-              <a:ea typeface="+mn-ea"/>
-              <a:cs typeface="+mn-cs"/>
-            </a:endParaRPr>
-          </a:p>
-        </p:txBody>
-      </p:sp>
-      <p:cxnSp>
-        <p:nvCxnSpPr>
-          <p:cNvPr id="10" name="Straight Connector 9">
-            <a:extLst>
-              <a:ext uri="{FF2B5EF4-FFF2-40B4-BE49-F238E27FC236}">
-                <a16:creationId xmlns:a16="http://schemas.microsoft.com/office/drawing/2014/main" id="{C1C41949-E3D7-956A-6608-150D83B8DE82}"/>
-              </a:ext>
-            </a:extLst>
-          </p:cNvPr>
-          <p:cNvCxnSpPr>
-            <a:cxnSpLocks/>
-          </p:cNvCxnSpPr>
-          <p:nvPr/>
-        </p:nvCxnSpPr>
-        <p:spPr>
-          <a:xfrm flipV="1">
-            <a:off x="4463933" y="2446542"/>
-            <a:ext cx="0" cy="3139611"/>
-          </a:xfrm>
-          <a:prstGeom prst="line">
-            <a:avLst/>
-          </a:prstGeom>
-          <a:ln w="25400"/>
-        </p:spPr>
-        <p:style>
-          <a:lnRef idx="1">
-            <a:schemeClr val="accent1"/>
-          </a:lnRef>
-          <a:fillRef idx="0">
-            <a:schemeClr val="accent1"/>
-          </a:fillRef>
-          <a:effectRef idx="0">
-            <a:schemeClr val="accent1"/>
-          </a:effectRef>
-          <a:fontRef idx="minor">
-            <a:schemeClr val="tx1"/>
-          </a:fontRef>
-        </p:style>
-      </p:cxnSp>
-      <p:cxnSp>
-        <p:nvCxnSpPr>
-          <p:cNvPr id="5" name="Straight Connector 4">
-            <a:extLst>
-              <a:ext uri="{FF2B5EF4-FFF2-40B4-BE49-F238E27FC236}">
-                <a16:creationId xmlns:a16="http://schemas.microsoft.com/office/drawing/2014/main" id="{3230D586-FE3F-DB99-D55C-F85424372C67}"/>
-              </a:ext>
-            </a:extLst>
-          </p:cNvPr>
-          <p:cNvCxnSpPr>
-            <a:cxnSpLocks/>
-          </p:cNvCxnSpPr>
-          <p:nvPr/>
-        </p:nvCxnSpPr>
-        <p:spPr>
-          <a:xfrm flipV="1">
-            <a:off x="5264725" y="2446542"/>
-            <a:ext cx="0" cy="3156237"/>
-          </a:xfrm>
-          <a:prstGeom prst="line">
-            <a:avLst/>
-          </a:prstGeom>
-          <a:ln w="25400">
-            <a:solidFill>
-              <a:schemeClr val="accent2"/>
-            </a:solidFill>
-          </a:ln>
-        </p:spPr>
-        <p:style>
-          <a:lnRef idx="1">
-            <a:schemeClr val="accent1"/>
-          </a:lnRef>
-          <a:fillRef idx="0">
-            <a:schemeClr val="accent1"/>
-          </a:fillRef>
-          <a:effectRef idx="0">
-            <a:schemeClr val="accent1"/>
-          </a:effectRef>
-          <a:fontRef idx="minor">
-            <a:schemeClr val="tx1"/>
-          </a:fontRef>
-        </p:style>
-      </p:cxnSp>
+      <mc:AlternateContent xmlns:mc="http://schemas.openxmlformats.org/markup-compatibility/2006" xmlns:a14="http://schemas.microsoft.com/office/drawing/2010/main">
+        <mc:Choice Requires="a14">
+          <p:sp>
+            <p:nvSpPr>
+              <p:cNvPr id="3" name="Content Placeholder 2">
+                <a:extLst>
+                  <a:ext uri="{FF2B5EF4-FFF2-40B4-BE49-F238E27FC236}">
+                    <a16:creationId xmlns:a16="http://schemas.microsoft.com/office/drawing/2014/main" id="{11BB22B1-CF02-44EC-83CC-68AC74E7C01B}"/>
+                  </a:ext>
+                </a:extLst>
+              </p:cNvPr>
+              <p:cNvSpPr>
+                <a:spLocks noGrp="1"/>
+              </p:cNvSpPr>
+              <p:nvPr>
+                <p:ph idx="1"/>
+              </p:nvPr>
+            </p:nvSpPr>
+            <p:spPr/>
+            <p:txBody>
+              <a:bodyPr>
+                <a:normAutofit lnSpcReduction="10000"/>
+              </a:bodyPr>
+              <a:lstStyle/>
+              <a:p>
+                <a:r>
+                  <a:rPr lang="en-US" dirty="0"/>
+                  <a:t>Through specifying </a:t>
+                </a:r>
+                <a:r>
+                  <a:rPr lang="en-US" b="1" i="1" dirty="0"/>
+                  <a:t>hyperparameters</a:t>
+                </a:r>
+                <a:r>
+                  <a:rPr lang="en-US" dirty="0"/>
+                  <a:t> that exert that extra control over the model building process</a:t>
+                </a:r>
+              </a:p>
+              <a:p>
+                <a:endParaRPr lang="en-US" dirty="0"/>
+              </a:p>
+              <a:p>
+                <a:r>
+                  <a:rPr lang="en-US" dirty="0"/>
+                  <a:t>Linear regression: </a:t>
+                </a:r>
+                <a14:m>
+                  <m:oMath xmlns:m="http://schemas.openxmlformats.org/officeDocument/2006/math">
+                    <m:r>
+                      <a:rPr lang="en-US" b="0" i="1" smtClean="0">
+                        <a:latin typeface="Cambria Math" panose="02040503050406030204" pitchFamily="18" charset="0"/>
+                      </a:rPr>
+                      <m:t>𝜆</m:t>
+                    </m:r>
+                  </m:oMath>
+                </a14:m>
+                <a:r>
+                  <a:rPr lang="en-US" dirty="0"/>
+                  <a:t>, lambda</a:t>
+                </a:r>
+              </a:p>
+              <a:p>
+                <a:pPr lvl="1"/>
+                <a:r>
+                  <a:rPr lang="en-US" dirty="0"/>
+                  <a:t>Controls how much to penalize for big </a:t>
+                </a:r>
+                <a14:m>
+                  <m:oMath xmlns:m="http://schemas.openxmlformats.org/officeDocument/2006/math">
+                    <m:r>
+                      <a:rPr lang="en-US" b="0" i="1" smtClean="0">
+                        <a:latin typeface="Cambria Math" panose="02040503050406030204" pitchFamily="18" charset="0"/>
+                      </a:rPr>
+                      <m:t>𝛽</m:t>
+                    </m:r>
+                  </m:oMath>
+                </a14:m>
+                <a:r>
+                  <a:rPr lang="en-US" dirty="0"/>
+                  <a:t>s</a:t>
+                </a:r>
+              </a:p>
+              <a:p>
+                <a:pPr lvl="2"/>
+                <a14:m>
+                  <m:oMath xmlns:m="http://schemas.openxmlformats.org/officeDocument/2006/math">
+                    <m:nary>
+                      <m:naryPr>
+                        <m:chr m:val="∑"/>
+                        <m:supHide m:val="on"/>
+                        <m:ctrlPr>
+                          <a:rPr lang="en-US" i="1" smtClean="0">
+                            <a:latin typeface="Cambria Math" panose="02040503050406030204" pitchFamily="18" charset="0"/>
+                          </a:rPr>
+                        </m:ctrlPr>
+                      </m:naryPr>
+                      <m:sub>
+                        <m:r>
+                          <a:rPr lang="en-US" i="1">
+                            <a:latin typeface="Cambria Math" panose="02040503050406030204" pitchFamily="18" charset="0"/>
+                          </a:rPr>
+                          <m:t>𝑖</m:t>
+                        </m:r>
+                      </m:sub>
+                      <m:sup/>
+                      <m:e>
+                        <m:sSup>
+                          <m:sSupPr>
+                            <m:ctrlPr>
+                              <a:rPr lang="en-US" i="1">
+                                <a:latin typeface="Cambria Math" panose="02040503050406030204" pitchFamily="18" charset="0"/>
+                              </a:rPr>
+                            </m:ctrlPr>
+                          </m:sSupPr>
+                          <m:e>
+                            <m:d>
+                              <m:dPr>
+                                <m:ctrlPr>
+                                  <a:rPr lang="en-US" i="1">
+                                    <a:latin typeface="Cambria Math" panose="02040503050406030204" pitchFamily="18" charset="0"/>
+                                  </a:rPr>
+                                </m:ctrlPr>
+                              </m:dPr>
+                              <m:e>
+                                <m:sSub>
+                                  <m:sSubPr>
+                                    <m:ctrlPr>
+                                      <a:rPr lang="en-US" i="1">
+                                        <a:latin typeface="Cambria Math" panose="02040503050406030204" pitchFamily="18" charset="0"/>
+                                      </a:rPr>
+                                    </m:ctrlPr>
+                                  </m:sSubPr>
+                                  <m:e>
+                                    <m:r>
+                                      <a:rPr lang="en-US" i="1">
+                                        <a:latin typeface="Cambria Math" panose="02040503050406030204" pitchFamily="18" charset="0"/>
+                                      </a:rPr>
+                                      <m:t>𝑌</m:t>
+                                    </m:r>
+                                  </m:e>
+                                  <m:sub>
+                                    <m:r>
+                                      <a:rPr lang="en-US" i="1">
+                                        <a:latin typeface="Cambria Math" panose="02040503050406030204" pitchFamily="18" charset="0"/>
+                                      </a:rPr>
+                                      <m:t>𝑖</m:t>
+                                    </m:r>
+                                  </m:sub>
+                                </m:sSub>
+                                <m:r>
+                                  <a:rPr lang="en-US" i="1">
+                                    <a:latin typeface="Cambria Math" panose="02040503050406030204" pitchFamily="18" charset="0"/>
+                                  </a:rPr>
+                                  <m:t>−</m:t>
+                                </m:r>
+                                <m:sSub>
+                                  <m:sSubPr>
+                                    <m:ctrlPr>
+                                      <a:rPr lang="en-US" i="1">
+                                        <a:latin typeface="Cambria Math" panose="02040503050406030204" pitchFamily="18" charset="0"/>
+                                      </a:rPr>
+                                    </m:ctrlPr>
+                                  </m:sSubPr>
+                                  <m:e>
+                                    <m:acc>
+                                      <m:accPr>
+                                        <m:chr m:val="̂"/>
+                                        <m:ctrlPr>
+                                          <a:rPr lang="en-US" i="1">
+                                            <a:latin typeface="Cambria Math" panose="02040503050406030204" pitchFamily="18" charset="0"/>
+                                          </a:rPr>
+                                        </m:ctrlPr>
+                                      </m:accPr>
+                                      <m:e>
+                                        <m:r>
+                                          <a:rPr lang="en-US" i="1">
+                                            <a:latin typeface="Cambria Math" panose="02040503050406030204" pitchFamily="18" charset="0"/>
+                                          </a:rPr>
+                                          <m:t>𝑌</m:t>
+                                        </m:r>
+                                      </m:e>
+                                    </m:acc>
+                                  </m:e>
+                                  <m:sub>
+                                    <m:r>
+                                      <a:rPr lang="en-US" i="1">
+                                        <a:latin typeface="Cambria Math" panose="02040503050406030204" pitchFamily="18" charset="0"/>
+                                      </a:rPr>
+                                      <m:t>𝑖</m:t>
+                                    </m:r>
+                                  </m:sub>
+                                </m:sSub>
+                              </m:e>
+                            </m:d>
+                          </m:e>
+                          <m:sup>
+                            <m:r>
+                              <a:rPr lang="en-US" i="1">
+                                <a:latin typeface="Cambria Math" panose="02040503050406030204" pitchFamily="18" charset="0"/>
+                              </a:rPr>
+                              <m:t>2</m:t>
+                            </m:r>
+                          </m:sup>
+                        </m:sSup>
+                      </m:e>
+                    </m:nary>
+                    <m:r>
+                      <a:rPr lang="en-US" b="0" i="1" smtClean="0">
+                        <a:latin typeface="Cambria Math" panose="02040503050406030204" pitchFamily="18" charset="0"/>
+                      </a:rPr>
+                      <m:t>+</m:t>
+                    </m:r>
+                    <m:r>
+                      <a:rPr lang="en-US" b="0" i="1" smtClean="0">
+                        <a:latin typeface="Cambria Math" panose="02040503050406030204" pitchFamily="18" charset="0"/>
+                      </a:rPr>
+                      <m:t>𝜆</m:t>
+                    </m:r>
+                    <m:r>
+                      <a:rPr lang="en-US" b="0" i="1" smtClean="0">
+                        <a:latin typeface="Cambria Math" panose="02040503050406030204" pitchFamily="18" charset="0"/>
+                      </a:rPr>
+                      <m:t> </m:t>
+                    </m:r>
+                    <m:nary>
+                      <m:naryPr>
+                        <m:chr m:val="∑"/>
+                        <m:supHide m:val="on"/>
+                        <m:ctrlPr>
+                          <a:rPr lang="en-US" b="0" i="1" smtClean="0">
+                            <a:latin typeface="Cambria Math" panose="02040503050406030204" pitchFamily="18" charset="0"/>
+                          </a:rPr>
+                        </m:ctrlPr>
+                      </m:naryPr>
+                      <m:sub>
+                        <m:r>
+                          <a:rPr lang="en-US" b="0" i="1" smtClean="0">
+                            <a:latin typeface="Cambria Math" panose="02040503050406030204" pitchFamily="18" charset="0"/>
+                          </a:rPr>
+                          <m:t>𝑗</m:t>
+                        </m:r>
+                      </m:sub>
+                      <m:sup/>
+                      <m:e>
+                        <m:sSubSup>
+                          <m:sSubSupPr>
+                            <m:ctrlPr>
+                              <a:rPr lang="en-US" b="0" i="1" smtClean="0">
+                                <a:latin typeface="Cambria Math" panose="02040503050406030204" pitchFamily="18" charset="0"/>
+                              </a:rPr>
+                            </m:ctrlPr>
+                          </m:sSubSupPr>
+                          <m:e>
+                            <m:r>
+                              <a:rPr lang="en-US" b="0" i="1" smtClean="0">
+                                <a:latin typeface="Cambria Math" panose="02040503050406030204" pitchFamily="18" charset="0"/>
+                              </a:rPr>
+                              <m:t>𝛽</m:t>
+                            </m:r>
+                          </m:e>
+                          <m:sub>
+                            <m:r>
+                              <a:rPr lang="en-US" b="0" i="1" smtClean="0">
+                                <a:latin typeface="Cambria Math" panose="02040503050406030204" pitchFamily="18" charset="0"/>
+                              </a:rPr>
+                              <m:t>𝑗</m:t>
+                            </m:r>
+                          </m:sub>
+                          <m:sup>
+                            <m:r>
+                              <a:rPr lang="en-US" b="0" i="1" smtClean="0">
+                                <a:latin typeface="Cambria Math" panose="02040503050406030204" pitchFamily="18" charset="0"/>
+                              </a:rPr>
+                              <m:t>2</m:t>
+                            </m:r>
+                          </m:sup>
+                        </m:sSubSup>
+                      </m:e>
+                    </m:nary>
+                  </m:oMath>
+                </a14:m>
+                <a:endParaRPr lang="en-US" dirty="0"/>
+              </a:p>
+              <a:p>
+                <a:pPr lvl="2"/>
+                <a:endParaRPr lang="en-US" dirty="0"/>
+              </a:p>
+              <a:p>
+                <a:r>
+                  <a:rPr lang="en-US" dirty="0"/>
+                  <a:t>Decision trees:</a:t>
+                </a:r>
+              </a:p>
+              <a:p>
+                <a:pPr lvl="1"/>
+                <a:r>
+                  <a:rPr lang="en-US" dirty="0"/>
+                  <a:t>Maximum depth</a:t>
+                </a:r>
+              </a:p>
+              <a:p>
+                <a:pPr lvl="1"/>
+                <a:r>
+                  <a:rPr lang="en-US" dirty="0"/>
+                  <a:t>Minimum number of data points in a node to make a split</a:t>
+                </a:r>
+              </a:p>
+            </p:txBody>
+          </p:sp>
+        </mc:Choice>
+        <mc:Fallback xmlns="">
+          <p:sp>
+            <p:nvSpPr>
+              <p:cNvPr id="3" name="Content Placeholder 2">
+                <a:extLst>
+                  <a:ext uri="{FF2B5EF4-FFF2-40B4-BE49-F238E27FC236}">
+                    <a16:creationId xmlns:a16="http://schemas.microsoft.com/office/drawing/2014/main" id="{11BB22B1-CF02-44EC-83CC-68AC74E7C01B}"/>
+                  </a:ext>
+                </a:extLst>
+              </p:cNvPr>
+              <p:cNvSpPr>
+                <a:spLocks noGrp="1" noRot="1" noChangeAspect="1" noMove="1" noResize="1" noEditPoints="1" noAdjustHandles="1" noChangeArrowheads="1" noChangeShapeType="1" noTextEdit="1"/>
+              </p:cNvSpPr>
+              <p:nvPr>
+                <p:ph idx="1"/>
+              </p:nvPr>
+            </p:nvSpPr>
+            <p:spPr>
+              <a:blipFill>
+                <a:blip r:embed="rId2"/>
+                <a:stretch>
+                  <a:fillRect l="-1043" t="-3081"/>
+                </a:stretch>
+              </a:blipFill>
+            </p:spPr>
+            <p:txBody>
+              <a:bodyPr/>
+              <a:lstStyle/>
+              <a:p>
+                <a:r>
+                  <a:rPr lang="en-US">
+                    <a:noFill/>
+                  </a:rPr>
+                  <a:t> </a:t>
+                </a:r>
+              </a:p>
+            </p:txBody>
+          </p:sp>
+        </mc:Fallback>
+      </mc:AlternateContent>
     </p:spTree>
     <p:extLst>
       <p:ext uri="{BB962C8B-B14F-4D97-AF65-F5344CB8AC3E}">
-        <p14:creationId xmlns:p14="http://schemas.microsoft.com/office/powerpoint/2010/main" val="1851174592"/>
+        <p14:creationId xmlns:p14="http://schemas.microsoft.com/office/powerpoint/2010/main" val="3290141692"/>
       </p:ext>
     </p:extLst>
   </p:cSld>
@@ -38161,7 +34861,7 @@
           <p:cNvPr id="2" name="Title 1">
             <a:extLst>
               <a:ext uri="{FF2B5EF4-FFF2-40B4-BE49-F238E27FC236}">
-                <a16:creationId xmlns:a16="http://schemas.microsoft.com/office/drawing/2014/main" id="{022A1C08-F088-44F3-A554-2C9BCDFFFF90}"/>
+                <a16:creationId xmlns:a16="http://schemas.microsoft.com/office/drawing/2014/main" id="{CF4E52D4-550E-4C42-A319-86B73A606E24}"/>
               </a:ext>
             </a:extLst>
           </p:cNvPr>
@@ -38179,7 +34879,7 @@
           <a:p>
             <a:r>
               <a:rPr lang="en-US" dirty="0"/>
-              <a:t>Let’s Predict</a:t>
+              <a:t>Bias-Variance Tradeoff for Decision Trees</a:t>
             </a:r>
           </a:p>
         </p:txBody>
@@ -38189,7 +34889,7 @@
           <p:cNvPr id="3" name="Content Placeholder 2">
             <a:extLst>
               <a:ext uri="{FF2B5EF4-FFF2-40B4-BE49-F238E27FC236}">
-                <a16:creationId xmlns:a16="http://schemas.microsoft.com/office/drawing/2014/main" id="{A79DB37C-7C75-41C8-821A-F09082E29E87}"/>
+                <a16:creationId xmlns:a16="http://schemas.microsoft.com/office/drawing/2014/main" id="{E00C7A32-1B77-4D1D-A6B5-83CEADF85C48}"/>
               </a:ext>
             </a:extLst>
           </p:cNvPr>
@@ -38202,735 +34902,87 @@
         </p:nvSpPr>
         <p:spPr>
           <a:xfrm>
-            <a:off x="5988737" y="1947683"/>
-            <a:ext cx="2691581" cy="455459"/>
+            <a:off x="838200" y="1825625"/>
+            <a:ext cx="7009016" cy="4351338"/>
           </a:xfrm>
         </p:spPr>
         <p:txBody>
           <a:bodyPr>
-            <a:normAutofit lnSpcReduction="10000"/>
+            <a:normAutofit fontScale="92500"/>
           </a:bodyPr>
           <a:lstStyle/>
+          <a:p>
+            <a:r>
+              <a:rPr lang="en-US" dirty="0"/>
+              <a:t>Setup: Run many models with different samples. Look at the predictions across models.</a:t>
+            </a:r>
+          </a:p>
+          <a:p>
+            <a:endParaRPr lang="en-US" dirty="0"/>
+          </a:p>
+          <a:p>
+            <a:r>
+              <a:rPr lang="en-US" dirty="0"/>
+              <a:t>High bias: On average, the predictions are systematically different from the true values</a:t>
+            </a:r>
+          </a:p>
+          <a:p>
+            <a:endParaRPr lang="en-US" dirty="0"/>
+          </a:p>
+          <a:p>
+            <a:r>
+              <a:rPr lang="en-US" dirty="0"/>
+              <a:t>High variance: On average, get very different predictions for the same data point</a:t>
+            </a:r>
+          </a:p>
           <a:p>
             <a:pPr marL="0" indent="0">
               <a:buNone/>
             </a:pPr>
-            <a:r>
-              <a:rPr lang="en-US" dirty="0"/>
-              <a:t>Training Data</a:t>
-            </a:r>
+            <a:endParaRPr lang="en-US" dirty="0"/>
+          </a:p>
+          <a:p>
+            <a:endParaRPr lang="en-US" dirty="0"/>
+          </a:p>
+          <a:p>
+            <a:endParaRPr lang="en-US" dirty="0"/>
           </a:p>
         </p:txBody>
       </p:sp>
       <p:pic>
         <p:nvPicPr>
-          <p:cNvPr id="2050" name="Picture 2" descr="By6Y9ht39imXAAAAAElFTkSuQmCC (482×357)">
+          <p:cNvPr id="18" name="Picture 17">
             <a:extLst>
               <a:ext uri="{FF2B5EF4-FFF2-40B4-BE49-F238E27FC236}">
-                <a16:creationId xmlns:a16="http://schemas.microsoft.com/office/drawing/2014/main" id="{DD123E85-49DA-44AE-B8DC-522426C0FCC9}"/>
+                <a16:creationId xmlns:a16="http://schemas.microsoft.com/office/drawing/2014/main" id="{0EFE97A5-DEA8-4654-A79B-7EC406EE1B36}"/>
               </a:ext>
             </a:extLst>
           </p:cNvPr>
           <p:cNvPicPr>
-            <a:picLocks noChangeAspect="1" noChangeArrowheads="1"/>
+            <a:picLocks noChangeAspect="1"/>
           </p:cNvPicPr>
           <p:nvPr/>
         </p:nvPicPr>
         <p:blipFill>
-          <a:blip r:embed="rId2">
-            <a:extLst>
-              <a:ext uri="{28A0092B-C50C-407E-A947-70E740481C1C}">
-                <a14:useLocalDpi xmlns:a14="http://schemas.microsoft.com/office/drawing/2010/main" val="0"/>
-              </a:ext>
-            </a:extLst>
-          </a:blip>
-          <a:srcRect/>
+          <a:blip r:embed="rId2"/>
           <a:stretch>
             <a:fillRect/>
           </a:stretch>
         </p:blipFill>
-        <p:spPr bwMode="auto">
+        <p:spPr>
           <a:xfrm>
-            <a:off x="5837718" y="2446542"/>
-            <a:ext cx="4591050" cy="3400425"/>
+            <a:off x="8036581" y="1690688"/>
+            <a:ext cx="4041879" cy="5167312"/>
           </a:xfrm>
           <a:prstGeom prst="rect">
             <a:avLst/>
           </a:prstGeom>
-          <a:noFill/>
-          <a:extLst>
-            <a:ext uri="{909E8E84-426E-40DD-AFC4-6F175D3DCCD1}">
-              <a14:hiddenFill xmlns:a14="http://schemas.microsoft.com/office/drawing/2010/main">
-                <a:solidFill>
-                  <a:srgbClr val="FFFFFF"/>
-                </a:solidFill>
-              </a14:hiddenFill>
-            </a:ext>
-          </a:extLst>
         </p:spPr>
       </p:pic>
-      <p:sp>
-        <p:nvSpPr>
-          <p:cNvPr id="4" name="Rectangle 3">
-            <a:extLst>
-              <a:ext uri="{FF2B5EF4-FFF2-40B4-BE49-F238E27FC236}">
-                <a16:creationId xmlns:a16="http://schemas.microsoft.com/office/drawing/2014/main" id="{E08CF654-B655-4278-BCA2-A0592C74BE10}"/>
-              </a:ext>
-            </a:extLst>
-          </p:cNvPr>
-          <p:cNvSpPr/>
-          <p:nvPr/>
-        </p:nvSpPr>
-        <p:spPr>
-          <a:xfrm>
-            <a:off x="8280061" y="2348132"/>
-            <a:ext cx="2521668" cy="3559277"/>
-          </a:xfrm>
-          <a:prstGeom prst="rect">
-            <a:avLst/>
-          </a:prstGeom>
-          <a:solidFill>
-            <a:srgbClr val="FADECB">
-              <a:alpha val="49000"/>
-            </a:srgbClr>
-          </a:solidFill>
-          <a:ln>
-            <a:noFill/>
-          </a:ln>
-        </p:spPr>
-        <p:style>
-          <a:lnRef idx="2">
-            <a:schemeClr val="accent1">
-              <a:shade val="50000"/>
-            </a:schemeClr>
-          </a:lnRef>
-          <a:fillRef idx="1">
-            <a:schemeClr val="accent1"/>
-          </a:fillRef>
-          <a:effectRef idx="0">
-            <a:schemeClr val="accent1"/>
-          </a:effectRef>
-          <a:fontRef idx="minor">
-            <a:schemeClr val="lt1"/>
-          </a:fontRef>
-        </p:style>
-        <p:txBody>
-          <a:bodyPr rtlCol="0" anchor="ctr"/>
-          <a:lstStyle/>
-          <a:p>
-            <a:pPr marL="0" marR="0" lvl="0" indent="0" algn="ctr" defTabSz="914400" rtl="0" eaLnBrk="1" fontAlgn="auto" latinLnBrk="0" hangingPunct="1">
-              <a:lnSpc>
-                <a:spcPct val="100000"/>
-              </a:lnSpc>
-              <a:spcBef>
-                <a:spcPts val="0"/>
-              </a:spcBef>
-              <a:spcAft>
-                <a:spcPts val="0"/>
-              </a:spcAft>
-              <a:buClrTx/>
-              <a:buSzTx/>
-              <a:buFontTx/>
-              <a:buNone/>
-              <a:tabLst/>
-              <a:defRPr/>
-            </a:pPr>
-            <a:endParaRPr kumimoji="0" lang="en-US" sz="1800" b="0" i="0" u="none" strike="noStrike" kern="1200" cap="none" spc="0" normalizeH="0" baseline="0" noProof="0">
-              <a:ln>
-                <a:noFill/>
-              </a:ln>
-              <a:solidFill>
-                <a:prstClr val="white"/>
-              </a:solidFill>
-              <a:effectLst/>
-              <a:uLnTx/>
-              <a:uFillTx/>
-              <a:latin typeface="Calibri" panose="020F0502020204030204"/>
-              <a:ea typeface="+mn-ea"/>
-              <a:cs typeface="+mn-cs"/>
-            </a:endParaRPr>
-          </a:p>
-        </p:txBody>
-      </p:sp>
-      <p:cxnSp>
-        <p:nvCxnSpPr>
-          <p:cNvPr id="10" name="Straight Connector 9">
-            <a:extLst>
-              <a:ext uri="{FF2B5EF4-FFF2-40B4-BE49-F238E27FC236}">
-                <a16:creationId xmlns:a16="http://schemas.microsoft.com/office/drawing/2014/main" id="{C1C41949-E3D7-956A-6608-150D83B8DE82}"/>
-              </a:ext>
-            </a:extLst>
-          </p:cNvPr>
-          <p:cNvCxnSpPr>
-            <a:cxnSpLocks/>
-          </p:cNvCxnSpPr>
-          <p:nvPr/>
-        </p:nvCxnSpPr>
-        <p:spPr>
-          <a:xfrm flipV="1">
-            <a:off x="6658493" y="2446542"/>
-            <a:ext cx="0" cy="3139611"/>
-          </a:xfrm>
-          <a:prstGeom prst="line">
-            <a:avLst/>
-          </a:prstGeom>
-          <a:ln w="25400"/>
-        </p:spPr>
-        <p:style>
-          <a:lnRef idx="1">
-            <a:schemeClr val="accent1"/>
-          </a:lnRef>
-          <a:fillRef idx="0">
-            <a:schemeClr val="accent1"/>
-          </a:fillRef>
-          <a:effectRef idx="0">
-            <a:schemeClr val="accent1"/>
-          </a:effectRef>
-          <a:fontRef idx="minor">
-            <a:schemeClr val="tx1"/>
-          </a:fontRef>
-        </p:style>
-      </p:cxnSp>
-      <p:cxnSp>
-        <p:nvCxnSpPr>
-          <p:cNvPr id="5" name="Straight Connector 4">
-            <a:extLst>
-              <a:ext uri="{FF2B5EF4-FFF2-40B4-BE49-F238E27FC236}">
-                <a16:creationId xmlns:a16="http://schemas.microsoft.com/office/drawing/2014/main" id="{3230D586-FE3F-DB99-D55C-F85424372C67}"/>
-              </a:ext>
-            </a:extLst>
-          </p:cNvPr>
-          <p:cNvCxnSpPr>
-            <a:cxnSpLocks/>
-          </p:cNvCxnSpPr>
-          <p:nvPr/>
-        </p:nvCxnSpPr>
-        <p:spPr>
-          <a:xfrm flipV="1">
-            <a:off x="7459285" y="2446542"/>
-            <a:ext cx="0" cy="3156237"/>
-          </a:xfrm>
-          <a:prstGeom prst="line">
-            <a:avLst/>
-          </a:prstGeom>
-          <a:ln w="25400">
-            <a:solidFill>
-              <a:schemeClr val="accent2"/>
-            </a:solidFill>
-          </a:ln>
-        </p:spPr>
-        <p:style>
-          <a:lnRef idx="1">
-            <a:schemeClr val="accent1"/>
-          </a:lnRef>
-          <a:fillRef idx="0">
-            <a:schemeClr val="accent1"/>
-          </a:fillRef>
-          <a:effectRef idx="0">
-            <a:schemeClr val="accent1"/>
-          </a:effectRef>
-          <a:fontRef idx="minor">
-            <a:schemeClr val="tx1"/>
-          </a:fontRef>
-        </p:style>
-      </p:cxnSp>
-      <p:sp>
-        <p:nvSpPr>
-          <p:cNvPr id="6" name="TextBox 5">
-            <a:extLst>
-              <a:ext uri="{FF2B5EF4-FFF2-40B4-BE49-F238E27FC236}">
-                <a16:creationId xmlns:a16="http://schemas.microsoft.com/office/drawing/2014/main" id="{78C82ABE-E9D5-1BCC-6C1D-44E2EE74A229}"/>
-              </a:ext>
-            </a:extLst>
-          </p:cNvPr>
-          <p:cNvSpPr txBox="1"/>
-          <p:nvPr/>
-        </p:nvSpPr>
-        <p:spPr>
-          <a:xfrm>
-            <a:off x="838200" y="2204720"/>
-            <a:ext cx="4099418" cy="1323439"/>
-          </a:xfrm>
-          <a:prstGeom prst="rect">
-            <a:avLst/>
-          </a:prstGeom>
-          <a:noFill/>
-        </p:spPr>
-        <p:txBody>
-          <a:bodyPr wrap="square" rtlCol="0">
-            <a:spAutoFit/>
-          </a:bodyPr>
-          <a:lstStyle/>
-          <a:p>
-            <a:pPr marL="0" marR="0" lvl="0" indent="0" algn="l" defTabSz="914400" rtl="0" eaLnBrk="1" fontAlgn="auto" latinLnBrk="0" hangingPunct="1">
-              <a:lnSpc>
-                <a:spcPct val="100000"/>
-              </a:lnSpc>
-              <a:spcBef>
-                <a:spcPts val="0"/>
-              </a:spcBef>
-              <a:spcAft>
-                <a:spcPts val="0"/>
-              </a:spcAft>
-              <a:buClrTx/>
-              <a:buSzTx/>
-              <a:buFontTx/>
-              <a:buNone/>
-              <a:tabLst/>
-              <a:defRPr/>
-            </a:pPr>
-            <a:r>
-              <a:rPr kumimoji="0" lang="en-US" sz="2000" b="0" i="0" u="none" strike="noStrike" kern="1200" cap="none" spc="0" normalizeH="0" baseline="0" noProof="0" dirty="0">
-                <a:ln>
-                  <a:noFill/>
-                </a:ln>
-                <a:solidFill>
-                  <a:prstClr val="black"/>
-                </a:solidFill>
-                <a:effectLst/>
-                <a:uLnTx/>
-                <a:uFillTx/>
-                <a:latin typeface="Calibri" panose="020F0502020204030204"/>
-                <a:ea typeface="+mn-ea"/>
-                <a:cs typeface="+mn-cs"/>
-              </a:rPr>
-              <a:t>If X &lt; -1.6, then predicted Y is around 8</a:t>
-            </a:r>
-          </a:p>
-          <a:p>
-            <a:pPr marL="0" marR="0" lvl="0" indent="0" algn="l" defTabSz="914400" rtl="0" eaLnBrk="1" fontAlgn="auto" latinLnBrk="0" hangingPunct="1">
-              <a:lnSpc>
-                <a:spcPct val="100000"/>
-              </a:lnSpc>
-              <a:spcBef>
-                <a:spcPts val="0"/>
-              </a:spcBef>
-              <a:spcAft>
-                <a:spcPts val="0"/>
-              </a:spcAft>
-              <a:buClrTx/>
-              <a:buSzTx/>
-              <a:buFontTx/>
-              <a:buNone/>
-              <a:tabLst/>
-              <a:defRPr/>
-            </a:pPr>
-            <a:endParaRPr kumimoji="0" lang="en-US" sz="2000" b="0" i="0" u="none" strike="noStrike" kern="1200" cap="none" spc="0" normalizeH="0" baseline="0" noProof="0" dirty="0">
-              <a:ln>
-                <a:noFill/>
-              </a:ln>
-              <a:solidFill>
-                <a:prstClr val="black"/>
-              </a:solidFill>
-              <a:effectLst/>
-              <a:uLnTx/>
-              <a:uFillTx/>
-              <a:latin typeface="Calibri" panose="020F0502020204030204"/>
-              <a:ea typeface="+mn-ea"/>
-              <a:cs typeface="+mn-cs"/>
-            </a:endParaRPr>
-          </a:p>
-          <a:p>
-            <a:pPr marL="0" marR="0" lvl="0" indent="0" algn="l" defTabSz="914400" rtl="0" eaLnBrk="1" fontAlgn="auto" latinLnBrk="0" hangingPunct="1">
-              <a:lnSpc>
-                <a:spcPct val="100000"/>
-              </a:lnSpc>
-              <a:spcBef>
-                <a:spcPts val="0"/>
-              </a:spcBef>
-              <a:spcAft>
-                <a:spcPts val="0"/>
-              </a:spcAft>
-              <a:buClrTx/>
-              <a:buSzTx/>
-              <a:buFontTx/>
-              <a:buNone/>
-              <a:tabLst/>
-              <a:defRPr/>
-            </a:pPr>
-            <a:r>
-              <a:rPr kumimoji="0" lang="en-US" sz="2000" b="0" i="0" u="none" strike="noStrike" kern="1200" cap="none" spc="0" normalizeH="0" baseline="0" noProof="0" dirty="0">
-                <a:ln>
-                  <a:noFill/>
-                </a:ln>
-                <a:solidFill>
-                  <a:prstClr val="black"/>
-                </a:solidFill>
-                <a:effectLst/>
-                <a:uLnTx/>
-                <a:uFillTx/>
-                <a:latin typeface="Calibri" panose="020F0502020204030204"/>
-                <a:ea typeface="+mn-ea"/>
-                <a:cs typeface="+mn-cs"/>
-              </a:rPr>
-              <a:t> </a:t>
-            </a:r>
-          </a:p>
-        </p:txBody>
-      </p:sp>
-      <p:sp>
-        <p:nvSpPr>
-          <p:cNvPr id="8" name="Freeform: Shape 7">
-            <a:extLst>
-              <a:ext uri="{FF2B5EF4-FFF2-40B4-BE49-F238E27FC236}">
-                <a16:creationId xmlns:a16="http://schemas.microsoft.com/office/drawing/2014/main" id="{0EFB0B14-127F-C969-9A9C-5234DB085316}"/>
-              </a:ext>
-            </a:extLst>
-          </p:cNvPr>
-          <p:cNvSpPr/>
-          <p:nvPr/>
-        </p:nvSpPr>
-        <p:spPr>
-          <a:xfrm>
-            <a:off x="6104194" y="2762882"/>
-            <a:ext cx="760202" cy="1514478"/>
-          </a:xfrm>
-          <a:custGeom>
-            <a:avLst/>
-            <a:gdLst>
-              <a:gd name="connsiteX0" fmla="*/ 357566 w 760202"/>
-              <a:gd name="connsiteY0" fmla="*/ 638 h 1514478"/>
-              <a:gd name="connsiteX1" fmla="*/ 255966 w 760202"/>
-              <a:gd name="connsiteY1" fmla="*/ 10798 h 1514478"/>
-              <a:gd name="connsiteX2" fmla="*/ 205166 w 760202"/>
-              <a:gd name="connsiteY2" fmla="*/ 51438 h 1514478"/>
-              <a:gd name="connsiteX3" fmla="*/ 174686 w 760202"/>
-              <a:gd name="connsiteY3" fmla="*/ 61598 h 1514478"/>
-              <a:gd name="connsiteX4" fmla="*/ 32446 w 760202"/>
-              <a:gd name="connsiteY4" fmla="*/ 224158 h 1514478"/>
-              <a:gd name="connsiteX5" fmla="*/ 22286 w 760202"/>
-              <a:gd name="connsiteY5" fmla="*/ 274958 h 1514478"/>
-              <a:gd name="connsiteX6" fmla="*/ 1966 w 760202"/>
-              <a:gd name="connsiteY6" fmla="*/ 315598 h 1514478"/>
-              <a:gd name="connsiteX7" fmla="*/ 42606 w 760202"/>
-              <a:gd name="connsiteY7" fmla="*/ 610238 h 1514478"/>
-              <a:gd name="connsiteX8" fmla="*/ 123886 w 760202"/>
-              <a:gd name="connsiteY8" fmla="*/ 711838 h 1514478"/>
-              <a:gd name="connsiteX9" fmla="*/ 154366 w 760202"/>
-              <a:gd name="connsiteY9" fmla="*/ 742318 h 1514478"/>
-              <a:gd name="connsiteX10" fmla="*/ 174686 w 760202"/>
-              <a:gd name="connsiteY10" fmla="*/ 782958 h 1514478"/>
-              <a:gd name="connsiteX11" fmla="*/ 184846 w 760202"/>
-              <a:gd name="connsiteY11" fmla="*/ 833758 h 1514478"/>
-              <a:gd name="connsiteX12" fmla="*/ 164526 w 760202"/>
-              <a:gd name="connsiteY12" fmla="*/ 1026798 h 1514478"/>
-              <a:gd name="connsiteX13" fmla="*/ 174686 w 760202"/>
-              <a:gd name="connsiteY13" fmla="*/ 1351918 h 1514478"/>
-              <a:gd name="connsiteX14" fmla="*/ 205166 w 760202"/>
-              <a:gd name="connsiteY14" fmla="*/ 1423038 h 1514478"/>
-              <a:gd name="connsiteX15" fmla="*/ 286446 w 760202"/>
-              <a:gd name="connsiteY15" fmla="*/ 1504318 h 1514478"/>
-              <a:gd name="connsiteX16" fmla="*/ 337246 w 760202"/>
-              <a:gd name="connsiteY16" fmla="*/ 1514478 h 1514478"/>
-              <a:gd name="connsiteX17" fmla="*/ 509966 w 760202"/>
-              <a:gd name="connsiteY17" fmla="*/ 1433198 h 1514478"/>
-              <a:gd name="connsiteX18" fmla="*/ 621726 w 760202"/>
-              <a:gd name="connsiteY18" fmla="*/ 1290958 h 1514478"/>
-              <a:gd name="connsiteX19" fmla="*/ 692846 w 760202"/>
-              <a:gd name="connsiteY19" fmla="*/ 1108078 h 1514478"/>
-              <a:gd name="connsiteX20" fmla="*/ 703006 w 760202"/>
-              <a:gd name="connsiteY20" fmla="*/ 1057278 h 1514478"/>
-              <a:gd name="connsiteX21" fmla="*/ 723326 w 760202"/>
-              <a:gd name="connsiteY21" fmla="*/ 894718 h 1514478"/>
-              <a:gd name="connsiteX22" fmla="*/ 743646 w 760202"/>
-              <a:gd name="connsiteY22" fmla="*/ 793118 h 1514478"/>
-              <a:gd name="connsiteX23" fmla="*/ 733486 w 760202"/>
-              <a:gd name="connsiteY23" fmla="*/ 305438 h 1514478"/>
-              <a:gd name="connsiteX24" fmla="*/ 672526 w 760202"/>
-              <a:gd name="connsiteY24" fmla="*/ 153038 h 1514478"/>
-              <a:gd name="connsiteX25" fmla="*/ 479486 w 760202"/>
-              <a:gd name="connsiteY25" fmla="*/ 10798 h 1514478"/>
-              <a:gd name="connsiteX26" fmla="*/ 357566 w 760202"/>
-              <a:gd name="connsiteY26" fmla="*/ 638 h 1514478"/>
-            </a:gdLst>
-            <a:ahLst/>
-            <a:cxnLst>
-              <a:cxn ang="0">
-                <a:pos x="connsiteX0" y="connsiteY0"/>
-              </a:cxn>
-              <a:cxn ang="0">
-                <a:pos x="connsiteX1" y="connsiteY1"/>
-              </a:cxn>
-              <a:cxn ang="0">
-                <a:pos x="connsiteX2" y="connsiteY2"/>
-              </a:cxn>
-              <a:cxn ang="0">
-                <a:pos x="connsiteX3" y="connsiteY3"/>
-              </a:cxn>
-              <a:cxn ang="0">
-                <a:pos x="connsiteX4" y="connsiteY4"/>
-              </a:cxn>
-              <a:cxn ang="0">
-                <a:pos x="connsiteX5" y="connsiteY5"/>
-              </a:cxn>
-              <a:cxn ang="0">
-                <a:pos x="connsiteX6" y="connsiteY6"/>
-              </a:cxn>
-              <a:cxn ang="0">
-                <a:pos x="connsiteX7" y="connsiteY7"/>
-              </a:cxn>
-              <a:cxn ang="0">
-                <a:pos x="connsiteX8" y="connsiteY8"/>
-              </a:cxn>
-              <a:cxn ang="0">
-                <a:pos x="connsiteX9" y="connsiteY9"/>
-              </a:cxn>
-              <a:cxn ang="0">
-                <a:pos x="connsiteX10" y="connsiteY10"/>
-              </a:cxn>
-              <a:cxn ang="0">
-                <a:pos x="connsiteX11" y="connsiteY11"/>
-              </a:cxn>
-              <a:cxn ang="0">
-                <a:pos x="connsiteX12" y="connsiteY12"/>
-              </a:cxn>
-              <a:cxn ang="0">
-                <a:pos x="connsiteX13" y="connsiteY13"/>
-              </a:cxn>
-              <a:cxn ang="0">
-                <a:pos x="connsiteX14" y="connsiteY14"/>
-              </a:cxn>
-              <a:cxn ang="0">
-                <a:pos x="connsiteX15" y="connsiteY15"/>
-              </a:cxn>
-              <a:cxn ang="0">
-                <a:pos x="connsiteX16" y="connsiteY16"/>
-              </a:cxn>
-              <a:cxn ang="0">
-                <a:pos x="connsiteX17" y="connsiteY17"/>
-              </a:cxn>
-              <a:cxn ang="0">
-                <a:pos x="connsiteX18" y="connsiteY18"/>
-              </a:cxn>
-              <a:cxn ang="0">
-                <a:pos x="connsiteX19" y="connsiteY19"/>
-              </a:cxn>
-              <a:cxn ang="0">
-                <a:pos x="connsiteX20" y="connsiteY20"/>
-              </a:cxn>
-              <a:cxn ang="0">
-                <a:pos x="connsiteX21" y="connsiteY21"/>
-              </a:cxn>
-              <a:cxn ang="0">
-                <a:pos x="connsiteX22" y="connsiteY22"/>
-              </a:cxn>
-              <a:cxn ang="0">
-                <a:pos x="connsiteX23" y="connsiteY23"/>
-              </a:cxn>
-              <a:cxn ang="0">
-                <a:pos x="connsiteX24" y="connsiteY24"/>
-              </a:cxn>
-              <a:cxn ang="0">
-                <a:pos x="connsiteX25" y="connsiteY25"/>
-              </a:cxn>
-              <a:cxn ang="0">
-                <a:pos x="connsiteX26" y="connsiteY26"/>
-              </a:cxn>
-            </a:cxnLst>
-            <a:rect l="l" t="t" r="r" b="b"/>
-            <a:pathLst>
-              <a:path w="760202" h="1514478">
-                <a:moveTo>
-                  <a:pt x="357566" y="638"/>
-                </a:moveTo>
-                <a:cubicBezTo>
-                  <a:pt x="320313" y="638"/>
-                  <a:pt x="288255" y="35"/>
-                  <a:pt x="255966" y="10798"/>
-                </a:cubicBezTo>
-                <a:cubicBezTo>
-                  <a:pt x="235394" y="17655"/>
-                  <a:pt x="223555" y="39945"/>
-                  <a:pt x="205166" y="51438"/>
-                </a:cubicBezTo>
-                <a:cubicBezTo>
-                  <a:pt x="196084" y="57114"/>
-                  <a:pt x="184846" y="58211"/>
-                  <a:pt x="174686" y="61598"/>
-                </a:cubicBezTo>
-                <a:cubicBezTo>
-                  <a:pt x="48962" y="187322"/>
-                  <a:pt x="90032" y="128182"/>
-                  <a:pt x="32446" y="224158"/>
-                </a:cubicBezTo>
-                <a:cubicBezTo>
-                  <a:pt x="29059" y="241091"/>
-                  <a:pt x="27747" y="258575"/>
-                  <a:pt x="22286" y="274958"/>
-                </a:cubicBezTo>
-                <a:cubicBezTo>
-                  <a:pt x="17497" y="289326"/>
-                  <a:pt x="2571" y="300464"/>
-                  <a:pt x="1966" y="315598"/>
-                </a:cubicBezTo>
-                <a:cubicBezTo>
-                  <a:pt x="-1140" y="393247"/>
-                  <a:pt x="-6924" y="529190"/>
-                  <a:pt x="42606" y="610238"/>
-                </a:cubicBezTo>
-                <a:cubicBezTo>
-                  <a:pt x="65222" y="647245"/>
-                  <a:pt x="93218" y="681170"/>
-                  <a:pt x="123886" y="711838"/>
-                </a:cubicBezTo>
-                <a:cubicBezTo>
-                  <a:pt x="134046" y="721998"/>
-                  <a:pt x="146015" y="730626"/>
-                  <a:pt x="154366" y="742318"/>
-                </a:cubicBezTo>
-                <a:cubicBezTo>
-                  <a:pt x="163169" y="754643"/>
-                  <a:pt x="167913" y="769411"/>
-                  <a:pt x="174686" y="782958"/>
-                </a:cubicBezTo>
-                <a:cubicBezTo>
-                  <a:pt x="178073" y="799891"/>
-                  <a:pt x="184846" y="816489"/>
-                  <a:pt x="184846" y="833758"/>
-                </a:cubicBezTo>
-                <a:cubicBezTo>
-                  <a:pt x="184846" y="936271"/>
-                  <a:pt x="179870" y="950077"/>
-                  <a:pt x="164526" y="1026798"/>
-                </a:cubicBezTo>
-                <a:cubicBezTo>
-                  <a:pt x="167913" y="1135171"/>
-                  <a:pt x="168672" y="1243659"/>
-                  <a:pt x="174686" y="1351918"/>
-                </a:cubicBezTo>
-                <a:cubicBezTo>
-                  <a:pt x="176178" y="1378774"/>
-                  <a:pt x="187270" y="1403353"/>
-                  <a:pt x="205166" y="1423038"/>
-                </a:cubicBezTo>
-                <a:cubicBezTo>
-                  <a:pt x="230940" y="1451389"/>
-                  <a:pt x="248874" y="1496804"/>
-                  <a:pt x="286446" y="1504318"/>
-                </a:cubicBezTo>
-                <a:lnTo>
-                  <a:pt x="337246" y="1514478"/>
-                </a:lnTo>
-                <a:cubicBezTo>
-                  <a:pt x="451965" y="1501731"/>
-                  <a:pt x="420282" y="1522882"/>
-                  <a:pt x="509966" y="1433198"/>
-                </a:cubicBezTo>
-                <a:cubicBezTo>
-                  <a:pt x="533852" y="1409312"/>
-                  <a:pt x="605060" y="1322775"/>
-                  <a:pt x="621726" y="1290958"/>
-                </a:cubicBezTo>
-                <a:cubicBezTo>
-                  <a:pt x="661142" y="1215710"/>
-                  <a:pt x="677496" y="1177153"/>
-                  <a:pt x="692846" y="1108078"/>
-                </a:cubicBezTo>
-                <a:cubicBezTo>
-                  <a:pt x="696592" y="1091221"/>
-                  <a:pt x="700564" y="1074373"/>
-                  <a:pt x="703006" y="1057278"/>
-                </a:cubicBezTo>
-                <a:cubicBezTo>
-                  <a:pt x="710729" y="1003218"/>
-                  <a:pt x="715603" y="948778"/>
-                  <a:pt x="723326" y="894718"/>
-                </a:cubicBezTo>
-                <a:cubicBezTo>
-                  <a:pt x="735001" y="812996"/>
-                  <a:pt x="725913" y="846316"/>
-                  <a:pt x="743646" y="793118"/>
-                </a:cubicBezTo>
-                <a:cubicBezTo>
-                  <a:pt x="772610" y="590371"/>
-                  <a:pt x="759944" y="711121"/>
-                  <a:pt x="733486" y="305438"/>
-                </a:cubicBezTo>
-                <a:cubicBezTo>
-                  <a:pt x="729951" y="251228"/>
-                  <a:pt x="700241" y="196151"/>
-                  <a:pt x="672526" y="153038"/>
-                </a:cubicBezTo>
-                <a:cubicBezTo>
-                  <a:pt x="641158" y="104243"/>
-                  <a:pt x="480695" y="11432"/>
-                  <a:pt x="479486" y="10798"/>
-                </a:cubicBezTo>
-                <a:cubicBezTo>
-                  <a:pt x="451586" y="-3816"/>
-                  <a:pt x="394819" y="638"/>
-                  <a:pt x="357566" y="638"/>
-                </a:cubicBezTo>
-                <a:close/>
-              </a:path>
-            </a:pathLst>
-          </a:custGeom>
-          <a:solidFill>
-            <a:schemeClr val="accent6">
-              <a:lumMod val="40000"/>
-              <a:lumOff val="60000"/>
-              <a:alpha val="25000"/>
-            </a:schemeClr>
-          </a:solidFill>
-        </p:spPr>
-        <p:style>
-          <a:lnRef idx="2">
-            <a:schemeClr val="accent1">
-              <a:shade val="50000"/>
-            </a:schemeClr>
-          </a:lnRef>
-          <a:fillRef idx="1">
-            <a:schemeClr val="accent1"/>
-          </a:fillRef>
-          <a:effectRef idx="0">
-            <a:schemeClr val="accent1"/>
-          </a:effectRef>
-          <a:fontRef idx="minor">
-            <a:schemeClr val="lt1"/>
-          </a:fontRef>
-        </p:style>
-        <p:txBody>
-          <a:bodyPr rtlCol="0" anchor="ctr"/>
-          <a:lstStyle/>
-          <a:p>
-            <a:pPr marL="0" marR="0" lvl="0" indent="0" algn="ctr" defTabSz="914400" rtl="0" eaLnBrk="1" fontAlgn="auto" latinLnBrk="0" hangingPunct="1">
-              <a:lnSpc>
-                <a:spcPct val="100000"/>
-              </a:lnSpc>
-              <a:spcBef>
-                <a:spcPts val="0"/>
-              </a:spcBef>
-              <a:spcAft>
-                <a:spcPts val="0"/>
-              </a:spcAft>
-              <a:buClrTx/>
-              <a:buSzTx/>
-              <a:buFontTx/>
-              <a:buNone/>
-              <a:tabLst/>
-              <a:defRPr/>
-            </a:pPr>
-            <a:endParaRPr kumimoji="0" lang="en-US" sz="1800" b="0" i="0" u="none" strike="noStrike" kern="1200" cap="none" spc="0" normalizeH="0" baseline="0" noProof="0">
-              <a:ln>
-                <a:noFill/>
-              </a:ln>
-              <a:solidFill>
-                <a:prstClr val="white"/>
-              </a:solidFill>
-              <a:effectLst/>
-              <a:uLnTx/>
-              <a:uFillTx/>
-              <a:latin typeface="Calibri" panose="020F0502020204030204"/>
-              <a:ea typeface="+mn-ea"/>
-              <a:cs typeface="+mn-cs"/>
-            </a:endParaRPr>
-          </a:p>
-        </p:txBody>
-      </p:sp>
     </p:spTree>
     <p:extLst>
       <p:ext uri="{BB962C8B-B14F-4D97-AF65-F5344CB8AC3E}">
-        <p14:creationId xmlns:p14="http://schemas.microsoft.com/office/powerpoint/2010/main" val="758416118"/>
+        <p14:creationId xmlns:p14="http://schemas.microsoft.com/office/powerpoint/2010/main" val="2480888025"/>
       </p:ext>
     </p:extLst>
   </p:cSld>
@@ -38974,7 +35026,7 @@
           <p:cNvPr id="2" name="Title 1">
             <a:extLst>
               <a:ext uri="{FF2B5EF4-FFF2-40B4-BE49-F238E27FC236}">
-                <a16:creationId xmlns:a16="http://schemas.microsoft.com/office/drawing/2014/main" id="{022A1C08-F088-44F3-A554-2C9BCDFFFF90}"/>
+                <a16:creationId xmlns:a16="http://schemas.microsoft.com/office/drawing/2014/main" id="{644EE6AC-3A1C-4987-89B1-6530E284D3DA}"/>
               </a:ext>
             </a:extLst>
           </p:cNvPr>
@@ -38992,7 +35044,7 @@
           <a:p>
             <a:r>
               <a:rPr lang="en-US" dirty="0"/>
-              <a:t>Let’s Predict</a:t>
+              <a:t>Bias-Variance Tradeoff</a:t>
             </a:r>
           </a:p>
         </p:txBody>
@@ -39002,7 +35054,7 @@
           <p:cNvPr id="3" name="Content Placeholder 2">
             <a:extLst>
               <a:ext uri="{FF2B5EF4-FFF2-40B4-BE49-F238E27FC236}">
-                <a16:creationId xmlns:a16="http://schemas.microsoft.com/office/drawing/2014/main" id="{A79DB37C-7C75-41C8-821A-F09082E29E87}"/>
+                <a16:creationId xmlns:a16="http://schemas.microsoft.com/office/drawing/2014/main" id="{2B5135AA-AD39-47C0-8893-0408709814CE}"/>
               </a:ext>
             </a:extLst>
           </p:cNvPr>
@@ -39013,918 +35065,55 @@
             <p:ph idx="1"/>
           </p:nvPr>
         </p:nvSpPr>
-        <p:spPr>
-          <a:xfrm>
-            <a:off x="5988737" y="1947683"/>
-            <a:ext cx="2691581" cy="455459"/>
-          </a:xfrm>
-        </p:spPr>
+        <p:spPr/>
         <p:txBody>
-          <a:bodyPr>
-            <a:normAutofit lnSpcReduction="10000"/>
-          </a:bodyPr>
+          <a:bodyPr/>
           <a:lstStyle/>
           <a:p>
-            <a:pPr marL="0" indent="0">
-              <a:buNone/>
-            </a:pPr>
             <a:r>
-              <a:rPr lang="en-US" dirty="0"/>
-              <a:t>Training Data</a:t>
+              <a:rPr lang="en-US" dirty="0">
+                <a:hlinkClick r:id="rId2"/>
+              </a:rPr>
+              <a:t>Source</a:t>
             </a:r>
+            <a:endParaRPr lang="en-US" dirty="0"/>
           </a:p>
         </p:txBody>
       </p:sp>
       <p:pic>
         <p:nvPicPr>
-          <p:cNvPr id="2050" name="Picture 2" descr="By6Y9ht39imXAAAAAElFTkSuQmCC (482×357)">
+          <p:cNvPr id="5" name="Picture 4">
             <a:extLst>
               <a:ext uri="{FF2B5EF4-FFF2-40B4-BE49-F238E27FC236}">
-                <a16:creationId xmlns:a16="http://schemas.microsoft.com/office/drawing/2014/main" id="{DD123E85-49DA-44AE-B8DC-522426C0FCC9}"/>
+                <a16:creationId xmlns:a16="http://schemas.microsoft.com/office/drawing/2014/main" id="{8EBB11D2-1ABC-4E85-8C78-A43392A77D91}"/>
               </a:ext>
             </a:extLst>
           </p:cNvPr>
           <p:cNvPicPr>
-            <a:picLocks noChangeAspect="1" noChangeArrowheads="1"/>
+            <a:picLocks noChangeAspect="1"/>
           </p:cNvPicPr>
           <p:nvPr/>
         </p:nvPicPr>
         <p:blipFill>
-          <a:blip r:embed="rId2">
-            <a:extLst>
-              <a:ext uri="{28A0092B-C50C-407E-A947-70E740481C1C}">
-                <a14:useLocalDpi xmlns:a14="http://schemas.microsoft.com/office/drawing/2010/main" val="0"/>
-              </a:ext>
-            </a:extLst>
-          </a:blip>
-          <a:srcRect/>
+          <a:blip r:embed="rId3"/>
           <a:stretch>
             <a:fillRect/>
           </a:stretch>
         </p:blipFill>
-        <p:spPr bwMode="auto">
+        <p:spPr>
           <a:xfrm>
-            <a:off x="5837718" y="2446542"/>
-            <a:ext cx="4591050" cy="3400425"/>
+            <a:off x="3459169" y="1623581"/>
+            <a:ext cx="6142032" cy="4869294"/>
           </a:xfrm>
           <a:prstGeom prst="rect">
             <a:avLst/>
           </a:prstGeom>
-          <a:noFill/>
-          <a:extLst>
-            <a:ext uri="{909E8E84-426E-40DD-AFC4-6F175D3DCCD1}">
-              <a14:hiddenFill xmlns:a14="http://schemas.microsoft.com/office/drawing/2010/main">
-                <a:solidFill>
-                  <a:srgbClr val="FFFFFF"/>
-                </a:solidFill>
-              </a14:hiddenFill>
-            </a:ext>
-          </a:extLst>
         </p:spPr>
       </p:pic>
-      <p:sp>
-        <p:nvSpPr>
-          <p:cNvPr id="4" name="Rectangle 3">
-            <a:extLst>
-              <a:ext uri="{FF2B5EF4-FFF2-40B4-BE49-F238E27FC236}">
-                <a16:creationId xmlns:a16="http://schemas.microsoft.com/office/drawing/2014/main" id="{E08CF654-B655-4278-BCA2-A0592C74BE10}"/>
-              </a:ext>
-            </a:extLst>
-          </p:cNvPr>
-          <p:cNvSpPr/>
-          <p:nvPr/>
-        </p:nvSpPr>
-        <p:spPr>
-          <a:xfrm>
-            <a:off x="8280061" y="2348132"/>
-            <a:ext cx="2521668" cy="3559277"/>
-          </a:xfrm>
-          <a:prstGeom prst="rect">
-            <a:avLst/>
-          </a:prstGeom>
-          <a:solidFill>
-            <a:srgbClr val="FADECB">
-              <a:alpha val="49000"/>
-            </a:srgbClr>
-          </a:solidFill>
-          <a:ln>
-            <a:noFill/>
-          </a:ln>
-        </p:spPr>
-        <p:style>
-          <a:lnRef idx="2">
-            <a:schemeClr val="accent1">
-              <a:shade val="50000"/>
-            </a:schemeClr>
-          </a:lnRef>
-          <a:fillRef idx="1">
-            <a:schemeClr val="accent1"/>
-          </a:fillRef>
-          <a:effectRef idx="0">
-            <a:schemeClr val="accent1"/>
-          </a:effectRef>
-          <a:fontRef idx="minor">
-            <a:schemeClr val="lt1"/>
-          </a:fontRef>
-        </p:style>
-        <p:txBody>
-          <a:bodyPr rtlCol="0" anchor="ctr"/>
-          <a:lstStyle/>
-          <a:p>
-            <a:pPr marL="0" marR="0" lvl="0" indent="0" algn="ctr" defTabSz="914400" rtl="0" eaLnBrk="1" fontAlgn="auto" latinLnBrk="0" hangingPunct="1">
-              <a:lnSpc>
-                <a:spcPct val="100000"/>
-              </a:lnSpc>
-              <a:spcBef>
-                <a:spcPts val="0"/>
-              </a:spcBef>
-              <a:spcAft>
-                <a:spcPts val="0"/>
-              </a:spcAft>
-              <a:buClrTx/>
-              <a:buSzTx/>
-              <a:buFontTx/>
-              <a:buNone/>
-              <a:tabLst/>
-              <a:defRPr/>
-            </a:pPr>
-            <a:endParaRPr kumimoji="0" lang="en-US" sz="1800" b="0" i="0" u="none" strike="noStrike" kern="1200" cap="none" spc="0" normalizeH="0" baseline="0" noProof="0">
-              <a:ln>
-                <a:noFill/>
-              </a:ln>
-              <a:solidFill>
-                <a:prstClr val="white"/>
-              </a:solidFill>
-              <a:effectLst/>
-              <a:uLnTx/>
-              <a:uFillTx/>
-              <a:latin typeface="Calibri" panose="020F0502020204030204"/>
-              <a:ea typeface="+mn-ea"/>
-              <a:cs typeface="+mn-cs"/>
-            </a:endParaRPr>
-          </a:p>
-        </p:txBody>
-      </p:sp>
-      <p:cxnSp>
-        <p:nvCxnSpPr>
-          <p:cNvPr id="10" name="Straight Connector 9">
-            <a:extLst>
-              <a:ext uri="{FF2B5EF4-FFF2-40B4-BE49-F238E27FC236}">
-                <a16:creationId xmlns:a16="http://schemas.microsoft.com/office/drawing/2014/main" id="{C1C41949-E3D7-956A-6608-150D83B8DE82}"/>
-              </a:ext>
-            </a:extLst>
-          </p:cNvPr>
-          <p:cNvCxnSpPr>
-            <a:cxnSpLocks/>
-          </p:cNvCxnSpPr>
-          <p:nvPr/>
-        </p:nvCxnSpPr>
-        <p:spPr>
-          <a:xfrm flipV="1">
-            <a:off x="6658493" y="2446542"/>
-            <a:ext cx="0" cy="3139611"/>
-          </a:xfrm>
-          <a:prstGeom prst="line">
-            <a:avLst/>
-          </a:prstGeom>
-          <a:ln w="25400"/>
-        </p:spPr>
-        <p:style>
-          <a:lnRef idx="1">
-            <a:schemeClr val="accent1"/>
-          </a:lnRef>
-          <a:fillRef idx="0">
-            <a:schemeClr val="accent1"/>
-          </a:fillRef>
-          <a:effectRef idx="0">
-            <a:schemeClr val="accent1"/>
-          </a:effectRef>
-          <a:fontRef idx="minor">
-            <a:schemeClr val="tx1"/>
-          </a:fontRef>
-        </p:style>
-      </p:cxnSp>
-      <p:cxnSp>
-        <p:nvCxnSpPr>
-          <p:cNvPr id="5" name="Straight Connector 4">
-            <a:extLst>
-              <a:ext uri="{FF2B5EF4-FFF2-40B4-BE49-F238E27FC236}">
-                <a16:creationId xmlns:a16="http://schemas.microsoft.com/office/drawing/2014/main" id="{3230D586-FE3F-DB99-D55C-F85424372C67}"/>
-              </a:ext>
-            </a:extLst>
-          </p:cNvPr>
-          <p:cNvCxnSpPr>
-            <a:cxnSpLocks/>
-          </p:cNvCxnSpPr>
-          <p:nvPr/>
-        </p:nvCxnSpPr>
-        <p:spPr>
-          <a:xfrm flipV="1">
-            <a:off x="7459285" y="2446542"/>
-            <a:ext cx="0" cy="3156237"/>
-          </a:xfrm>
-          <a:prstGeom prst="line">
-            <a:avLst/>
-          </a:prstGeom>
-          <a:ln w="25400">
-            <a:solidFill>
-              <a:schemeClr val="accent2"/>
-            </a:solidFill>
-          </a:ln>
-        </p:spPr>
-        <p:style>
-          <a:lnRef idx="1">
-            <a:schemeClr val="accent1"/>
-          </a:lnRef>
-          <a:fillRef idx="0">
-            <a:schemeClr val="accent1"/>
-          </a:fillRef>
-          <a:effectRef idx="0">
-            <a:schemeClr val="accent1"/>
-          </a:effectRef>
-          <a:fontRef idx="minor">
-            <a:schemeClr val="tx1"/>
-          </a:fontRef>
-        </p:style>
-      </p:cxnSp>
-      <p:sp>
-        <p:nvSpPr>
-          <p:cNvPr id="6" name="TextBox 5">
-            <a:extLst>
-              <a:ext uri="{FF2B5EF4-FFF2-40B4-BE49-F238E27FC236}">
-                <a16:creationId xmlns:a16="http://schemas.microsoft.com/office/drawing/2014/main" id="{78C82ABE-E9D5-1BCC-6C1D-44E2EE74A229}"/>
-              </a:ext>
-            </a:extLst>
-          </p:cNvPr>
-          <p:cNvSpPr txBox="1"/>
-          <p:nvPr/>
-        </p:nvSpPr>
-        <p:spPr>
-          <a:xfrm>
-            <a:off x="838200" y="2204720"/>
-            <a:ext cx="4099418" cy="2246769"/>
-          </a:xfrm>
-          <a:prstGeom prst="rect">
-            <a:avLst/>
-          </a:prstGeom>
-          <a:noFill/>
-        </p:spPr>
-        <p:txBody>
-          <a:bodyPr wrap="square" rtlCol="0">
-            <a:spAutoFit/>
-          </a:bodyPr>
-          <a:lstStyle/>
-          <a:p>
-            <a:pPr marL="0" marR="0" lvl="0" indent="0" algn="l" defTabSz="914400" rtl="0" eaLnBrk="1" fontAlgn="auto" latinLnBrk="0" hangingPunct="1">
-              <a:lnSpc>
-                <a:spcPct val="100000"/>
-              </a:lnSpc>
-              <a:spcBef>
-                <a:spcPts val="0"/>
-              </a:spcBef>
-              <a:spcAft>
-                <a:spcPts val="0"/>
-              </a:spcAft>
-              <a:buClrTx/>
-              <a:buSzTx/>
-              <a:buFontTx/>
-              <a:buNone/>
-              <a:tabLst/>
-              <a:defRPr/>
-            </a:pPr>
-            <a:r>
-              <a:rPr kumimoji="0" lang="en-US" sz="2000" b="0" i="0" u="none" strike="noStrike" kern="1200" cap="none" spc="0" normalizeH="0" baseline="0" noProof="0" dirty="0">
-                <a:ln>
-                  <a:noFill/>
-                </a:ln>
-                <a:solidFill>
-                  <a:prstClr val="black"/>
-                </a:solidFill>
-                <a:effectLst/>
-                <a:uLnTx/>
-                <a:uFillTx/>
-                <a:latin typeface="Calibri" panose="020F0502020204030204"/>
-                <a:ea typeface="+mn-ea"/>
-                <a:cs typeface="+mn-cs"/>
-              </a:rPr>
-              <a:t>If X &lt; -1.6, then predicted Y is around 8</a:t>
-            </a:r>
-          </a:p>
-          <a:p>
-            <a:pPr marL="0" marR="0" lvl="0" indent="0" algn="l" defTabSz="914400" rtl="0" eaLnBrk="1" fontAlgn="auto" latinLnBrk="0" hangingPunct="1">
-              <a:lnSpc>
-                <a:spcPct val="100000"/>
-              </a:lnSpc>
-              <a:spcBef>
-                <a:spcPts val="0"/>
-              </a:spcBef>
-              <a:spcAft>
-                <a:spcPts val="0"/>
-              </a:spcAft>
-              <a:buClrTx/>
-              <a:buSzTx/>
-              <a:buFontTx/>
-              <a:buNone/>
-              <a:tabLst/>
-              <a:defRPr/>
-            </a:pPr>
-            <a:endParaRPr kumimoji="0" lang="en-US" sz="2000" b="0" i="0" u="none" strike="noStrike" kern="1200" cap="none" spc="0" normalizeH="0" baseline="0" noProof="0" dirty="0">
-              <a:ln>
-                <a:noFill/>
-              </a:ln>
-              <a:solidFill>
-                <a:prstClr val="black"/>
-              </a:solidFill>
-              <a:effectLst/>
-              <a:uLnTx/>
-              <a:uFillTx/>
-              <a:latin typeface="Calibri" panose="020F0502020204030204"/>
-              <a:ea typeface="+mn-ea"/>
-              <a:cs typeface="+mn-cs"/>
-            </a:endParaRPr>
-          </a:p>
-          <a:p>
-            <a:pPr marL="0" marR="0" lvl="0" indent="0" algn="l" defTabSz="914400" rtl="0" eaLnBrk="1" fontAlgn="auto" latinLnBrk="0" hangingPunct="1">
-              <a:lnSpc>
-                <a:spcPct val="100000"/>
-              </a:lnSpc>
-              <a:spcBef>
-                <a:spcPts val="0"/>
-              </a:spcBef>
-              <a:spcAft>
-                <a:spcPts val="0"/>
-              </a:spcAft>
-              <a:buClrTx/>
-              <a:buSzTx/>
-              <a:buFontTx/>
-              <a:buNone/>
-              <a:tabLst/>
-              <a:defRPr/>
-            </a:pPr>
-            <a:r>
-              <a:rPr kumimoji="0" lang="en-US" sz="2000" b="0" i="0" u="none" strike="noStrike" kern="1200" cap="none" spc="0" normalizeH="0" baseline="0" noProof="0" dirty="0">
-                <a:ln>
-                  <a:noFill/>
-                </a:ln>
-                <a:solidFill>
-                  <a:prstClr val="black"/>
-                </a:solidFill>
-                <a:effectLst/>
-                <a:uLnTx/>
-                <a:uFillTx/>
-                <a:latin typeface="Calibri" panose="020F0502020204030204"/>
-                <a:ea typeface="+mn-ea"/>
-                <a:cs typeface="+mn-cs"/>
-              </a:rPr>
-              <a:t>If X is between -1.6 and -0.7, then predicted Y is around 4</a:t>
-            </a:r>
-          </a:p>
-          <a:p>
-            <a:pPr marL="0" marR="0" lvl="0" indent="0" algn="l" defTabSz="914400" rtl="0" eaLnBrk="1" fontAlgn="auto" latinLnBrk="0" hangingPunct="1">
-              <a:lnSpc>
-                <a:spcPct val="100000"/>
-              </a:lnSpc>
-              <a:spcBef>
-                <a:spcPts val="0"/>
-              </a:spcBef>
-              <a:spcAft>
-                <a:spcPts val="0"/>
-              </a:spcAft>
-              <a:buClrTx/>
-              <a:buSzTx/>
-              <a:buFontTx/>
-              <a:buNone/>
-              <a:tabLst/>
-              <a:defRPr/>
-            </a:pPr>
-            <a:endParaRPr kumimoji="0" lang="en-US" sz="2000" b="0" i="0" u="none" strike="noStrike" kern="1200" cap="none" spc="0" normalizeH="0" baseline="0" noProof="0" dirty="0">
-              <a:ln>
-                <a:noFill/>
-              </a:ln>
-              <a:solidFill>
-                <a:prstClr val="black"/>
-              </a:solidFill>
-              <a:effectLst/>
-              <a:uLnTx/>
-              <a:uFillTx/>
-              <a:latin typeface="Calibri" panose="020F0502020204030204"/>
-              <a:ea typeface="+mn-ea"/>
-              <a:cs typeface="+mn-cs"/>
-            </a:endParaRPr>
-          </a:p>
-          <a:p>
-            <a:pPr marL="0" marR="0" lvl="0" indent="0" algn="l" defTabSz="914400" rtl="0" eaLnBrk="1" fontAlgn="auto" latinLnBrk="0" hangingPunct="1">
-              <a:lnSpc>
-                <a:spcPct val="100000"/>
-              </a:lnSpc>
-              <a:spcBef>
-                <a:spcPts val="0"/>
-              </a:spcBef>
-              <a:spcAft>
-                <a:spcPts val="0"/>
-              </a:spcAft>
-              <a:buClrTx/>
-              <a:buSzTx/>
-              <a:buFontTx/>
-              <a:buNone/>
-              <a:tabLst/>
-              <a:defRPr/>
-            </a:pPr>
-            <a:r>
-              <a:rPr kumimoji="0" lang="en-US" sz="2000" b="0" i="0" u="none" strike="noStrike" kern="1200" cap="none" spc="0" normalizeH="0" baseline="0" noProof="0" dirty="0">
-                <a:ln>
-                  <a:noFill/>
-                </a:ln>
-                <a:solidFill>
-                  <a:prstClr val="black"/>
-                </a:solidFill>
-                <a:effectLst/>
-                <a:uLnTx/>
-                <a:uFillTx/>
-                <a:latin typeface="Calibri" panose="020F0502020204030204"/>
-                <a:ea typeface="+mn-ea"/>
-                <a:cs typeface="+mn-cs"/>
-              </a:rPr>
-              <a:t> </a:t>
-            </a:r>
-          </a:p>
-        </p:txBody>
-      </p:sp>
-      <p:sp>
-        <p:nvSpPr>
-          <p:cNvPr id="9" name="Freeform: Shape 8">
-            <a:extLst>
-              <a:ext uri="{FF2B5EF4-FFF2-40B4-BE49-F238E27FC236}">
-                <a16:creationId xmlns:a16="http://schemas.microsoft.com/office/drawing/2014/main" id="{899B575E-AFCA-31D0-E004-C3ECB0B9F05E}"/>
-              </a:ext>
-            </a:extLst>
-          </p:cNvPr>
-          <p:cNvSpPr/>
-          <p:nvPr/>
-        </p:nvSpPr>
-        <p:spPr>
-          <a:xfrm>
-            <a:off x="6624320" y="3482821"/>
-            <a:ext cx="904309" cy="1485419"/>
-          </a:xfrm>
-          <a:custGeom>
-            <a:avLst/>
-            <a:gdLst>
-              <a:gd name="connsiteX0" fmla="*/ 660400 w 904309"/>
-              <a:gd name="connsiteY0" fmla="*/ 2059 h 1485419"/>
-              <a:gd name="connsiteX1" fmla="*/ 802640 w 904309"/>
-              <a:gd name="connsiteY1" fmla="*/ 12219 h 1485419"/>
-              <a:gd name="connsiteX2" fmla="*/ 883920 w 904309"/>
-              <a:gd name="connsiteY2" fmla="*/ 123979 h 1485419"/>
-              <a:gd name="connsiteX3" fmla="*/ 894080 w 904309"/>
-              <a:gd name="connsiteY3" fmla="*/ 195099 h 1485419"/>
-              <a:gd name="connsiteX4" fmla="*/ 904240 w 904309"/>
-              <a:gd name="connsiteY4" fmla="*/ 245899 h 1485419"/>
-              <a:gd name="connsiteX5" fmla="*/ 853440 w 904309"/>
-              <a:gd name="connsiteY5" fmla="*/ 510059 h 1485419"/>
-              <a:gd name="connsiteX6" fmla="*/ 833120 w 904309"/>
-              <a:gd name="connsiteY6" fmla="*/ 581179 h 1485419"/>
-              <a:gd name="connsiteX7" fmla="*/ 822960 w 904309"/>
-              <a:gd name="connsiteY7" fmla="*/ 652299 h 1485419"/>
-              <a:gd name="connsiteX8" fmla="*/ 802640 w 904309"/>
-              <a:gd name="connsiteY8" fmla="*/ 703099 h 1485419"/>
-              <a:gd name="connsiteX9" fmla="*/ 731520 w 904309"/>
-              <a:gd name="connsiteY9" fmla="*/ 916459 h 1485419"/>
-              <a:gd name="connsiteX10" fmla="*/ 711200 w 904309"/>
-              <a:gd name="connsiteY10" fmla="*/ 1119659 h 1485419"/>
-              <a:gd name="connsiteX11" fmla="*/ 701040 w 904309"/>
-              <a:gd name="connsiteY11" fmla="*/ 1160299 h 1485419"/>
-              <a:gd name="connsiteX12" fmla="*/ 670560 w 904309"/>
-              <a:gd name="connsiteY12" fmla="*/ 1221259 h 1485419"/>
-              <a:gd name="connsiteX13" fmla="*/ 640080 w 904309"/>
-              <a:gd name="connsiteY13" fmla="*/ 1434619 h 1485419"/>
-              <a:gd name="connsiteX14" fmla="*/ 609600 w 904309"/>
-              <a:gd name="connsiteY14" fmla="*/ 1444779 h 1485419"/>
-              <a:gd name="connsiteX15" fmla="*/ 568960 w 904309"/>
-              <a:gd name="connsiteY15" fmla="*/ 1454939 h 1485419"/>
-              <a:gd name="connsiteX16" fmla="*/ 375920 w 904309"/>
-              <a:gd name="connsiteY16" fmla="*/ 1485419 h 1485419"/>
-              <a:gd name="connsiteX17" fmla="*/ 264160 w 904309"/>
-              <a:gd name="connsiteY17" fmla="*/ 1444779 h 1485419"/>
-              <a:gd name="connsiteX18" fmla="*/ 233680 w 904309"/>
-              <a:gd name="connsiteY18" fmla="*/ 1393979 h 1485419"/>
-              <a:gd name="connsiteX19" fmla="*/ 172720 w 904309"/>
-              <a:gd name="connsiteY19" fmla="*/ 1322859 h 1485419"/>
-              <a:gd name="connsiteX20" fmla="*/ 132080 w 904309"/>
-              <a:gd name="connsiteY20" fmla="*/ 1241579 h 1485419"/>
-              <a:gd name="connsiteX21" fmla="*/ 60960 w 904309"/>
-              <a:gd name="connsiteY21" fmla="*/ 1119659 h 1485419"/>
-              <a:gd name="connsiteX22" fmla="*/ 40640 w 904309"/>
-              <a:gd name="connsiteY22" fmla="*/ 1058699 h 1485419"/>
-              <a:gd name="connsiteX23" fmla="*/ 0 w 904309"/>
-              <a:gd name="connsiteY23" fmla="*/ 957099 h 1485419"/>
-              <a:gd name="connsiteX24" fmla="*/ 30480 w 904309"/>
-              <a:gd name="connsiteY24" fmla="*/ 835179 h 1485419"/>
-              <a:gd name="connsiteX25" fmla="*/ 71120 w 904309"/>
-              <a:gd name="connsiteY25" fmla="*/ 753899 h 1485419"/>
-              <a:gd name="connsiteX26" fmla="*/ 20320 w 904309"/>
-              <a:gd name="connsiteY26" fmla="*/ 479579 h 1485419"/>
-              <a:gd name="connsiteX27" fmla="*/ 40640 w 904309"/>
-              <a:gd name="connsiteY27" fmla="*/ 428779 h 1485419"/>
-              <a:gd name="connsiteX28" fmla="*/ 71120 w 904309"/>
-              <a:gd name="connsiteY28" fmla="*/ 337339 h 1485419"/>
-              <a:gd name="connsiteX29" fmla="*/ 101600 w 904309"/>
-              <a:gd name="connsiteY29" fmla="*/ 266219 h 1485419"/>
-              <a:gd name="connsiteX30" fmla="*/ 152400 w 904309"/>
-              <a:gd name="connsiteY30" fmla="*/ 256059 h 1485419"/>
-              <a:gd name="connsiteX31" fmla="*/ 182880 w 904309"/>
-              <a:gd name="connsiteY31" fmla="*/ 184939 h 1485419"/>
-              <a:gd name="connsiteX32" fmla="*/ 243840 w 904309"/>
-              <a:gd name="connsiteY32" fmla="*/ 164619 h 1485419"/>
-              <a:gd name="connsiteX33" fmla="*/ 345440 w 904309"/>
-              <a:gd name="connsiteY33" fmla="*/ 93499 h 1485419"/>
-              <a:gd name="connsiteX34" fmla="*/ 375920 w 904309"/>
-              <a:gd name="connsiteY34" fmla="*/ 73179 h 1485419"/>
-              <a:gd name="connsiteX35" fmla="*/ 497840 w 904309"/>
-              <a:gd name="connsiteY35" fmla="*/ 42699 h 1485419"/>
-              <a:gd name="connsiteX36" fmla="*/ 558800 w 904309"/>
-              <a:gd name="connsiteY36" fmla="*/ 32539 h 1485419"/>
-              <a:gd name="connsiteX37" fmla="*/ 660400 w 904309"/>
-              <a:gd name="connsiteY37" fmla="*/ 2059 h 1485419"/>
-            </a:gdLst>
-            <a:ahLst/>
-            <a:cxnLst>
-              <a:cxn ang="0">
-                <a:pos x="connsiteX0" y="connsiteY0"/>
-              </a:cxn>
-              <a:cxn ang="0">
-                <a:pos x="connsiteX1" y="connsiteY1"/>
-              </a:cxn>
-              <a:cxn ang="0">
-                <a:pos x="connsiteX2" y="connsiteY2"/>
-              </a:cxn>
-              <a:cxn ang="0">
-                <a:pos x="connsiteX3" y="connsiteY3"/>
-              </a:cxn>
-              <a:cxn ang="0">
-                <a:pos x="connsiteX4" y="connsiteY4"/>
-              </a:cxn>
-              <a:cxn ang="0">
-                <a:pos x="connsiteX5" y="connsiteY5"/>
-              </a:cxn>
-              <a:cxn ang="0">
-                <a:pos x="connsiteX6" y="connsiteY6"/>
-              </a:cxn>
-              <a:cxn ang="0">
-                <a:pos x="connsiteX7" y="connsiteY7"/>
-              </a:cxn>
-              <a:cxn ang="0">
-                <a:pos x="connsiteX8" y="connsiteY8"/>
-              </a:cxn>
-              <a:cxn ang="0">
-                <a:pos x="connsiteX9" y="connsiteY9"/>
-              </a:cxn>
-              <a:cxn ang="0">
-                <a:pos x="connsiteX10" y="connsiteY10"/>
-              </a:cxn>
-              <a:cxn ang="0">
-                <a:pos x="connsiteX11" y="connsiteY11"/>
-              </a:cxn>
-              <a:cxn ang="0">
-                <a:pos x="connsiteX12" y="connsiteY12"/>
-              </a:cxn>
-              <a:cxn ang="0">
-                <a:pos x="connsiteX13" y="connsiteY13"/>
-              </a:cxn>
-              <a:cxn ang="0">
-                <a:pos x="connsiteX14" y="connsiteY14"/>
-              </a:cxn>
-              <a:cxn ang="0">
-                <a:pos x="connsiteX15" y="connsiteY15"/>
-              </a:cxn>
-              <a:cxn ang="0">
-                <a:pos x="connsiteX16" y="connsiteY16"/>
-              </a:cxn>
-              <a:cxn ang="0">
-                <a:pos x="connsiteX17" y="connsiteY17"/>
-              </a:cxn>
-              <a:cxn ang="0">
-                <a:pos x="connsiteX18" y="connsiteY18"/>
-              </a:cxn>
-              <a:cxn ang="0">
-                <a:pos x="connsiteX19" y="connsiteY19"/>
-              </a:cxn>
-              <a:cxn ang="0">
-                <a:pos x="connsiteX20" y="connsiteY20"/>
-              </a:cxn>
-              <a:cxn ang="0">
-                <a:pos x="connsiteX21" y="connsiteY21"/>
-              </a:cxn>
-              <a:cxn ang="0">
-                <a:pos x="connsiteX22" y="connsiteY22"/>
-              </a:cxn>
-              <a:cxn ang="0">
-                <a:pos x="connsiteX23" y="connsiteY23"/>
-              </a:cxn>
-              <a:cxn ang="0">
-                <a:pos x="connsiteX24" y="connsiteY24"/>
-              </a:cxn>
-              <a:cxn ang="0">
-                <a:pos x="connsiteX25" y="connsiteY25"/>
-              </a:cxn>
-              <a:cxn ang="0">
-                <a:pos x="connsiteX26" y="connsiteY26"/>
-              </a:cxn>
-              <a:cxn ang="0">
-                <a:pos x="connsiteX27" y="connsiteY27"/>
-              </a:cxn>
-              <a:cxn ang="0">
-                <a:pos x="connsiteX28" y="connsiteY28"/>
-              </a:cxn>
-              <a:cxn ang="0">
-                <a:pos x="connsiteX29" y="connsiteY29"/>
-              </a:cxn>
-              <a:cxn ang="0">
-                <a:pos x="connsiteX30" y="connsiteY30"/>
-              </a:cxn>
-              <a:cxn ang="0">
-                <a:pos x="connsiteX31" y="connsiteY31"/>
-              </a:cxn>
-              <a:cxn ang="0">
-                <a:pos x="connsiteX32" y="connsiteY32"/>
-              </a:cxn>
-              <a:cxn ang="0">
-                <a:pos x="connsiteX33" y="connsiteY33"/>
-              </a:cxn>
-              <a:cxn ang="0">
-                <a:pos x="connsiteX34" y="connsiteY34"/>
-              </a:cxn>
-              <a:cxn ang="0">
-                <a:pos x="connsiteX35" y="connsiteY35"/>
-              </a:cxn>
-              <a:cxn ang="0">
-                <a:pos x="connsiteX36" y="connsiteY36"/>
-              </a:cxn>
-              <a:cxn ang="0">
-                <a:pos x="connsiteX37" y="connsiteY37"/>
-              </a:cxn>
-            </a:cxnLst>
-            <a:rect l="l" t="t" r="r" b="b"/>
-            <a:pathLst>
-              <a:path w="904309" h="1485419">
-                <a:moveTo>
-                  <a:pt x="660400" y="2059"/>
-                </a:moveTo>
-                <a:cubicBezTo>
-                  <a:pt x="701040" y="-1328"/>
-                  <a:pt x="757312" y="-2095"/>
-                  <a:pt x="802640" y="12219"/>
-                </a:cubicBezTo>
-                <a:cubicBezTo>
-                  <a:pt x="842341" y="24756"/>
-                  <a:pt x="868500" y="93139"/>
-                  <a:pt x="883920" y="123979"/>
-                </a:cubicBezTo>
-                <a:cubicBezTo>
-                  <a:pt x="887307" y="147686"/>
-                  <a:pt x="890143" y="171477"/>
-                  <a:pt x="894080" y="195099"/>
-                </a:cubicBezTo>
-                <a:cubicBezTo>
-                  <a:pt x="896919" y="212133"/>
-                  <a:pt x="905148" y="228654"/>
-                  <a:pt x="904240" y="245899"/>
-                </a:cubicBezTo>
-                <a:cubicBezTo>
-                  <a:pt x="899348" y="338844"/>
-                  <a:pt x="876860" y="421061"/>
-                  <a:pt x="853440" y="510059"/>
-                </a:cubicBezTo>
-                <a:cubicBezTo>
-                  <a:pt x="847165" y="533903"/>
-                  <a:pt x="838286" y="557071"/>
-                  <a:pt x="833120" y="581179"/>
-                </a:cubicBezTo>
-                <a:cubicBezTo>
-                  <a:pt x="828102" y="604595"/>
-                  <a:pt x="828768" y="629067"/>
-                  <a:pt x="822960" y="652299"/>
-                </a:cubicBezTo>
-                <a:cubicBezTo>
-                  <a:pt x="818537" y="669992"/>
-                  <a:pt x="808945" y="685986"/>
-                  <a:pt x="802640" y="703099"/>
-                </a:cubicBezTo>
-                <a:cubicBezTo>
-                  <a:pt x="749994" y="845995"/>
-                  <a:pt x="762514" y="807979"/>
-                  <a:pt x="731520" y="916459"/>
-                </a:cubicBezTo>
-                <a:cubicBezTo>
-                  <a:pt x="724501" y="1014730"/>
-                  <a:pt x="727177" y="1039772"/>
-                  <a:pt x="711200" y="1119659"/>
-                </a:cubicBezTo>
-                <a:cubicBezTo>
-                  <a:pt x="708462" y="1133351"/>
-                  <a:pt x="706541" y="1147464"/>
-                  <a:pt x="701040" y="1160299"/>
-                </a:cubicBezTo>
-                <a:cubicBezTo>
-                  <a:pt x="641954" y="1298167"/>
-                  <a:pt x="713371" y="1092825"/>
-                  <a:pt x="670560" y="1221259"/>
-                </a:cubicBezTo>
-                <a:cubicBezTo>
-                  <a:pt x="660400" y="1292379"/>
-                  <a:pt x="658983" y="1365308"/>
-                  <a:pt x="640080" y="1434619"/>
-                </a:cubicBezTo>
-                <a:cubicBezTo>
-                  <a:pt x="637262" y="1444951"/>
-                  <a:pt x="619898" y="1441837"/>
-                  <a:pt x="609600" y="1444779"/>
-                </a:cubicBezTo>
-                <a:cubicBezTo>
-                  <a:pt x="596174" y="1448615"/>
-                  <a:pt x="582717" y="1452546"/>
-                  <a:pt x="568960" y="1454939"/>
-                </a:cubicBezTo>
-                <a:cubicBezTo>
-                  <a:pt x="504780" y="1466101"/>
-                  <a:pt x="440267" y="1475259"/>
-                  <a:pt x="375920" y="1485419"/>
-                </a:cubicBezTo>
-                <a:cubicBezTo>
-                  <a:pt x="361676" y="1481349"/>
-                  <a:pt x="282968" y="1463587"/>
-                  <a:pt x="264160" y="1444779"/>
-                </a:cubicBezTo>
-                <a:cubicBezTo>
-                  <a:pt x="250196" y="1430815"/>
-                  <a:pt x="245528" y="1409777"/>
-                  <a:pt x="233680" y="1393979"/>
-                </a:cubicBezTo>
-                <a:cubicBezTo>
-                  <a:pt x="214946" y="1369000"/>
-                  <a:pt x="190040" y="1348839"/>
-                  <a:pt x="172720" y="1322859"/>
-                </a:cubicBezTo>
-                <a:cubicBezTo>
-                  <a:pt x="155917" y="1297655"/>
-                  <a:pt x="146678" y="1268121"/>
-                  <a:pt x="132080" y="1241579"/>
-                </a:cubicBezTo>
-                <a:cubicBezTo>
-                  <a:pt x="109406" y="1200354"/>
-                  <a:pt x="75838" y="1164294"/>
-                  <a:pt x="60960" y="1119659"/>
-                </a:cubicBezTo>
-                <a:cubicBezTo>
-                  <a:pt x="54187" y="1099339"/>
-                  <a:pt x="48329" y="1078690"/>
-                  <a:pt x="40640" y="1058699"/>
-                </a:cubicBezTo>
-                <a:cubicBezTo>
-                  <a:pt x="-17191" y="908338"/>
-                  <a:pt x="27921" y="1040863"/>
-                  <a:pt x="0" y="957099"/>
-                </a:cubicBezTo>
-                <a:cubicBezTo>
-                  <a:pt x="10160" y="916459"/>
-                  <a:pt x="16641" y="874718"/>
-                  <a:pt x="30480" y="835179"/>
-                </a:cubicBezTo>
-                <a:cubicBezTo>
-                  <a:pt x="40487" y="806588"/>
-                  <a:pt x="68704" y="784094"/>
-                  <a:pt x="71120" y="753899"/>
-                </a:cubicBezTo>
-                <a:cubicBezTo>
-                  <a:pt x="79099" y="654164"/>
-                  <a:pt x="47678" y="570771"/>
-                  <a:pt x="20320" y="479579"/>
-                </a:cubicBezTo>
-                <a:cubicBezTo>
-                  <a:pt x="27093" y="462646"/>
-                  <a:pt x="34506" y="445954"/>
-                  <a:pt x="40640" y="428779"/>
-                </a:cubicBezTo>
-                <a:cubicBezTo>
-                  <a:pt x="51446" y="398522"/>
-                  <a:pt x="59839" y="367422"/>
-                  <a:pt x="71120" y="337339"/>
-                </a:cubicBezTo>
-                <a:cubicBezTo>
-                  <a:pt x="80176" y="313189"/>
-                  <a:pt x="83362" y="284457"/>
-                  <a:pt x="101600" y="266219"/>
-                </a:cubicBezTo>
-                <a:cubicBezTo>
-                  <a:pt x="113811" y="254008"/>
-                  <a:pt x="135467" y="259446"/>
-                  <a:pt x="152400" y="256059"/>
-                </a:cubicBezTo>
-                <a:cubicBezTo>
-                  <a:pt x="162560" y="232352"/>
-                  <a:pt x="164642" y="203177"/>
-                  <a:pt x="182880" y="184939"/>
-                </a:cubicBezTo>
-                <a:cubicBezTo>
-                  <a:pt x="198026" y="169793"/>
-                  <a:pt x="243840" y="164619"/>
-                  <a:pt x="243840" y="164619"/>
-                </a:cubicBezTo>
-                <a:cubicBezTo>
-                  <a:pt x="320947" y="102934"/>
-                  <a:pt x="266131" y="143067"/>
-                  <a:pt x="345440" y="93499"/>
-                </a:cubicBezTo>
-                <a:cubicBezTo>
-                  <a:pt x="355795" y="87027"/>
-                  <a:pt x="364336" y="77040"/>
-                  <a:pt x="375920" y="73179"/>
-                </a:cubicBezTo>
-                <a:cubicBezTo>
-                  <a:pt x="415661" y="59932"/>
-                  <a:pt x="456519" y="49586"/>
-                  <a:pt x="497840" y="42699"/>
-                </a:cubicBezTo>
-                <a:cubicBezTo>
-                  <a:pt x="518160" y="39312"/>
-                  <a:pt x="538815" y="37535"/>
-                  <a:pt x="558800" y="32539"/>
-                </a:cubicBezTo>
-                <a:cubicBezTo>
-                  <a:pt x="579580" y="27344"/>
-                  <a:pt x="619760" y="5446"/>
-                  <a:pt x="660400" y="2059"/>
-                </a:cubicBezTo>
-                <a:close/>
-              </a:path>
-            </a:pathLst>
-          </a:custGeom>
-          <a:solidFill>
-            <a:schemeClr val="accent6">
-              <a:lumMod val="40000"/>
-              <a:lumOff val="60000"/>
-              <a:alpha val="25000"/>
-            </a:schemeClr>
-          </a:solidFill>
-        </p:spPr>
-        <p:style>
-          <a:lnRef idx="2">
-            <a:schemeClr val="accent1">
-              <a:shade val="50000"/>
-            </a:schemeClr>
-          </a:lnRef>
-          <a:fillRef idx="1">
-            <a:schemeClr val="accent1"/>
-          </a:fillRef>
-          <a:effectRef idx="0">
-            <a:schemeClr val="accent1"/>
-          </a:effectRef>
-          <a:fontRef idx="minor">
-            <a:schemeClr val="lt1"/>
-          </a:fontRef>
-        </p:style>
-        <p:txBody>
-          <a:bodyPr rtlCol="0" anchor="ctr"/>
-          <a:lstStyle/>
-          <a:p>
-            <a:pPr marL="0" marR="0" lvl="0" indent="0" algn="ctr" defTabSz="914400" rtl="0" eaLnBrk="1" fontAlgn="auto" latinLnBrk="0" hangingPunct="1">
-              <a:lnSpc>
-                <a:spcPct val="100000"/>
-              </a:lnSpc>
-              <a:spcBef>
-                <a:spcPts val="0"/>
-              </a:spcBef>
-              <a:spcAft>
-                <a:spcPts val="0"/>
-              </a:spcAft>
-              <a:buClrTx/>
-              <a:buSzTx/>
-              <a:buFontTx/>
-              <a:buNone/>
-              <a:tabLst/>
-              <a:defRPr/>
-            </a:pPr>
-            <a:endParaRPr kumimoji="0" lang="en-US" sz="1800" b="0" i="0" u="none" strike="noStrike" kern="1200" cap="none" spc="0" normalizeH="0" baseline="0" noProof="0">
-              <a:ln>
-                <a:noFill/>
-              </a:ln>
-              <a:solidFill>
-                <a:prstClr val="white"/>
-              </a:solidFill>
-              <a:effectLst/>
-              <a:uLnTx/>
-              <a:uFillTx/>
-              <a:latin typeface="Calibri" panose="020F0502020204030204"/>
-              <a:ea typeface="+mn-ea"/>
-              <a:cs typeface="+mn-cs"/>
-            </a:endParaRPr>
-          </a:p>
-        </p:txBody>
-      </p:sp>
     </p:spTree>
     <p:extLst>
       <p:ext uri="{BB962C8B-B14F-4D97-AF65-F5344CB8AC3E}">
-        <p14:creationId xmlns:p14="http://schemas.microsoft.com/office/powerpoint/2010/main" val="707823144"/>
+        <p14:creationId xmlns:p14="http://schemas.microsoft.com/office/powerpoint/2010/main" val="3346686199"/>
       </p:ext>
     </p:extLst>
   </p:cSld>
